--- a/Last/LEC/01-1_Intro.pptx
+++ b/Last/LEC/01-1_Intro.pptx
@@ -5,7 +5,7 @@
     <p:sldMasterId id="2147483672" r:id="rId1"/>
   </p:sldMasterIdLst>
   <p:notesMasterIdLst>
-    <p:notesMasterId r:id="rId23"/>
+    <p:notesMasterId r:id="rId22"/>
   </p:notesMasterIdLst>
   <p:sldIdLst>
     <p:sldId id="256" r:id="rId2"/>
@@ -19,16 +19,15 @@
     <p:sldId id="409" r:id="rId10"/>
     <p:sldId id="410" r:id="rId11"/>
     <p:sldId id="411" r:id="rId12"/>
-    <p:sldId id="412" r:id="rId13"/>
-    <p:sldId id="428" r:id="rId14"/>
-    <p:sldId id="441" r:id="rId15"/>
-    <p:sldId id="376" r:id="rId16"/>
-    <p:sldId id="394" r:id="rId17"/>
-    <p:sldId id="381" r:id="rId18"/>
-    <p:sldId id="442" r:id="rId19"/>
-    <p:sldId id="395" r:id="rId20"/>
+    <p:sldId id="444" r:id="rId13"/>
+    <p:sldId id="445" r:id="rId14"/>
+    <p:sldId id="446" r:id="rId15"/>
+    <p:sldId id="447" r:id="rId16"/>
+    <p:sldId id="448" r:id="rId17"/>
+    <p:sldId id="449" r:id="rId18"/>
+    <p:sldId id="450" r:id="rId19"/>
+    <p:sldId id="443" r:id="rId20"/>
     <p:sldId id="388" r:id="rId21"/>
-    <p:sldId id="443" r:id="rId22"/>
   </p:sldIdLst>
   <p:sldSz cx="12192000" cy="6858000"/>
   <p:notesSz cx="6858000" cy="9144000"/>
@@ -217,7 +216,7 @@
           <a:p>
             <a:fld id="{CDA96C9A-3213-B245-BC64-7E419D14BD9D}" type="datetimeFigureOut">
               <a:rPr lang="ru-RU" smtClean="0"/>
-              <a:t>12.02.2026</a:t>
+              <a:t>04.05.2026</a:t>
             </a:fld>
             <a:endParaRPr lang="ru-RU"/>
           </a:p>
@@ -974,7 +973,7 @@
           <a:p>
             <a:fld id="{9DA1EE30-E435-D745-B23A-FF31C831763F}" type="slidenum">
               <a:rPr lang="ru-RU" smtClean="0"/>
-              <a:t>14</a:t>
+              <a:t>15</a:t>
             </a:fld>
             <a:endParaRPr lang="ru-RU"/>
           </a:p>
@@ -983,259 +982,7 @@
     </p:spTree>
     <p:extLst>
       <p:ext uri="{BB962C8B-B14F-4D97-AF65-F5344CB8AC3E}">
-        <p14:creationId xmlns:p14="http://schemas.microsoft.com/office/powerpoint/2010/main" val="413101970"/>
-      </p:ext>
-    </p:extLst>
-  </p:cSld>
-  <p:clrMapOvr>
-    <a:masterClrMapping/>
-  </p:clrMapOvr>
-</p:notes>
-</file>
-
-<file path=ppt/notesSlides/notesSlide7.xml><?xml version="1.0" encoding="utf-8"?>
-<p:notes xmlns:a="http://schemas.openxmlformats.org/drawingml/2006/main" xmlns:r="http://schemas.openxmlformats.org/officeDocument/2006/relationships" xmlns:p="http://schemas.openxmlformats.org/presentationml/2006/main">
-  <p:cSld>
-    <p:spTree>
-      <p:nvGrpSpPr>
-        <p:cNvPr id="1" name=""/>
-        <p:cNvGrpSpPr/>
-        <p:nvPr/>
-      </p:nvGrpSpPr>
-      <p:grpSpPr>
-        <a:xfrm>
-          <a:off x="0" y="0"/>
-          <a:ext cx="0" cy="0"/>
-          <a:chOff x="0" y="0"/>
-          <a:chExt cx="0" cy="0"/>
-        </a:xfrm>
-      </p:grpSpPr>
-      <p:sp>
-        <p:nvSpPr>
-          <p:cNvPr id="2" name="Образ слайда 1"/>
-          <p:cNvSpPr>
-            <a:spLocks noGrp="1" noRot="1" noChangeAspect="1"/>
-          </p:cNvSpPr>
-          <p:nvPr>
-            <p:ph type="sldImg"/>
-          </p:nvPr>
-        </p:nvSpPr>
-        <p:spPr/>
-      </p:sp>
-      <p:sp>
-        <p:nvSpPr>
-          <p:cNvPr id="3" name="Заметки 2"/>
-          <p:cNvSpPr>
-            <a:spLocks noGrp="1"/>
-          </p:cNvSpPr>
-          <p:nvPr>
-            <p:ph type="body" idx="1"/>
-          </p:nvPr>
-        </p:nvSpPr>
-        <p:spPr/>
-        <p:txBody>
-          <a:bodyPr/>
-          <a:lstStyle/>
-          <a:p>
-            <a:endParaRPr lang="ru-RU" dirty="0"/>
-          </a:p>
-        </p:txBody>
-      </p:sp>
-      <p:sp>
-        <p:nvSpPr>
-          <p:cNvPr id="4" name="Номер слайда 3"/>
-          <p:cNvSpPr>
-            <a:spLocks noGrp="1"/>
-          </p:cNvSpPr>
-          <p:nvPr>
-            <p:ph type="sldNum" sz="quarter" idx="5"/>
-          </p:nvPr>
-        </p:nvSpPr>
-        <p:spPr/>
-        <p:txBody>
-          <a:bodyPr/>
-          <a:lstStyle/>
-          <a:p>
-            <a:fld id="{9DA1EE30-E435-D745-B23A-FF31C831763F}" type="slidenum">
-              <a:rPr lang="ru-RU" smtClean="0"/>
-              <a:t>15</a:t>
-            </a:fld>
-            <a:endParaRPr lang="ru-RU"/>
-          </a:p>
-        </p:txBody>
-      </p:sp>
-    </p:spTree>
-    <p:extLst>
-      <p:ext uri="{BB962C8B-B14F-4D97-AF65-F5344CB8AC3E}">
-        <p14:creationId xmlns:p14="http://schemas.microsoft.com/office/powerpoint/2010/main" val="4125780655"/>
-      </p:ext>
-    </p:extLst>
-  </p:cSld>
-  <p:clrMapOvr>
-    <a:masterClrMapping/>
-  </p:clrMapOvr>
-</p:notes>
-</file>
-
-<file path=ppt/notesSlides/notesSlide8.xml><?xml version="1.0" encoding="utf-8"?>
-<p:notes xmlns:a="http://schemas.openxmlformats.org/drawingml/2006/main" xmlns:r="http://schemas.openxmlformats.org/officeDocument/2006/relationships" xmlns:p="http://schemas.openxmlformats.org/presentationml/2006/main">
-  <p:cSld>
-    <p:spTree>
-      <p:nvGrpSpPr>
-        <p:cNvPr id="1" name=""/>
-        <p:cNvGrpSpPr/>
-        <p:nvPr/>
-      </p:nvGrpSpPr>
-      <p:grpSpPr>
-        <a:xfrm>
-          <a:off x="0" y="0"/>
-          <a:ext cx="0" cy="0"/>
-          <a:chOff x="0" y="0"/>
-          <a:chExt cx="0" cy="0"/>
-        </a:xfrm>
-      </p:grpSpPr>
-      <p:sp>
-        <p:nvSpPr>
-          <p:cNvPr id="2" name="Образ слайда 1"/>
-          <p:cNvSpPr>
-            <a:spLocks noGrp="1" noRot="1" noChangeAspect="1"/>
-          </p:cNvSpPr>
-          <p:nvPr>
-            <p:ph type="sldImg"/>
-          </p:nvPr>
-        </p:nvSpPr>
-        <p:spPr/>
-      </p:sp>
-      <p:sp>
-        <p:nvSpPr>
-          <p:cNvPr id="3" name="Заметки 2"/>
-          <p:cNvSpPr>
-            <a:spLocks noGrp="1"/>
-          </p:cNvSpPr>
-          <p:nvPr>
-            <p:ph type="body" idx="1"/>
-          </p:nvPr>
-        </p:nvSpPr>
-        <p:spPr/>
-        <p:txBody>
-          <a:bodyPr/>
-          <a:lstStyle/>
-          <a:p>
-            <a:endParaRPr lang="ru-RU" dirty="0"/>
-          </a:p>
-        </p:txBody>
-      </p:sp>
-      <p:sp>
-        <p:nvSpPr>
-          <p:cNvPr id="4" name="Номер слайда 3"/>
-          <p:cNvSpPr>
-            <a:spLocks noGrp="1"/>
-          </p:cNvSpPr>
-          <p:nvPr>
-            <p:ph type="sldNum" sz="quarter" idx="5"/>
-          </p:nvPr>
-        </p:nvSpPr>
-        <p:spPr/>
-        <p:txBody>
-          <a:bodyPr/>
-          <a:lstStyle/>
-          <a:p>
-            <a:fld id="{9DA1EE30-E435-D745-B23A-FF31C831763F}" type="slidenum">
-              <a:rPr lang="ru-RU" smtClean="0"/>
-              <a:t>17</a:t>
-            </a:fld>
-            <a:endParaRPr lang="ru-RU"/>
-          </a:p>
-        </p:txBody>
-      </p:sp>
-    </p:spTree>
-    <p:extLst>
-      <p:ext uri="{BB962C8B-B14F-4D97-AF65-F5344CB8AC3E}">
-        <p14:creationId xmlns:p14="http://schemas.microsoft.com/office/powerpoint/2010/main" val="2832973436"/>
-      </p:ext>
-    </p:extLst>
-  </p:cSld>
-  <p:clrMapOvr>
-    <a:masterClrMapping/>
-  </p:clrMapOvr>
-</p:notes>
-</file>
-
-<file path=ppt/notesSlides/notesSlide9.xml><?xml version="1.0" encoding="utf-8"?>
-<p:notes xmlns:a="http://schemas.openxmlformats.org/drawingml/2006/main" xmlns:r="http://schemas.openxmlformats.org/officeDocument/2006/relationships" xmlns:p="http://schemas.openxmlformats.org/presentationml/2006/main">
-  <p:cSld>
-    <p:spTree>
-      <p:nvGrpSpPr>
-        <p:cNvPr id="1" name=""/>
-        <p:cNvGrpSpPr/>
-        <p:nvPr/>
-      </p:nvGrpSpPr>
-      <p:grpSpPr>
-        <a:xfrm>
-          <a:off x="0" y="0"/>
-          <a:ext cx="0" cy="0"/>
-          <a:chOff x="0" y="0"/>
-          <a:chExt cx="0" cy="0"/>
-        </a:xfrm>
-      </p:grpSpPr>
-      <p:sp>
-        <p:nvSpPr>
-          <p:cNvPr id="2" name="Образ слайда 1"/>
-          <p:cNvSpPr>
-            <a:spLocks noGrp="1" noRot="1" noChangeAspect="1"/>
-          </p:cNvSpPr>
-          <p:nvPr>
-            <p:ph type="sldImg"/>
-          </p:nvPr>
-        </p:nvSpPr>
-        <p:spPr/>
-      </p:sp>
-      <p:sp>
-        <p:nvSpPr>
-          <p:cNvPr id="3" name="Заметки 2"/>
-          <p:cNvSpPr>
-            <a:spLocks noGrp="1"/>
-          </p:cNvSpPr>
-          <p:nvPr>
-            <p:ph type="body" idx="1"/>
-          </p:nvPr>
-        </p:nvSpPr>
-        <p:spPr/>
-        <p:txBody>
-          <a:bodyPr/>
-          <a:lstStyle/>
-          <a:p>
-            <a:endParaRPr lang="ru-RU" dirty="0"/>
-          </a:p>
-        </p:txBody>
-      </p:sp>
-      <p:sp>
-        <p:nvSpPr>
-          <p:cNvPr id="4" name="Номер слайда 3"/>
-          <p:cNvSpPr>
-            <a:spLocks noGrp="1"/>
-          </p:cNvSpPr>
-          <p:nvPr>
-            <p:ph type="sldNum" sz="quarter" idx="5"/>
-          </p:nvPr>
-        </p:nvSpPr>
-        <p:spPr/>
-        <p:txBody>
-          <a:bodyPr/>
-          <a:lstStyle/>
-          <a:p>
-            <a:fld id="{9DA1EE30-E435-D745-B23A-FF31C831763F}" type="slidenum">
-              <a:rPr lang="ru-RU" smtClean="0"/>
-              <a:t>19</a:t>
-            </a:fld>
-            <a:endParaRPr lang="ru-RU"/>
-          </a:p>
-        </p:txBody>
-      </p:sp>
-    </p:spTree>
-    <p:extLst>
-      <p:ext uri="{BB962C8B-B14F-4D97-AF65-F5344CB8AC3E}">
-        <p14:creationId xmlns:p14="http://schemas.microsoft.com/office/powerpoint/2010/main" val="1056181884"/>
+        <p14:creationId xmlns:p14="http://schemas.microsoft.com/office/powerpoint/2010/main" val="2730858212"/>
       </p:ext>
     </p:extLst>
   </p:cSld>
@@ -1376,7 +1123,7 @@
           <a:p>
             <a:fld id="{BEE214BE-636D-8A45-BCA6-8B7ED77AA124}" type="datetime1">
               <a:rPr lang="ru-RU" smtClean="0"/>
-              <a:t>12.02.2026</a:t>
+              <a:t>04.05.2026</a:t>
             </a:fld>
             <a:endParaRPr lang="en-US"/>
           </a:p>
@@ -1546,7 +1293,7 @@
           <a:p>
             <a:fld id="{5855274A-4ED4-0146-A3E9-88EF200B5196}" type="datetime1">
               <a:rPr lang="ru-RU" smtClean="0"/>
-              <a:t>12.02.2026</a:t>
+              <a:t>04.05.2026</a:t>
             </a:fld>
             <a:endParaRPr lang="en-US"/>
           </a:p>
@@ -1726,7 +1473,7 @@
           <a:p>
             <a:fld id="{8A78DFF1-9FDC-144B-973E-B4B4609709DF}" type="datetime1">
               <a:rPr lang="ru-RU" smtClean="0"/>
-              <a:t>12.02.2026</a:t>
+              <a:t>04.05.2026</a:t>
             </a:fld>
             <a:endParaRPr lang="en-US"/>
           </a:p>
@@ -1896,7 +1643,7 @@
           <a:p>
             <a:fld id="{8233A339-F8AE-5C45-BEAE-07EF9DC78B60}" type="datetime1">
               <a:rPr lang="ru-RU" smtClean="0"/>
-              <a:t>12.02.2026</a:t>
+              <a:t>04.05.2026</a:t>
             </a:fld>
             <a:endParaRPr lang="en-US"/>
           </a:p>
@@ -2142,7 +1889,7 @@
           <a:p>
             <a:fld id="{7586FDE4-97E0-CE4A-988C-F30B221290A7}" type="datetime1">
               <a:rPr lang="ru-RU" smtClean="0"/>
-              <a:t>12.02.2026</a:t>
+              <a:t>04.05.2026</a:t>
             </a:fld>
             <a:endParaRPr lang="en-US"/>
           </a:p>
@@ -2374,7 +2121,7 @@
           <a:p>
             <a:fld id="{C36ECE8B-8DEC-154E-9F03-047C8DDA20DC}" type="datetime1">
               <a:rPr lang="ru-RU" smtClean="0"/>
-              <a:t>12.02.2026</a:t>
+              <a:t>04.05.2026</a:t>
             </a:fld>
             <a:endParaRPr lang="en-US"/>
           </a:p>
@@ -2741,7 +2488,7 @@
           <a:p>
             <a:fld id="{440816D5-BDB8-B34B-8ACA-ECBDD12E7321}" type="datetime1">
               <a:rPr lang="ru-RU" smtClean="0"/>
-              <a:t>12.02.2026</a:t>
+              <a:t>04.05.2026</a:t>
             </a:fld>
             <a:endParaRPr lang="en-US"/>
           </a:p>
@@ -2859,7 +2606,7 @@
           <a:p>
             <a:fld id="{8A8C589A-5627-764C-AF96-C1E2F9A00A4D}" type="datetime1">
               <a:rPr lang="ru-RU" smtClean="0"/>
-              <a:t>12.02.2026</a:t>
+              <a:t>04.05.2026</a:t>
             </a:fld>
             <a:endParaRPr lang="en-US"/>
           </a:p>
@@ -2954,7 +2701,7 @@
           <a:p>
             <a:fld id="{603EE0D0-1696-6D4F-B917-4AFB24A74E8B}" type="datetime1">
               <a:rPr lang="ru-RU" smtClean="0"/>
-              <a:t>12.02.2026</a:t>
+              <a:t>04.05.2026</a:t>
             </a:fld>
             <a:endParaRPr lang="en-US"/>
           </a:p>
@@ -3231,7 +2978,7 @@
           <a:p>
             <a:fld id="{13C8A91E-B09B-2240-9AA3-B1D4BCC6296E}" type="datetime1">
               <a:rPr lang="ru-RU" smtClean="0"/>
-              <a:t>12.02.2026</a:t>
+              <a:t>04.05.2026</a:t>
             </a:fld>
             <a:endParaRPr lang="en-US"/>
           </a:p>
@@ -3488,7 +3235,7 @@
           <a:p>
             <a:fld id="{3BE9760E-DA8D-6747-B31E-62858C8727B8}" type="datetime1">
               <a:rPr lang="ru-RU" smtClean="0"/>
-              <a:t>12.02.2026</a:t>
+              <a:t>04.05.2026</a:t>
             </a:fld>
             <a:endParaRPr lang="en-US"/>
           </a:p>
@@ -3701,7 +3448,7 @@
           <a:p>
             <a:fld id="{D31305DF-F750-CC43-967D-51A20925EE94}" type="datetime1">
               <a:rPr lang="ru-RU" smtClean="0"/>
-              <a:t>12.02.2026</a:t>
+              <a:t>04.05.2026</a:t>
             </a:fld>
             <a:endParaRPr lang="en-US"/>
           </a:p>
@@ -5064,7 +4811,7 @@
         <p:spPr>
           <a:xfrm>
             <a:off x="743483" y="934359"/>
-            <a:ext cx="10932920" cy="3523342"/>
+            <a:ext cx="10932920" cy="2862942"/>
           </a:xfrm>
         </p:spPr>
         <p:txBody>
@@ -5075,7 +4822,11 @@
           <a:p>
             <a:r>
               <a:rPr lang="ru-RU" sz="8000" dirty="0" smtClean="0"/>
-              <a:t>Типы временных рядов</a:t>
+              <a:t>Постановка задач </a:t>
+            </a:r>
+            <a:r>
+              <a:rPr lang="ru-RU" sz="8000" dirty="0"/>
+              <a:t>предсказания ВР</a:t>
             </a:r>
             <a:endParaRPr lang="en-US" sz="8000" dirty="0"/>
           </a:p>
@@ -5113,7 +4864,7 @@
     </p:spTree>
     <p:extLst>
       <p:ext uri="{BB962C8B-B14F-4D97-AF65-F5344CB8AC3E}">
-        <p14:creationId xmlns:p14="http://schemas.microsoft.com/office/powerpoint/2010/main" val="911809757"/>
+        <p14:creationId xmlns:p14="http://schemas.microsoft.com/office/powerpoint/2010/main" val="1316420692"/>
       </p:ext>
     </p:extLst>
   </p:cSld>
@@ -5152,7 +4903,7 @@
           <p:cNvPr id="2" name="Заголовок 1">
             <a:extLst>
               <a:ext uri="{FF2B5EF4-FFF2-40B4-BE49-F238E27FC236}">
-                <a16:creationId xmlns:a16="http://schemas.microsoft.com/office/drawing/2014/main" id="{1228D024-4605-8CBD-DFD0-F3F657EDAA48}"/>
+                <a16:creationId xmlns:a16="http://schemas.microsoft.com/office/drawing/2014/main" id="{02EE2B06-B173-C52C-7F74-302136EB4528}"/>
               </a:ext>
             </a:extLst>
           </p:cNvPr>
@@ -5165,20 +4916,19 @@
         </p:nvSpPr>
         <p:spPr>
           <a:xfrm>
-            <a:off x="191069" y="365126"/>
-            <a:ext cx="11162731" cy="603866"/>
-          </a:xfrm>
-        </p:spPr>
-        <p:txBody>
-          <a:bodyPr>
-            <a:normAutofit fontScale="90000"/>
-          </a:bodyPr>
-          <a:lstStyle/>
-          <a:p>
-            <a:r>
-              <a:rPr lang="ru-RU" dirty="0"/>
-              <a:t>Представление ВР</a:t>
-            </a:r>
+            <a:off x="566057" y="365125"/>
+            <a:ext cx="10787743" cy="1047641"/>
+          </a:xfrm>
+        </p:spPr>
+        <p:txBody>
+          <a:bodyPr/>
+          <a:lstStyle/>
+          <a:p>
+            <a:r>
+              <a:rPr lang="ru-RU" b="1" dirty="0"/>
+              <a:t>Задачи анализа временных рядов</a:t>
+            </a:r>
+            <a:endParaRPr lang="ru-RU" dirty="0"/>
           </a:p>
         </p:txBody>
       </p:sp>
@@ -5187,7 +4937,7 @@
           <p:cNvPr id="3" name="Объект 2">
             <a:extLst>
               <a:ext uri="{FF2B5EF4-FFF2-40B4-BE49-F238E27FC236}">
-                <a16:creationId xmlns:a16="http://schemas.microsoft.com/office/drawing/2014/main" id="{D1A626E8-756A-B6C0-CE0D-154ECACBDE64}"/>
+                <a16:creationId xmlns:a16="http://schemas.microsoft.com/office/drawing/2014/main" id="{EE1CFB72-A2ED-B011-6D8A-BC8972130B60}"/>
               </a:ext>
             </a:extLst>
           </p:cNvPr>
@@ -5200,8 +4950,8 @@
         </p:nvSpPr>
         <p:spPr>
           <a:xfrm>
-            <a:off x="514633" y="1115941"/>
-            <a:ext cx="11162731" cy="4670709"/>
+            <a:off x="293914" y="1412766"/>
+            <a:ext cx="11417016" cy="4351338"/>
           </a:xfrm>
         </p:spPr>
         <p:txBody>
@@ -5214,33 +4964,144 @@
               <a:buNone/>
             </a:pPr>
             <a:r>
+              <a:rPr lang="ru-RU" sz="2400" b="1" dirty="0"/>
+              <a:t>Последовательной ВР(</a:t>
+            </a:r>
+            <a:r>
+              <a:rPr lang="ru-RU" sz="2400" b="1" dirty="0" err="1"/>
+              <a:t>неприрывный</a:t>
+            </a:r>
+            <a:r>
+              <a:rPr lang="ru-RU" sz="2400" b="1" dirty="0"/>
+              <a:t>)</a:t>
+            </a:r>
+          </a:p>
+          <a:p>
+            <a:r>
               <a:rPr lang="ru-RU" sz="2400" dirty="0"/>
-              <a:t>Временной ряд — это список чисел (наблюдений) с информацией о том, когда эти числа были записаны (индекс). Числа могут быть в одном столбце (</a:t>
+              <a:t>Предсказание будущих значений ВР (прогнозирование, T</a:t>
+            </a:r>
+            <a:r>
+              <a:rPr lang="en-US" sz="2400" dirty="0" err="1"/>
+              <a:t>ime</a:t>
+            </a:r>
+            <a:r>
+              <a:rPr lang="en-US" sz="2400" dirty="0"/>
+              <a:t> series forecasting)</a:t>
+            </a:r>
+            <a:endParaRPr lang="ru-RU" sz="2400" dirty="0"/>
+          </a:p>
+          <a:p>
+            <a:r>
+              <a:rPr lang="en-US" sz="2400" dirty="0" err="1"/>
+              <a:t>По</a:t>
+            </a:r>
+            <a:r>
+              <a:rPr lang="ru-RU" sz="2400" dirty="0"/>
+              <a:t>иск аномалий/выбросов</a:t>
+            </a:r>
+            <a:r>
+              <a:rPr lang="en-US" sz="2400" dirty="0"/>
+              <a:t> (</a:t>
             </a:r>
             <a:r>
               <a:rPr lang="ru-RU" sz="2400" dirty="0" err="1"/>
-              <a:t>однопеременный</a:t>
+              <a:t>T</a:t>
+            </a:r>
+            <a:r>
+              <a:rPr lang="en-US" sz="2400" dirty="0" err="1"/>
+              <a:t>ime</a:t>
+            </a:r>
+            <a:r>
+              <a:rPr lang="en-US" sz="2400" dirty="0"/>
+              <a:t> series  anomaly detection)</a:t>
+            </a:r>
+            <a:endParaRPr lang="ru-RU" sz="2400" dirty="0"/>
+          </a:p>
+          <a:p>
+            <a:r>
+              <a:rPr lang="en-US" sz="2400" dirty="0" err="1"/>
+              <a:t>По</a:t>
             </a:r>
             <a:r>
               <a:rPr lang="ru-RU" sz="2400" dirty="0"/>
-              <a:t> ВР) или в нескольких (</a:t>
-            </a:r>
-            <a:r>
-              <a:rPr lang="ru-RU" sz="2400" dirty="0" err="1"/>
-              <a:t>многопеременный</a:t>
-            </a:r>
+              <a:t>иск точек новизны (изменений), сегментов ВР – новых паттернов поведения</a:t>
+            </a:r>
+          </a:p>
+          <a:p>
+            <a:pPr marL="0" indent="0">
+              <a:buNone/>
+            </a:pPr>
+            <a:r>
+              <a:rPr lang="ru-RU" sz="2400" b="1" dirty="0"/>
+              <a:t>Сегменты ВР (сигналы)</a:t>
+            </a:r>
+          </a:p>
+          <a:p>
             <a:r>
               <a:rPr lang="ru-RU" sz="2400" dirty="0"/>
-              <a:t> ВР). Иногда существуют дополнительные столбцы с более подробной информацией о наблюдениях, известные как </a:t>
-            </a:r>
-            <a:r>
-              <a:rPr lang="ru-RU" sz="2400" dirty="0" err="1"/>
-              <a:t>ковариаты</a:t>
+              <a:t>Классификация сегментов/шаблонов поведения</a:t>
+            </a:r>
+            <a:r>
+              <a:rPr lang="en-US" sz="2400" dirty="0"/>
+              <a:t>  </a:t>
             </a:r>
             <a:r>
               <a:rPr lang="ru-RU" sz="2400" dirty="0"/>
-              <a:t> или экзогенные переменные. </a:t>
-            </a:r>
+              <a:t>(T</a:t>
+            </a:r>
+            <a:r>
+              <a:rPr lang="en-US" sz="2400" dirty="0" err="1"/>
+              <a:t>ime</a:t>
+            </a:r>
+            <a:r>
+              <a:rPr lang="en-US" sz="2400" dirty="0"/>
+              <a:t> series classification)</a:t>
+            </a:r>
+            <a:endParaRPr lang="ru-RU" sz="2400" dirty="0"/>
+          </a:p>
+          <a:p>
+            <a:r>
+              <a:rPr lang="ru-RU" sz="2400" dirty="0"/>
+              <a:t>Признаковое описание ВР/Регрессия ВР</a:t>
+            </a:r>
+            <a:r>
+              <a:rPr lang="en-US" sz="2400" dirty="0"/>
+              <a:t>/</a:t>
+            </a:r>
+            <a:r>
+              <a:rPr lang="ru-RU" sz="2400" dirty="0"/>
+              <a:t>Казуальный анализ (влияние внешних факторов на поведение ВР)</a:t>
+            </a:r>
+            <a:r>
+              <a:rPr lang="en-US" sz="2400" dirty="0"/>
+              <a:t> </a:t>
+            </a:r>
+            <a:r>
+              <a:rPr lang="ru-RU" sz="2400" dirty="0"/>
+              <a:t>(T</a:t>
+            </a:r>
+            <a:r>
+              <a:rPr lang="en-US" sz="2400" dirty="0" err="1"/>
+              <a:t>ime</a:t>
+            </a:r>
+            <a:r>
+              <a:rPr lang="en-US" sz="2400" dirty="0"/>
+              <a:t> series regression)</a:t>
+            </a:r>
+            <a:endParaRPr lang="ru-RU" sz="2400" dirty="0"/>
+          </a:p>
+          <a:p>
+            <a:endParaRPr lang="en-US" sz="2400" dirty="0"/>
+          </a:p>
+          <a:p>
+            <a:endParaRPr lang="ru-RU" sz="2400" dirty="0"/>
+          </a:p>
+          <a:p>
+            <a:endParaRPr lang="ru-RU" sz="2400" dirty="0"/>
+          </a:p>
+          <a:p>
+            <a:endParaRPr lang="ru-RU" sz="2400" dirty="0"/>
           </a:p>
         </p:txBody>
       </p:sp>
@@ -5249,7 +5110,7 @@
           <p:cNvPr id="4" name="Номер слайда 3">
             <a:extLst>
               <a:ext uri="{FF2B5EF4-FFF2-40B4-BE49-F238E27FC236}">
-                <a16:creationId xmlns:a16="http://schemas.microsoft.com/office/drawing/2014/main" id="{20E8FDC8-D1FC-8C9E-7294-0DEA211E186F}"/>
+                <a16:creationId xmlns:a16="http://schemas.microsoft.com/office/drawing/2014/main" id="{10C4D2CE-024B-092F-F40E-1C67E2809A36}"/>
               </a:ext>
             </a:extLst>
           </p:cNvPr>
@@ -5273,81 +5134,93 @@
           </a:p>
         </p:txBody>
       </p:sp>
-      <p:pic>
-        <p:nvPicPr>
-          <p:cNvPr id="25" name="Рисунок 24">
+      <p:sp>
+        <p:nvSpPr>
+          <p:cNvPr id="6" name="TextBox 5">
             <a:extLst>
               <a:ext uri="{FF2B5EF4-FFF2-40B4-BE49-F238E27FC236}">
-                <a16:creationId xmlns:a16="http://schemas.microsoft.com/office/drawing/2014/main" id="{B76FF666-AB25-69EA-BF0F-FD8B4CE55525}"/>
+                <a16:creationId xmlns:a16="http://schemas.microsoft.com/office/drawing/2014/main" id="{A2C06033-2C39-FC3F-9249-C4FF81811A81}"/>
               </a:ext>
             </a:extLst>
           </p:cNvPr>
-          <p:cNvPicPr>
-            <a:picLocks noChangeAspect="1"/>
-          </p:cNvPicPr>
+          <p:cNvSpPr txBox="1"/>
           <p:nvPr/>
-        </p:nvPicPr>
-        <p:blipFill>
-          <a:blip r:embed="rId2"/>
-          <a:stretch>
-            <a:fillRect/>
-          </a:stretch>
-        </p:blipFill>
+        </p:nvSpPr>
         <p:spPr>
           <a:xfrm>
-            <a:off x="391688" y="3028213"/>
-            <a:ext cx="5940115" cy="2542711"/>
-          </a:xfrm>
-          <a:prstGeom prst="rect">
-            <a:avLst/>
-          </a:prstGeom>
-        </p:spPr>
-      </p:pic>
-      <p:pic>
-        <p:nvPicPr>
-          <p:cNvPr id="1026" name="Picture 2" descr="Univariate versus multivariate time series forecasting: an application to  international tourism demand - ScienceDirect"/>
-          <p:cNvPicPr>
-            <a:picLocks noChangeAspect="1" noChangeArrowheads="1"/>
-          </p:cNvPicPr>
-          <p:nvPr/>
-        </p:nvPicPr>
-        <p:blipFill>
-          <a:blip r:embed="rId3">
-            <a:extLst>
-              <a:ext uri="{28A0092B-C50C-407E-A947-70E740481C1C}">
-                <a14:useLocalDpi xmlns:a14="http://schemas.microsoft.com/office/drawing/2010/main" val="0"/>
-              </a:ext>
-            </a:extLst>
-          </a:blip>
-          <a:srcRect/>
-          <a:stretch>
-            <a:fillRect/>
-          </a:stretch>
-        </p:blipFill>
-        <p:spPr bwMode="auto">
-          <a:xfrm>
-            <a:off x="7177582" y="3028213"/>
-            <a:ext cx="4176218" cy="3497263"/>
+            <a:off x="97971" y="5943491"/>
+            <a:ext cx="6096000" cy="646331"/>
           </a:xfrm>
           <a:prstGeom prst="rect">
             <a:avLst/>
           </a:prstGeom>
           <a:noFill/>
-          <a:extLst>
-            <a:ext uri="{909E8E84-426E-40DD-AFC4-6F175D3DCCD1}">
-              <a14:hiddenFill xmlns:a14="http://schemas.microsoft.com/office/drawing/2010/main">
-                <a:solidFill>
-                  <a:srgbClr val="FFFFFF"/>
-                </a:solidFill>
-              </a14:hiddenFill>
-            </a:ext>
-          </a:extLst>
-        </p:spPr>
-      </p:pic>
+        </p:spPr>
+        <p:txBody>
+          <a:bodyPr wrap="square">
+            <a:spAutoFit/>
+          </a:bodyPr>
+          <a:lstStyle/>
+          <a:p>
+            <a:r>
+              <a:rPr lang="ru-RU" dirty="0" err="1"/>
+              <a:t>https</a:t>
+            </a:r>
+            <a:r>
+              <a:rPr lang="ru-RU" dirty="0"/>
+              <a:t>://</a:t>
+            </a:r>
+            <a:r>
+              <a:rPr lang="ru-RU" dirty="0" err="1"/>
+              <a:t>medium.com</a:t>
+            </a:r>
+            <a:r>
+              <a:rPr lang="ru-RU" dirty="0"/>
+              <a:t>/@</a:t>
+            </a:r>
+            <a:r>
+              <a:rPr lang="ru-RU" dirty="0" err="1"/>
+              <a:t>datasciencewizards</a:t>
+            </a:r>
+            <a:r>
+              <a:rPr lang="ru-RU" dirty="0"/>
+              <a:t>/introduction-to-time-series-analysis-ii-c312e85d51bc</a:t>
+            </a:r>
+          </a:p>
+        </p:txBody>
+      </p:sp>
+      <p:sp>
+        <p:nvSpPr>
+          <p:cNvPr id="5" name="Прямоугольник 4"/>
+          <p:cNvSpPr/>
+          <p:nvPr/>
+        </p:nvSpPr>
+        <p:spPr>
+          <a:xfrm>
+            <a:off x="4731785" y="6266656"/>
+            <a:ext cx="6043129" cy="369332"/>
+          </a:xfrm>
+          <a:prstGeom prst="rect">
+            <a:avLst/>
+          </a:prstGeom>
+        </p:spPr>
+        <p:txBody>
+          <a:bodyPr wrap="none">
+            <a:spAutoFit/>
+          </a:bodyPr>
+          <a:lstStyle/>
+          <a:p>
+            <a:r>
+              <a:rPr lang="ru-RU" dirty="0"/>
+              <a:t>https://shakhbanov.org/vvedenie-v-analiz-vremennyh-ryadov/</a:t>
+            </a:r>
+          </a:p>
+        </p:txBody>
+      </p:sp>
     </p:spTree>
     <p:extLst>
       <p:ext uri="{BB962C8B-B14F-4D97-AF65-F5344CB8AC3E}">
-        <p14:creationId xmlns:p14="http://schemas.microsoft.com/office/powerpoint/2010/main" val="2143036440"/>
+        <p14:creationId xmlns:p14="http://schemas.microsoft.com/office/powerpoint/2010/main" val="121070458"/>
       </p:ext>
     </p:extLst>
   </p:cSld>
@@ -5369,7 +5242,13 @@
   <p:cSld>
     <p:spTree>
       <p:nvGrpSpPr>
-        <p:cNvPr id="1" name=""/>
+        <p:cNvPr id="1" name="">
+          <a:extLst>
+            <a:ext uri="{FF2B5EF4-FFF2-40B4-BE49-F238E27FC236}">
+              <a16:creationId xmlns:a16="http://schemas.microsoft.com/office/drawing/2014/main" id="{FB12D15B-1A1A-60FB-41FC-8A61BF199C2C}"/>
+            </a:ext>
+          </a:extLst>
+        </p:cNvPr>
         <p:cNvGrpSpPr/>
         <p:nvPr/>
       </p:nvGrpSpPr>
@@ -5383,7 +5262,13 @@
       </p:grpSpPr>
       <p:sp>
         <p:nvSpPr>
-          <p:cNvPr id="2" name="Заголовок 1"/>
+          <p:cNvPr id="2" name="Заголовок 1">
+            <a:extLst>
+              <a:ext uri="{FF2B5EF4-FFF2-40B4-BE49-F238E27FC236}">
+                <a16:creationId xmlns:a16="http://schemas.microsoft.com/office/drawing/2014/main" id="{BC2D8DF6-C216-E34E-7D7B-11C6D5207211}"/>
+              </a:ext>
+            </a:extLst>
+          </p:cNvPr>
           <p:cNvSpPr>
             <a:spLocks noGrp="1"/>
           </p:cNvSpPr>
@@ -5393,50 +5278,35 @@
         </p:nvSpPr>
         <p:spPr>
           <a:xfrm>
-            <a:off x="123825" y="365126"/>
-            <a:ext cx="11229975" cy="146800"/>
-          </a:xfrm>
-        </p:spPr>
-        <p:txBody>
-          <a:bodyPr>
-            <a:normAutofit fontScale="90000"/>
-          </a:bodyPr>
-          <a:lstStyle/>
-          <a:p>
-            <a:r>
-              <a:rPr lang="ru-RU" dirty="0"/>
-              <a:t>Представление Временных рядов</a:t>
-            </a:r>
-          </a:p>
-        </p:txBody>
-      </p:sp>
-      <p:sp>
-        <p:nvSpPr>
-          <p:cNvPr id="3" name="Объект 2"/>
-          <p:cNvSpPr>
-            <a:spLocks noGrp="1"/>
-          </p:cNvSpPr>
-          <p:nvPr>
-            <p:ph idx="1"/>
-          </p:nvPr>
-        </p:nvSpPr>
-        <p:spPr>
-          <a:xfrm>
-            <a:off x="91250" y="964242"/>
-            <a:ext cx="10515600" cy="4351338"/>
+            <a:off x="566057" y="365125"/>
+            <a:ext cx="10787743" cy="1047641"/>
           </a:xfrm>
         </p:spPr>
         <p:txBody>
           <a:bodyPr/>
           <a:lstStyle/>
           <a:p>
+            <a:r>
+              <a:rPr lang="ru-RU" b="1" dirty="0"/>
+              <a:t>Задачи предсказания временных рядов</a:t>
+            </a:r>
+            <a:r>
+              <a:rPr lang="en-US" b="1" dirty="0" err="1"/>
+              <a:t>aq</a:t>
+            </a:r>
             <a:endParaRPr lang="ru-RU" dirty="0"/>
           </a:p>
         </p:txBody>
       </p:sp>
       <p:sp>
         <p:nvSpPr>
-          <p:cNvPr id="4" name="Номер слайда 3"/>
+          <p:cNvPr id="4" name="Номер слайда 3">
+            <a:extLst>
+              <a:ext uri="{FF2B5EF4-FFF2-40B4-BE49-F238E27FC236}">
+                <a16:creationId xmlns:a16="http://schemas.microsoft.com/office/drawing/2014/main" id="{BED6B87D-2FAF-84DA-E08B-87EB655C2909}"/>
+              </a:ext>
+            </a:extLst>
+          </p:cNvPr>
           <p:cNvSpPr>
             <a:spLocks noGrp="1"/>
           </p:cNvSpPr>
@@ -5457,15 +5327,128 @@
           </a:p>
         </p:txBody>
       </p:sp>
+      <p:sp>
+        <p:nvSpPr>
+          <p:cNvPr id="12" name="Объект 11">
+            <a:extLst>
+              <a:ext uri="{FF2B5EF4-FFF2-40B4-BE49-F238E27FC236}">
+                <a16:creationId xmlns:a16="http://schemas.microsoft.com/office/drawing/2014/main" id="{1BB278FD-3BA0-E784-DDDA-9236766B2533}"/>
+              </a:ext>
+            </a:extLst>
+          </p:cNvPr>
+          <p:cNvSpPr txBox="1">
+            <a:spLocks noGrp="1"/>
+          </p:cNvSpPr>
+          <p:nvPr>
+            <p:ph idx="1"/>
+          </p:nvPr>
+        </p:nvSpPr>
+        <p:spPr>
+          <a:xfrm>
+            <a:off x="354110" y="1404519"/>
+            <a:ext cx="7271294" cy="923330"/>
+          </a:xfrm>
+          <a:prstGeom prst="rect">
+            <a:avLst/>
+          </a:prstGeom>
+          <a:noFill/>
+        </p:spPr>
+        <p:txBody>
+          <a:bodyPr wrap="square" rtlCol="0">
+            <a:spAutoFit/>
+          </a:bodyPr>
+          <a:lstStyle/>
+          <a:p>
+            <a:pPr marL="0" indent="0">
+              <a:buNone/>
+            </a:pPr>
+            <a:r>
+              <a:rPr lang="ru-RU" sz="2000" b="1" dirty="0"/>
+              <a:t>Точечный прогноз </a:t>
+            </a:r>
+            <a:r>
+              <a:rPr lang="ru-RU" sz="2000" dirty="0"/>
+              <a:t>- Самый простой случай, когда требуется узнать конкретное значение показателя в зависимости от периода. </a:t>
+            </a:r>
+          </a:p>
+        </p:txBody>
+      </p:sp>
       <p:pic>
         <p:nvPicPr>
-          <p:cNvPr id="1026" name="Picture 2" descr="Enlarged Image"/>
-          <p:cNvPicPr>
-            <a:picLocks noChangeAspect="1" noChangeArrowheads="1"/>
-          </p:cNvPicPr>
+          <p:cNvPr id="11" name="Рисунок 10" descr="https://shakhbanov.org/wp-content/uploads/2024/10/%D1%82%D0%BE%D1%87%D0%B5%D1%87%D0%BD%D1%8B%D0%B9_%D0%BF%D1%80%D0%BE%D0%B3%D0%BD%D0%BE%D0%B7.png"/>
+          <p:cNvPicPr/>
           <p:nvPr/>
         </p:nvPicPr>
-        <p:blipFill rotWithShape="1">
+        <p:blipFill>
+          <a:blip r:embed="rId2">
+            <a:extLst>
+              <a:ext uri="{28A0092B-C50C-407E-A947-70E740481C1C}">
+                <a14:useLocalDpi xmlns:a14="http://schemas.microsoft.com/office/drawing/2010/main" val="0"/>
+              </a:ext>
+            </a:extLst>
+          </a:blip>
+          <a:srcRect/>
+          <a:stretch>
+            <a:fillRect/>
+          </a:stretch>
+        </p:blipFill>
+        <p:spPr bwMode="auto">
+          <a:xfrm>
+            <a:off x="8250244" y="1082830"/>
+            <a:ext cx="3276600" cy="1591419"/>
+          </a:xfrm>
+          <a:prstGeom prst="rect">
+            <a:avLst/>
+          </a:prstGeom>
+          <a:noFill/>
+          <a:ln>
+            <a:noFill/>
+          </a:ln>
+        </p:spPr>
+      </p:pic>
+      <p:sp>
+        <p:nvSpPr>
+          <p:cNvPr id="5" name="Прямоугольник 4"/>
+          <p:cNvSpPr/>
+          <p:nvPr/>
+        </p:nvSpPr>
+        <p:spPr>
+          <a:xfrm>
+            <a:off x="354110" y="2489431"/>
+            <a:ext cx="7589740" cy="1631216"/>
+          </a:xfrm>
+          <a:prstGeom prst="rect">
+            <a:avLst/>
+          </a:prstGeom>
+        </p:spPr>
+        <p:txBody>
+          <a:bodyPr wrap="square">
+            <a:spAutoFit/>
+          </a:bodyPr>
+          <a:lstStyle/>
+          <a:p>
+            <a:r>
+              <a:rPr lang="ru-RU" sz="2000" b="1" dirty="0"/>
+              <a:t>Прогноз изменчивости</a:t>
+            </a:r>
+            <a:r>
+              <a:rPr lang="en-US" sz="2000" b="1" dirty="0"/>
+              <a:t> - </a:t>
+            </a:r>
+            <a:r>
+              <a:rPr lang="ru-RU" sz="2000" dirty="0"/>
+              <a:t>обычно подразумевают прогноз дисперсии и производных от неё показателей. Примером может служить прогнозирование волатильности на фондовом рынке. Волатильность отражает степень колебаний цен на активы и является важным показателем риска для инвесторов.</a:t>
+            </a:r>
+          </a:p>
+        </p:txBody>
+      </p:sp>
+      <p:pic>
+        <p:nvPicPr>
+          <p:cNvPr id="14" name="Рисунок 13" descr="https://shakhbanov.org/wp-content/uploads/2024/10/%D0%BF%D1%80%D0%BE%D0%B3%D0%BD%D0%BE%D0%B7_%D0%B8%D0%B7%D0%BC%D0%B5%D0%BD%D1%87%D0%B8%D0%B2%D0%BE%D1%81%D1%82%D0%B8.png"/>
+          <p:cNvPicPr/>
+          <p:nvPr/>
+        </p:nvPicPr>
+        <p:blipFill>
           <a:blip r:embed="rId3">
             <a:extLst>
               <a:ext uri="{28A0092B-C50C-407E-A947-70E740481C1C}">
@@ -5473,209 +5456,299 @@
               </a:ext>
             </a:extLst>
           </a:blip>
-          <a:srcRect l="5114" t="41497" r="48992" b="17002"/>
-          <a:stretch/>
+          <a:srcRect/>
+          <a:stretch>
+            <a:fillRect/>
+          </a:stretch>
         </p:blipFill>
         <p:spPr bwMode="auto">
           <a:xfrm>
-            <a:off x="461042" y="4507212"/>
-            <a:ext cx="4377658" cy="2214263"/>
+            <a:off x="8250244" y="2848662"/>
+            <a:ext cx="3200400" cy="1485900"/>
           </a:xfrm>
           <a:prstGeom prst="rect">
             <a:avLst/>
           </a:prstGeom>
           <a:noFill/>
-          <a:extLst>
-            <a:ext uri="{909E8E84-426E-40DD-AFC4-6F175D3DCCD1}">
-              <a14:hiddenFill xmlns:a14="http://schemas.microsoft.com/office/drawing/2010/main">
-                <a:solidFill>
-                  <a:srgbClr val="FFFFFF"/>
-                </a:solidFill>
-              </a14:hiddenFill>
-            </a:ext>
-          </a:extLst>
+          <a:ln>
+            <a:noFill/>
+          </a:ln>
         </p:spPr>
       </p:pic>
+      <mc:AlternateContent xmlns:mc="http://schemas.openxmlformats.org/markup-compatibility/2006" xmlns:a14="http://schemas.microsoft.com/office/drawing/2010/main">
+        <mc:Choice Requires="a14">
+          <p:sp>
+            <p:nvSpPr>
+              <p:cNvPr id="6" name="Прямоугольник 5"/>
+              <p:cNvSpPr/>
+              <p:nvPr/>
+            </p:nvSpPr>
+            <p:spPr>
+              <a:xfrm>
+                <a:off x="354110" y="4331961"/>
+                <a:ext cx="7934234" cy="1744645"/>
+              </a:xfrm>
+              <a:prstGeom prst="rect">
+                <a:avLst/>
+              </a:prstGeom>
+            </p:spPr>
+            <p:txBody>
+              <a:bodyPr wrap="square">
+                <a:spAutoFit/>
+              </a:bodyPr>
+              <a:lstStyle/>
+              <a:p>
+                <a:pPr>
+                  <a:lnSpc>
+                    <a:spcPct val="107000"/>
+                  </a:lnSpc>
+                  <a:spcAft>
+                    <a:spcPts val="0"/>
+                  </a:spcAft>
+                </a:pPr>
+                <a:r>
+                  <a:rPr lang="ru-RU" sz="2000" b="1" dirty="0" smtClean="0"/>
+                  <a:t>Вероятностный </a:t>
+                </a:r>
+                <a:r>
+                  <a:rPr lang="ru-RU" sz="2000" b="1" dirty="0"/>
+                  <a:t>прогноз</a:t>
+                </a:r>
+                <a:r>
+                  <a:rPr lang="en-US" sz="2000" b="1" dirty="0"/>
+                  <a:t> </a:t>
+                </a:r>
+                <a:r>
+                  <a:rPr lang="ru-RU" sz="2000" dirty="0"/>
+                  <a:t>- комбинация двух предыдущих. </a:t>
+                </a:r>
+                <a:r>
+                  <a:rPr lang="ru-RU" sz="2000" dirty="0" smtClean="0"/>
+                  <a:t>Есть разные варианты, например интервальный прогноз - Задача </a:t>
+                </a:r>
+                <a:r>
+                  <a:rPr lang="ru-RU" sz="2000" dirty="0"/>
+                  <a:t>заключается в предсказании интервала, в который попадёт </a:t>
+                </a:r>
+                <a14:m>
+                  <m:oMath xmlns:m="http://schemas.openxmlformats.org/officeDocument/2006/math">
+                    <m:sSub>
+                      <m:sSubPr>
+                        <m:ctrlPr>
+                          <a:rPr lang="fr-FR" sz="2000" i="1" dirty="0">
+                            <a:latin typeface="Cambria Math" panose="02040503050406030204" pitchFamily="18" charset="0"/>
+                          </a:rPr>
+                        </m:ctrlPr>
+                      </m:sSubPr>
+                      <m:e>
+                        <m:r>
+                          <a:rPr lang="en-US" sz="2000" i="1" dirty="0">
+                            <a:latin typeface="Cambria Math" panose="02040503050406030204" pitchFamily="18" charset="0"/>
+                          </a:rPr>
+                          <m:t>𝑦</m:t>
+                        </m:r>
+                      </m:e>
+                      <m:sub>
+                        <m:r>
+                          <a:rPr lang="fr-FR" sz="2000" i="1" dirty="0">
+                            <a:latin typeface="Cambria Math" panose="02040503050406030204" pitchFamily="18" charset="0"/>
+                          </a:rPr>
+                          <m:t>𝑇</m:t>
+                        </m:r>
+                        <m:r>
+                          <a:rPr lang="fr-FR" sz="2000" i="1" dirty="0">
+                            <a:latin typeface="Cambria Math" panose="02040503050406030204" pitchFamily="18" charset="0"/>
+                          </a:rPr>
+                          <m:t>+</m:t>
+                        </m:r>
+                        <m:r>
+                          <a:rPr lang="fr-FR" sz="2000" i="1" dirty="0">
+                            <a:latin typeface="Cambria Math" panose="02040503050406030204" pitchFamily="18" charset="0"/>
+                          </a:rPr>
+                          <m:t>h</m:t>
+                        </m:r>
+                      </m:sub>
+                    </m:sSub>
+                  </m:oMath>
+                </a14:m>
+                <a:r>
+                  <a:rPr lang="ru-RU" sz="2000" dirty="0"/>
+                  <a:t> с заданной вероятностью (например, 95%). Для этого требуется либо знать закон распределения</a:t>
+                </a:r>
+                <a:r>
+                  <a:rPr lang="en-US" sz="2000" dirty="0"/>
+                  <a:t> </a:t>
+                </a:r>
+                <a14:m>
+                  <m:oMath xmlns:m="http://schemas.openxmlformats.org/officeDocument/2006/math">
+                    <m:sSub>
+                      <m:sSubPr>
+                        <m:ctrlPr>
+                          <a:rPr lang="fr-FR" sz="2000" i="1" dirty="0">
+                            <a:latin typeface="Cambria Math" panose="02040503050406030204" pitchFamily="18" charset="0"/>
+                          </a:rPr>
+                        </m:ctrlPr>
+                      </m:sSubPr>
+                      <m:e>
+                        <m:r>
+                          <a:rPr lang="en-US" sz="2000" i="1" dirty="0">
+                            <a:latin typeface="Cambria Math" panose="02040503050406030204" pitchFamily="18" charset="0"/>
+                          </a:rPr>
+                          <m:t>𝑦</m:t>
+                        </m:r>
+                      </m:e>
+                      <m:sub>
+                        <m:r>
+                          <a:rPr lang="fr-FR" sz="2000" i="1" dirty="0">
+                            <a:latin typeface="Cambria Math" panose="02040503050406030204" pitchFamily="18" charset="0"/>
+                          </a:rPr>
+                          <m:t>𝑇</m:t>
+                        </m:r>
+                        <m:r>
+                          <a:rPr lang="fr-FR" sz="2000" i="1" dirty="0">
+                            <a:latin typeface="Cambria Math" panose="02040503050406030204" pitchFamily="18" charset="0"/>
+                          </a:rPr>
+                          <m:t>+</m:t>
+                        </m:r>
+                        <m:r>
+                          <a:rPr lang="fr-FR" sz="2000" i="1" dirty="0">
+                            <a:latin typeface="Cambria Math" panose="02040503050406030204" pitchFamily="18" charset="0"/>
+                          </a:rPr>
+                          <m:t>h</m:t>
+                        </m:r>
+                      </m:sub>
+                    </m:sSub>
+                    <m:r>
+                      <a:rPr lang="fr-FR" sz="2000" i="1" dirty="0">
+                        <a:latin typeface="Cambria Math" panose="02040503050406030204" pitchFamily="18" charset="0"/>
+                      </a:rPr>
+                      <m:t>∣</m:t>
+                    </m:r>
+                    <m:sSubSup>
+                      <m:sSubSupPr>
+                        <m:ctrlPr>
+                          <a:rPr lang="fr-FR" sz="2000" i="1" dirty="0">
+                            <a:latin typeface="Cambria Math" panose="02040503050406030204" pitchFamily="18" charset="0"/>
+                          </a:rPr>
+                        </m:ctrlPr>
+                      </m:sSubSupPr>
+                      <m:e>
+                        <m:d>
+                          <m:dPr>
+                            <m:ctrlPr>
+                              <a:rPr lang="fr-FR" sz="2000" i="1" dirty="0">
+                                <a:latin typeface="Cambria Math" panose="02040503050406030204" pitchFamily="18" charset="0"/>
+                              </a:rPr>
+                            </m:ctrlPr>
+                          </m:dPr>
+                          <m:e>
+                            <m:sSub>
+                              <m:sSubPr>
+                                <m:ctrlPr>
+                                  <a:rPr lang="fr-FR" sz="2000" i="1" dirty="0">
+                                    <a:latin typeface="Cambria Math" panose="02040503050406030204" pitchFamily="18" charset="0"/>
+                                  </a:rPr>
+                                </m:ctrlPr>
+                              </m:sSubPr>
+                              <m:e>
+                                <m:r>
+                                  <a:rPr lang="fr-FR" sz="2000" i="1" dirty="0">
+                                    <a:latin typeface="Cambria Math" panose="02040503050406030204" pitchFamily="18" charset="0"/>
+                                  </a:rPr>
+                                  <m:t>𝑦</m:t>
+                                </m:r>
+                              </m:e>
+                              <m:sub>
+                                <m:r>
+                                  <a:rPr lang="fr-FR" sz="2000" i="1" dirty="0">
+                                    <a:latin typeface="Cambria Math" panose="02040503050406030204" pitchFamily="18" charset="0"/>
+                                  </a:rPr>
+                                  <m:t>𝑡</m:t>
+                                </m:r>
+                              </m:sub>
+                            </m:sSub>
+                          </m:e>
+                        </m:d>
+                      </m:e>
+                      <m:sub>
+                        <m:r>
+                          <a:rPr lang="fr-FR" sz="2000" i="1" dirty="0">
+                            <a:latin typeface="Cambria Math" panose="02040503050406030204" pitchFamily="18" charset="0"/>
+                          </a:rPr>
+                          <m:t>𝑡</m:t>
+                        </m:r>
+                        <m:r>
+                          <a:rPr lang="fr-FR" sz="2000" i="1" dirty="0">
+                            <a:latin typeface="Cambria Math" panose="02040503050406030204" pitchFamily="18" charset="0"/>
+                          </a:rPr>
+                          <m:t>=1</m:t>
+                        </m:r>
+                      </m:sub>
+                      <m:sup>
+                        <m:r>
+                          <a:rPr lang="fr-FR" sz="2000" i="1" dirty="0">
+                            <a:latin typeface="Cambria Math" panose="02040503050406030204" pitchFamily="18" charset="0"/>
+                          </a:rPr>
+                          <m:t>𝑇</m:t>
+                        </m:r>
+                      </m:sup>
+                    </m:sSubSup>
+                  </m:oMath>
+                </a14:m>
+                <a:r>
+                  <a:rPr lang="ru-RU" sz="2000" dirty="0"/>
+                  <a:t> , либо рассчитать квантиль.</a:t>
+                </a:r>
+              </a:p>
+            </p:txBody>
+          </p:sp>
+        </mc:Choice>
+        <mc:Fallback xmlns="">
+          <p:sp>
+            <p:nvSpPr>
+              <p:cNvPr id="6" name="Прямоугольник 5"/>
+              <p:cNvSpPr>
+                <a:spLocks noRot="1" noChangeAspect="1" noMove="1" noResize="1" noEditPoints="1" noAdjustHandles="1" noChangeArrowheads="1" noChangeShapeType="1" noTextEdit="1"/>
+              </p:cNvSpPr>
+              <p:nvPr/>
+            </p:nvSpPr>
+            <p:spPr>
+              <a:xfrm>
+                <a:off x="354110" y="4331961"/>
+                <a:ext cx="7934234" cy="1744645"/>
+              </a:xfrm>
+              <a:prstGeom prst="rect">
+                <a:avLst/>
+              </a:prstGeom>
+              <a:blipFill>
+                <a:blip r:embed="rId4"/>
+                <a:stretch>
+                  <a:fillRect l="-768" t="-1748" b="-4545"/>
+                </a:stretch>
+              </a:blipFill>
+            </p:spPr>
+            <p:txBody>
+              <a:bodyPr/>
+              <a:lstStyle/>
+              <a:p>
+                <a:r>
+                  <a:rPr lang="ru-RU">
+                    <a:noFill/>
+                  </a:rPr>
+                  <a:t> </a:t>
+                </a:r>
+              </a:p>
+            </p:txBody>
+          </p:sp>
+        </mc:Fallback>
+      </mc:AlternateContent>
       <p:pic>
         <p:nvPicPr>
-          <p:cNvPr id="6" name="Picture 2" descr="Enlarged Image"/>
-          <p:cNvPicPr>
-            <a:picLocks noChangeAspect="1" noChangeArrowheads="1"/>
-          </p:cNvPicPr>
+          <p:cNvPr id="15" name="Рисунок 14" descr="https://shakhbanov.org/wp-content/uploads/2024/10/%D0%B8%D0%BD%D1%82%D0%B5%D1%80%D0%B2%D0%B0%D0%BB%D1%8C%D0%BD%D1%8B%D0%B9_%D0%BF%D1%80%D0%BE%D0%B3%D0%BD%D0%BE%D0%B7.png"/>
+          <p:cNvPicPr/>
           <p:nvPr/>
         </p:nvPicPr>
-        <p:blipFill rotWithShape="1">
-          <a:blip r:embed="rId3">
-            <a:extLst>
-              <a:ext uri="{28A0092B-C50C-407E-A947-70E740481C1C}">
-                <a14:useLocalDpi xmlns:a14="http://schemas.microsoft.com/office/drawing/2010/main" val="0"/>
-              </a:ext>
-            </a:extLst>
-          </a:blip>
-          <a:srcRect l="4807" t="9446" r="60411" b="80213"/>
-          <a:stretch/>
-        </p:blipFill>
-        <p:spPr bwMode="auto">
-          <a:xfrm>
-            <a:off x="1644385" y="3738013"/>
-            <a:ext cx="3488550" cy="580146"/>
-          </a:xfrm>
-          <a:prstGeom prst="rect">
-            <a:avLst/>
-          </a:prstGeom>
-          <a:noFill/>
-          <a:extLst>
-            <a:ext uri="{909E8E84-426E-40DD-AFC4-6F175D3DCCD1}">
-              <a14:hiddenFill xmlns:a14="http://schemas.microsoft.com/office/drawing/2010/main">
-                <a:solidFill>
-                  <a:srgbClr val="FFFFFF"/>
-                </a:solidFill>
-              </a14:hiddenFill>
-            </a:ext>
-          </a:extLst>
-        </p:spPr>
-      </p:pic>
-      <p:pic>
-        <p:nvPicPr>
-          <p:cNvPr id="1032" name="Picture 8" descr="Enlarged Image"/>
-          <p:cNvPicPr>
-            <a:picLocks noChangeAspect="1" noChangeArrowheads="1"/>
-          </p:cNvPicPr>
-          <p:nvPr/>
-        </p:nvPicPr>
-        <p:blipFill rotWithShape="1">
-          <a:blip r:embed="rId4">
-            <a:extLst>
-              <a:ext uri="{28A0092B-C50C-407E-A947-70E740481C1C}">
-                <a14:useLocalDpi xmlns:a14="http://schemas.microsoft.com/office/drawing/2010/main" val="0"/>
-              </a:ext>
-            </a:extLst>
-          </a:blip>
-          <a:srcRect l="7488" t="34512" r="43940" b="11661"/>
-          <a:stretch/>
-        </p:blipFill>
-        <p:spPr bwMode="auto">
-          <a:xfrm>
-            <a:off x="8337177" y="4507212"/>
-            <a:ext cx="3609896" cy="2237680"/>
-          </a:xfrm>
-          <a:prstGeom prst="rect">
-            <a:avLst/>
-          </a:prstGeom>
-          <a:noFill/>
-          <a:extLst>
-            <a:ext uri="{909E8E84-426E-40DD-AFC4-6F175D3DCCD1}">
-              <a14:hiddenFill xmlns:a14="http://schemas.microsoft.com/office/drawing/2010/main">
-                <a:solidFill>
-                  <a:srgbClr val="FFFFFF"/>
-                </a:solidFill>
-              </a14:hiddenFill>
-            </a:ext>
-          </a:extLst>
-        </p:spPr>
-      </p:pic>
-      <p:grpSp>
-        <p:nvGrpSpPr>
-          <p:cNvPr id="7" name="Группа 6"/>
-          <p:cNvGrpSpPr/>
-          <p:nvPr/>
-        </p:nvGrpSpPr>
-        <p:grpSpPr>
-          <a:xfrm>
-            <a:off x="4811038" y="4216622"/>
-            <a:ext cx="2225040" cy="2282132"/>
-            <a:chOff x="4838700" y="4439343"/>
-            <a:chExt cx="2225040" cy="2282132"/>
-          </a:xfrm>
-        </p:grpSpPr>
-        <p:pic>
-          <p:nvPicPr>
-            <p:cNvPr id="10" name="Picture 8" descr="Enlarged Image"/>
-            <p:cNvPicPr>
-              <a:picLocks noChangeAspect="1" noChangeArrowheads="1"/>
-            </p:cNvPicPr>
-            <p:nvPr/>
-          </p:nvPicPr>
-          <p:blipFill rotWithShape="1">
-            <a:blip r:embed="rId4">
-              <a:extLst>
-                <a:ext uri="{28A0092B-C50C-407E-A947-70E740481C1C}">
-                  <a14:useLocalDpi xmlns:a14="http://schemas.microsoft.com/office/drawing/2010/main" val="0"/>
-                </a:ext>
-              </a:extLst>
-            </a:blip>
-            <a:srcRect l="7450" t="34512" r="70762" b="10592"/>
-            <a:stretch/>
-          </p:blipFill>
-          <p:spPr bwMode="auto">
-            <a:xfrm>
-              <a:off x="4838700" y="4439344"/>
-              <a:ext cx="1619249" cy="2282131"/>
-            </a:xfrm>
-            <a:prstGeom prst="rect">
-              <a:avLst/>
-            </a:prstGeom>
-            <a:noFill/>
-            <a:extLst>
-              <a:ext uri="{909E8E84-426E-40DD-AFC4-6F175D3DCCD1}">
-                <a14:hiddenFill xmlns:a14="http://schemas.microsoft.com/office/drawing/2010/main">
-                  <a:solidFill>
-                    <a:srgbClr val="FFFFFF"/>
-                  </a:solidFill>
-                </a14:hiddenFill>
-              </a:ext>
-            </a:extLst>
-          </p:spPr>
-        </p:pic>
-        <p:pic>
-          <p:nvPicPr>
-            <p:cNvPr id="11" name="Picture 8" descr="Enlarged Image"/>
-            <p:cNvPicPr>
-              <a:picLocks noChangeAspect="1" noChangeArrowheads="1"/>
-            </p:cNvPicPr>
-            <p:nvPr/>
-          </p:nvPicPr>
-          <p:blipFill rotWithShape="1">
-            <a:blip r:embed="rId4">
-              <a:extLst>
-                <a:ext uri="{28A0092B-C50C-407E-A947-70E740481C1C}">
-                  <a14:useLocalDpi xmlns:a14="http://schemas.microsoft.com/office/drawing/2010/main" val="0"/>
-                </a:ext>
-              </a:extLst>
-            </a:blip>
-            <a:srcRect l="37019" t="34512" r="54162" b="10592"/>
-            <a:stretch/>
-          </p:blipFill>
-          <p:spPr bwMode="auto">
-            <a:xfrm>
-              <a:off x="6408365" y="4439343"/>
-              <a:ext cx="655375" cy="2282131"/>
-            </a:xfrm>
-            <a:prstGeom prst="rect">
-              <a:avLst/>
-            </a:prstGeom>
-            <a:noFill/>
-            <a:extLst>
-              <a:ext uri="{909E8E84-426E-40DD-AFC4-6F175D3DCCD1}">
-                <a14:hiddenFill xmlns:a14="http://schemas.microsoft.com/office/drawing/2010/main">
-                  <a:solidFill>
-                    <a:srgbClr val="FFFFFF"/>
-                  </a:solidFill>
-                </a14:hiddenFill>
-              </a:ext>
-            </a:extLst>
-          </p:spPr>
-        </p:pic>
-      </p:grpSp>
-      <p:pic>
-        <p:nvPicPr>
-          <p:cNvPr id="1034" name="Picture 10" descr="Enlarged Image"/>
-          <p:cNvPicPr>
-            <a:picLocks noChangeAspect="1" noChangeArrowheads="1"/>
-          </p:cNvPicPr>
-          <p:nvPr/>
-        </p:nvPicPr>
-        <p:blipFill rotWithShape="1">
+        <p:blipFill>
           <a:blip r:embed="rId5">
             <a:extLst>
               <a:ext uri="{28A0092B-C50C-407E-A947-70E740481C1C}">
@@ -5683,92 +5756,78 @@
               </a:ext>
             </a:extLst>
           </a:blip>
-          <a:srcRect l="7490" t="29870" r="13574" b="6701"/>
-          <a:stretch/>
+          <a:srcRect/>
+          <a:stretch>
+            <a:fillRect/>
+          </a:stretch>
         </p:blipFill>
         <p:spPr bwMode="auto">
           <a:xfrm>
-            <a:off x="5349050" y="1215063"/>
-            <a:ext cx="6598023" cy="2965618"/>
+            <a:off x="8288344" y="4606792"/>
+            <a:ext cx="3200400" cy="1477328"/>
           </a:xfrm>
           <a:prstGeom prst="rect">
             <a:avLst/>
           </a:prstGeom>
           <a:noFill/>
-          <a:extLst>
-            <a:ext uri="{909E8E84-426E-40DD-AFC4-6F175D3DCCD1}">
-              <a14:hiddenFill xmlns:a14="http://schemas.microsoft.com/office/drawing/2010/main">
-                <a:solidFill>
-                  <a:srgbClr val="FFFFFF"/>
-                </a:solidFill>
-              </a14:hiddenFill>
-            </a:ext>
-          </a:extLst>
+          <a:ln>
+            <a:noFill/>
+          </a:ln>
         </p:spPr>
       </p:pic>
-      <p:pic>
-        <p:nvPicPr>
-          <p:cNvPr id="14" name="Picture 10" descr="Enlarged Image"/>
-          <p:cNvPicPr>
-            <a:picLocks noChangeAspect="1" noChangeArrowheads="1"/>
-          </p:cNvPicPr>
+      <p:sp>
+        <p:nvSpPr>
+          <p:cNvPr id="3" name="TextBox 2"/>
+          <p:cNvSpPr txBox="1"/>
           <p:nvPr/>
-        </p:nvPicPr>
-        <p:blipFill rotWithShape="1">
-          <a:blip r:embed="rId5">
-            <a:extLst>
-              <a:ext uri="{28A0092B-C50C-407E-A947-70E740481C1C}">
-                <a14:useLocalDpi xmlns:a14="http://schemas.microsoft.com/office/drawing/2010/main" val="0"/>
-              </a:ext>
-            </a:extLst>
-          </a:blip>
-          <a:srcRect l="4755" t="8683" r="57372" b="79750"/>
-          <a:stretch/>
-        </p:blipFill>
-        <p:spPr bwMode="auto">
-          <a:xfrm>
-            <a:off x="5648324" y="988056"/>
-            <a:ext cx="3165662" cy="540825"/>
+        </p:nvSpPr>
+        <p:spPr>
+          <a:xfrm>
+            <a:off x="354110" y="6084120"/>
+            <a:ext cx="10748230" cy="646331"/>
           </a:xfrm>
           <a:prstGeom prst="rect">
             <a:avLst/>
           </a:prstGeom>
           <a:noFill/>
-          <a:extLst>
-            <a:ext uri="{909E8E84-426E-40DD-AFC4-6F175D3DCCD1}">
-              <a14:hiddenFill xmlns:a14="http://schemas.microsoft.com/office/drawing/2010/main">
-                <a:solidFill>
-                  <a:srgbClr val="FFFFFF"/>
-                </a:solidFill>
-              </a14:hiddenFill>
-            </a:ext>
-          </a:extLst>
-        </p:spPr>
-      </p:pic>
-      <p:sp>
-        <p:nvSpPr>
-          <p:cNvPr id="5" name="Прямоугольник 4"/>
+        </p:spPr>
+        <p:txBody>
+          <a:bodyPr wrap="square" rtlCol="0">
+            <a:spAutoFit/>
+          </a:bodyPr>
+          <a:lstStyle/>
+          <a:p>
+            <a:r>
+              <a:rPr lang="ru-RU" dirty="0"/>
+              <a:t>В дополнение к этому также могут быть поставлены задачи поиска аномалий, заполнения пропусков, обнаружение изменений (новизны) и другие задачи</a:t>
+            </a:r>
+          </a:p>
+        </p:txBody>
+      </p:sp>
+      <p:sp>
+        <p:nvSpPr>
+          <p:cNvPr id="7" name="Прямоугольник 6"/>
           <p:cNvSpPr/>
           <p:nvPr/>
         </p:nvSpPr>
         <p:spPr>
           <a:xfrm>
-            <a:off x="1419225" y="6565660"/>
-            <a:ext cx="6838950" cy="276999"/>
+            <a:off x="5827160" y="6407285"/>
+            <a:ext cx="6043129" cy="369332"/>
           </a:xfrm>
           <a:prstGeom prst="rect">
             <a:avLst/>
           </a:prstGeom>
         </p:spPr>
         <p:txBody>
-          <a:bodyPr wrap="square">
+          <a:bodyPr wrap="none">
             <a:spAutoFit/>
           </a:bodyPr>
           <a:lstStyle/>
           <a:p>
             <a:r>
-              <a:rPr lang="ru-RU" sz="1200" dirty="0"/>
-              <a:t>https://knowledge.dataiku.com/latest/ml-analytics/time-series/concept-data-types-formats.html</a:t>
+              <a:rPr lang="ru-RU" dirty="0"/>
+              <a:t>https://shakhbanov.org/vvedenie-v-analiz-vremennyh-ryadov/</a:t>
             </a:r>
           </a:p>
         </p:txBody>
@@ -5776,21 +5835,13 @@
     </p:spTree>
     <p:extLst>
       <p:ext uri="{BB962C8B-B14F-4D97-AF65-F5344CB8AC3E}">
-        <p14:creationId xmlns:p14="http://schemas.microsoft.com/office/powerpoint/2010/main" val="3611368505"/>
+        <p14:creationId xmlns:p14="http://schemas.microsoft.com/office/powerpoint/2010/main" val="2777875720"/>
       </p:ext>
     </p:extLst>
   </p:cSld>
   <p:clrMapOvr>
     <a:masterClrMapping/>
   </p:clrMapOvr>
-  <mc:AlternateContent xmlns:mc="http://schemas.openxmlformats.org/markup-compatibility/2006" xmlns:p14="http://schemas.microsoft.com/office/powerpoint/2010/main">
-    <mc:Choice Requires="p14">
-      <p:transition spd="slow" p14:dur="2000"/>
-    </mc:Choice>
-    <mc:Fallback xmlns="">
-      <p:transition spd="slow"/>
-    </mc:Fallback>
-  </mc:AlternateContent>
   <p:timing>
     <p:tnLst>
       <p:par>
@@ -5820,13 +5871,7 @@
       </p:grpSpPr>
       <p:sp>
         <p:nvSpPr>
-          <p:cNvPr id="2" name="Заголовок 1">
-            <a:extLst>
-              <a:ext uri="{FF2B5EF4-FFF2-40B4-BE49-F238E27FC236}">
-                <a16:creationId xmlns:a16="http://schemas.microsoft.com/office/drawing/2014/main" id="{61CE5FD9-3051-629C-2F97-C85F3C7261F0}"/>
-              </a:ext>
-            </a:extLst>
-          </p:cNvPr>
+          <p:cNvPr id="2" name="Заголовок 1"/>
           <p:cNvSpPr>
             <a:spLocks noGrp="1"/>
           </p:cNvSpPr>
@@ -5836,8 +5881,8 @@
         </p:nvSpPr>
         <p:spPr>
           <a:xfrm>
-            <a:off x="838200" y="365125"/>
-            <a:ext cx="10515600" cy="651751"/>
+            <a:off x="714375" y="293688"/>
+            <a:ext cx="10639425" cy="473075"/>
           </a:xfrm>
         </p:spPr>
         <p:txBody>
@@ -5847,77 +5892,1252 @@
           <a:lstStyle/>
           <a:p>
             <a:r>
-              <a:rPr lang="ru-RU" dirty="0"/>
-              <a:t>Т</a:t>
-            </a:r>
-            <a:r>
-              <a:rPr lang="en-US" dirty="0" err="1"/>
-              <a:t>ип</a:t>
-            </a:r>
-            <a:r>
-              <a:rPr lang="ru-RU" dirty="0"/>
-              <a:t>ы ВР</a:t>
-            </a:r>
-            <a:br>
-              <a:rPr lang="ru-RU" dirty="0"/>
-            </a:br>
+              <a:rPr lang="ru-RU" b="1" dirty="0"/>
+              <a:t>Задачи прогнозирования временных рядов</a:t>
+            </a:r>
             <a:endParaRPr lang="ru-RU" dirty="0"/>
           </a:p>
         </p:txBody>
       </p:sp>
-      <p:pic>
-        <p:nvPicPr>
-          <p:cNvPr id="10246" name="Picture 6">
-            <a:extLst>
-              <a:ext uri="{FF2B5EF4-FFF2-40B4-BE49-F238E27FC236}">
-                <a16:creationId xmlns:a16="http://schemas.microsoft.com/office/drawing/2014/main" id="{C02F706D-4556-CD59-5DD6-64AD296BC17F}"/>
-              </a:ext>
-            </a:extLst>
-          </p:cNvPr>
-          <p:cNvPicPr>
-            <a:picLocks noChangeAspect="1" noChangeArrowheads="1"/>
-          </p:cNvPicPr>
+      <mc:AlternateContent xmlns:mc="http://schemas.openxmlformats.org/markup-compatibility/2006" xmlns:a14="http://schemas.microsoft.com/office/drawing/2010/main">
+        <mc:Choice Requires="a14">
+          <p:sp>
+            <p:nvSpPr>
+              <p:cNvPr id="3" name="Объект 2"/>
+              <p:cNvSpPr>
+                <a:spLocks noGrp="1"/>
+              </p:cNvSpPr>
+              <p:nvPr>
+                <p:ph idx="1"/>
+              </p:nvPr>
+            </p:nvSpPr>
+            <p:spPr>
+              <a:xfrm>
+                <a:off x="285149" y="3720759"/>
+                <a:ext cx="6826743" cy="2085717"/>
+              </a:xfrm>
+            </p:spPr>
+            <p:txBody>
+              <a:bodyPr>
+                <a:normAutofit fontScale="92500" lnSpcReduction="20000"/>
+              </a:bodyPr>
+              <a:lstStyle/>
+              <a:p>
+                <a:pPr>
+                  <a:lnSpc>
+                    <a:spcPct val="120000"/>
+                  </a:lnSpc>
+                  <a:spcBef>
+                    <a:spcPts val="600"/>
+                  </a:spcBef>
+                </a:pPr>
+                <a:r>
+                  <a:rPr lang="ru-RU" sz="2000" dirty="0"/>
+                  <a:t>Предсказание будет осуществляться по набору предыдущий значений. Такие значения будем обозначать как значения лагов.</a:t>
+                </a:r>
+              </a:p>
+              <a:p>
+                <a:pPr>
+                  <a:lnSpc>
+                    <a:spcPct val="120000"/>
+                  </a:lnSpc>
+                  <a:spcBef>
+                    <a:spcPts val="600"/>
+                  </a:spcBef>
+                </a:pPr>
+                <a:r>
+                  <a:rPr lang="ru-RU" sz="2000" b="1" dirty="0"/>
+                  <a:t>Лаг</a:t>
+                </a:r>
+                <a:r>
+                  <a:rPr lang="ru-RU" sz="2000" dirty="0"/>
+                  <a:t> — это задержка во времени. </a:t>
+                </a:r>
+                <a:r>
+                  <a:rPr lang="ru-RU" sz="2000" b="1" dirty="0"/>
+                  <a:t>Лаг показывает, как прошлые данные влияют на текущее или будущее</a:t>
+                </a:r>
+                <a:r>
+                  <a:rPr lang="ru-RU" sz="2000" dirty="0"/>
+                  <a:t>.</a:t>
+                </a:r>
+              </a:p>
+              <a:p>
+                <a:pPr>
+                  <a:lnSpc>
+                    <a:spcPct val="120000"/>
+                  </a:lnSpc>
+                  <a:spcBef>
+                    <a:spcPts val="600"/>
+                  </a:spcBef>
+                </a:pPr>
+                <a:r>
+                  <a:rPr lang="ru-RU" sz="2000" dirty="0"/>
+                  <a:t>Лаг обозначается как  </a:t>
+                </a:r>
+                <a14:m>
+                  <m:oMath xmlns:m="http://schemas.openxmlformats.org/officeDocument/2006/math">
+                    <m:r>
+                      <a:rPr lang="ru-RU" sz="2000" i="1" dirty="0">
+                        <a:latin typeface="Cambria Math" panose="02040503050406030204" pitchFamily="18" charset="0"/>
+                      </a:rPr>
+                      <m:t>𝑦</m:t>
+                    </m:r>
+                  </m:oMath>
+                </a14:m>
+                <a:r>
+                  <a:rPr lang="ru-RU" sz="2000" baseline="-25000" dirty="0"/>
+                  <a:t>t−</a:t>
+                </a:r>
+                <a:r>
+                  <a:rPr lang="en-US" sz="2000" baseline="-25000" dirty="0"/>
+                  <a:t>p</a:t>
+                </a:r>
+                <a:r>
+                  <a:rPr lang="ru-RU" sz="2000" baseline="-25000" dirty="0"/>
+                  <a:t> </a:t>
+                </a:r>
+                <a:r>
+                  <a:rPr lang="en-US" sz="2000" baseline="-25000" dirty="0"/>
+                  <a:t>,</a:t>
+                </a:r>
+                <a:r>
+                  <a:rPr lang="en-US" sz="2000" dirty="0"/>
+                  <a:t> </a:t>
+                </a:r>
+                <a:r>
+                  <a:rPr lang="ru-RU" sz="2000" dirty="0"/>
+                  <a:t>где </a:t>
+                </a:r>
+                <a:r>
+                  <a:rPr lang="en-US" sz="2000" dirty="0"/>
+                  <a:t>p</a:t>
+                </a:r>
+                <a:r>
+                  <a:rPr lang="ru-RU" sz="2000" dirty="0"/>
+                  <a:t> — это число шагов назад.</a:t>
+                </a:r>
+                <a:endParaRPr lang="ru-RU" sz="1800" dirty="0"/>
+              </a:p>
+            </p:txBody>
+          </p:sp>
+        </mc:Choice>
+        <mc:Fallback xmlns="">
+          <p:sp>
+            <p:nvSpPr>
+              <p:cNvPr id="3" name="Объект 2"/>
+              <p:cNvSpPr>
+                <a:spLocks noGrp="1" noRot="1" noChangeAspect="1" noMove="1" noResize="1" noEditPoints="1" noAdjustHandles="1" noChangeArrowheads="1" noChangeShapeType="1" noTextEdit="1"/>
+              </p:cNvSpPr>
+              <p:nvPr>
+                <p:ph idx="1"/>
+              </p:nvPr>
+            </p:nvSpPr>
+            <p:spPr>
+              <a:xfrm>
+                <a:off x="285149" y="3720759"/>
+                <a:ext cx="6826743" cy="2085717"/>
+              </a:xfrm>
+              <a:blipFill>
+                <a:blip r:embed="rId3"/>
+                <a:stretch>
+                  <a:fillRect l="-714" t="-1458"/>
+                </a:stretch>
+              </a:blipFill>
+            </p:spPr>
+            <p:txBody>
+              <a:bodyPr/>
+              <a:lstStyle/>
+              <a:p>
+                <a:r>
+                  <a:rPr lang="ru-RU">
+                    <a:noFill/>
+                  </a:rPr>
+                  <a:t> </a:t>
+                </a:r>
+              </a:p>
+            </p:txBody>
+          </p:sp>
+        </mc:Fallback>
+      </mc:AlternateContent>
+      <p:sp>
+        <p:nvSpPr>
+          <p:cNvPr id="4" name="Номер слайда 3"/>
+          <p:cNvSpPr>
+            <a:spLocks noGrp="1"/>
+          </p:cNvSpPr>
+          <p:nvPr>
+            <p:ph type="sldNum" sz="quarter" idx="12"/>
+          </p:nvPr>
+        </p:nvSpPr>
+        <p:spPr/>
+        <p:txBody>
+          <a:bodyPr/>
+          <a:lstStyle/>
+          <a:p>
+            <a:fld id="{45C3B737-A709-4ABC-AFE0-A6B067850C48}" type="slidenum">
+              <a:rPr lang="en-US" smtClean="0"/>
+              <a:t>15</a:t>
+            </a:fld>
+            <a:endParaRPr lang="en-US" dirty="0"/>
+          </a:p>
+        </p:txBody>
+      </p:sp>
+      <p:sp>
+        <p:nvSpPr>
+          <p:cNvPr id="14" name="Прямоугольник 13"/>
+          <p:cNvSpPr/>
           <p:nvPr/>
-        </p:nvPicPr>
-        <p:blipFill>
-          <a:blip r:embed="rId3" cstate="hqprint">
-            <a:extLst>
-              <a:ext uri="{28A0092B-C50C-407E-A947-70E740481C1C}">
-                <a14:useLocalDpi xmlns:a14="http://schemas.microsoft.com/office/drawing/2010/main" val="0"/>
-              </a:ext>
-            </a:extLst>
-          </a:blip>
-          <a:srcRect/>
-          <a:stretch>
-            <a:fillRect/>
-          </a:stretch>
-        </p:blipFill>
-        <p:spPr bwMode="auto">
-          <a:xfrm>
-            <a:off x="7478973" y="1132763"/>
-            <a:ext cx="4212616" cy="3502406"/>
+        </p:nvSpPr>
+        <p:spPr>
+          <a:xfrm>
+            <a:off x="163002" y="6447950"/>
+            <a:ext cx="4746620" cy="307777"/>
           </a:xfrm>
           <a:prstGeom prst="rect">
             <a:avLst/>
           </a:prstGeom>
-          <a:noFill/>
-          <a:extLst>
-            <a:ext uri="{909E8E84-426E-40DD-AFC4-6F175D3DCCD1}">
-              <a14:hiddenFill xmlns:a14="http://schemas.microsoft.com/office/drawing/2010/main">
-                <a:solidFill>
-                  <a:srgbClr val="FFFFFF"/>
-                </a:solidFill>
-              </a14:hiddenFill>
-            </a:ext>
-          </a:extLst>
-        </p:spPr>
-      </p:pic>
-      <p:sp>
-        <p:nvSpPr>
-          <p:cNvPr id="13" name="TextBox 12">
+        </p:spPr>
+        <p:txBody>
+          <a:bodyPr wrap="none">
+            <a:spAutoFit/>
+          </a:bodyPr>
+          <a:lstStyle/>
+          <a:p>
+            <a:r>
+              <a:rPr lang="ru-RU" sz="1400" dirty="0"/>
+              <a:t>https://shakhbanov.org/vvedenie-v-analiz-vremennyh-ryadov/</a:t>
+            </a:r>
+          </a:p>
+        </p:txBody>
+      </p:sp>
+      <p:grpSp>
+        <p:nvGrpSpPr>
+          <p:cNvPr id="30" name="Группа 29"/>
+          <p:cNvGrpSpPr/>
+          <p:nvPr/>
+        </p:nvGrpSpPr>
+        <p:grpSpPr>
+          <a:xfrm>
+            <a:off x="6889334" y="3623058"/>
+            <a:ext cx="5074706" cy="2758117"/>
+            <a:chOff x="7350376" y="3922463"/>
+            <a:chExt cx="4072158" cy="2691644"/>
+          </a:xfrm>
+        </p:grpSpPr>
+        <p:pic>
+          <p:nvPicPr>
+            <p:cNvPr id="19" name="Picture 2">
+              <a:extLst>
+                <a:ext uri="{FF2B5EF4-FFF2-40B4-BE49-F238E27FC236}">
+                  <a16:creationId xmlns:a16="http://schemas.microsoft.com/office/drawing/2014/main" id="{01CFA530-140F-8B29-4421-F07E4B98F3FA}"/>
+                </a:ext>
+              </a:extLst>
+            </p:cNvPr>
+            <p:cNvPicPr>
+              <a:picLocks noChangeAspect="1" noChangeArrowheads="1"/>
+            </p:cNvPicPr>
+            <p:nvPr/>
+          </p:nvPicPr>
+          <p:blipFill>
+            <a:blip r:embed="rId4">
+              <a:extLst>
+                <a:ext uri="{28A0092B-C50C-407E-A947-70E740481C1C}">
+                  <a14:useLocalDpi xmlns:a14="http://schemas.microsoft.com/office/drawing/2010/main" val="0"/>
+                </a:ext>
+              </a:extLst>
+            </a:blip>
+            <a:srcRect/>
+            <a:stretch>
+              <a:fillRect/>
+            </a:stretch>
+          </p:blipFill>
+          <p:spPr bwMode="auto">
+            <a:xfrm>
+              <a:off x="7350376" y="3922463"/>
+              <a:ext cx="4072158" cy="2511464"/>
+            </a:xfrm>
+            <a:prstGeom prst="rect">
+              <a:avLst/>
+            </a:prstGeom>
+            <a:noFill/>
+            <a:extLst>
+              <a:ext uri="{909E8E84-426E-40DD-AFC4-6F175D3DCCD1}">
+                <a14:hiddenFill xmlns:a14="http://schemas.microsoft.com/office/drawing/2010/main">
+                  <a:solidFill>
+                    <a:srgbClr val="FFFFFF"/>
+                  </a:solidFill>
+                </a14:hiddenFill>
+              </a:ext>
+            </a:extLst>
+          </p:spPr>
+        </p:pic>
+        <p:cxnSp>
+          <p:nvCxnSpPr>
+            <p:cNvPr id="16" name="Прямая соединительная линия 15"/>
+            <p:cNvCxnSpPr/>
+            <p:nvPr/>
+          </p:nvCxnSpPr>
+          <p:spPr>
+            <a:xfrm>
+              <a:off x="7886701" y="5143567"/>
+              <a:ext cx="0" cy="1076258"/>
+            </a:xfrm>
+            <a:prstGeom prst="line">
+              <a:avLst/>
+            </a:prstGeom>
+          </p:spPr>
+          <p:style>
+            <a:lnRef idx="1">
+              <a:schemeClr val="accent1"/>
+            </a:lnRef>
+            <a:fillRef idx="0">
+              <a:schemeClr val="accent1"/>
+            </a:fillRef>
+            <a:effectRef idx="0">
+              <a:schemeClr val="accent1"/>
+            </a:effectRef>
+            <a:fontRef idx="minor">
+              <a:schemeClr val="tx1"/>
+            </a:fontRef>
+          </p:style>
+        </p:cxnSp>
+        <p:cxnSp>
+          <p:nvCxnSpPr>
+            <p:cNvPr id="18" name="Прямая со стрелкой 17"/>
+            <p:cNvCxnSpPr/>
+            <p:nvPr/>
+          </p:nvCxnSpPr>
+          <p:spPr>
+            <a:xfrm>
+              <a:off x="7886701" y="5995988"/>
+              <a:ext cx="771524" cy="0"/>
+            </a:xfrm>
+            <a:prstGeom prst="straightConnector1">
+              <a:avLst/>
+            </a:prstGeom>
+            <a:ln>
+              <a:headEnd type="triangle" w="med" len="med"/>
+              <a:tailEnd type="triangle" w="med" len="med"/>
+            </a:ln>
+          </p:spPr>
+          <p:style>
+            <a:lnRef idx="1">
+              <a:schemeClr val="accent1"/>
+            </a:lnRef>
+            <a:fillRef idx="0">
+              <a:schemeClr val="accent1"/>
+            </a:fillRef>
+            <a:effectRef idx="0">
+              <a:schemeClr val="accent1"/>
+            </a:effectRef>
+            <a:fontRef idx="minor">
+              <a:schemeClr val="tx1"/>
+            </a:fontRef>
+          </p:style>
+        </p:cxnSp>
+        <p:sp>
+          <p:nvSpPr>
+            <p:cNvPr id="20" name="TextBox 19"/>
+            <p:cNvSpPr txBox="1"/>
+            <p:nvPr/>
+          </p:nvSpPr>
+          <p:spPr>
+            <a:xfrm>
+              <a:off x="7993123" y="5929313"/>
+              <a:ext cx="617477" cy="369332"/>
+            </a:xfrm>
+            <a:prstGeom prst="rect">
+              <a:avLst/>
+            </a:prstGeom>
+            <a:noFill/>
+          </p:spPr>
+          <p:txBody>
+            <a:bodyPr wrap="none" rtlCol="0">
+              <a:spAutoFit/>
+            </a:bodyPr>
+            <a:lstStyle/>
+            <a:p>
+              <a:r>
+                <a:rPr lang="ru-RU" dirty="0"/>
+                <a:t>лаги</a:t>
+              </a:r>
+            </a:p>
+          </p:txBody>
+        </p:sp>
+        <p:sp>
+          <p:nvSpPr>
+            <p:cNvPr id="21" name="TextBox 20"/>
+            <p:cNvSpPr txBox="1"/>
+            <p:nvPr/>
+          </p:nvSpPr>
+          <p:spPr>
+            <a:xfrm>
+              <a:off x="8610600" y="6244775"/>
+              <a:ext cx="341312" cy="369332"/>
+            </a:xfrm>
+            <a:prstGeom prst="rect">
+              <a:avLst/>
+            </a:prstGeom>
+            <a:noFill/>
+          </p:spPr>
+          <p:txBody>
+            <a:bodyPr wrap="none" rtlCol="0">
+              <a:spAutoFit/>
+            </a:bodyPr>
+            <a:lstStyle/>
+            <a:p>
+              <a:r>
+                <a:rPr lang="en-US" dirty="0" err="1"/>
+                <a:t>y</a:t>
+              </a:r>
+              <a:r>
+                <a:rPr lang="en-US" baseline="-25000" dirty="0" err="1"/>
+                <a:t>t</a:t>
+              </a:r>
+              <a:endParaRPr lang="ru-RU" baseline="-25000" dirty="0"/>
+            </a:p>
+          </p:txBody>
+        </p:sp>
+        <p:sp>
+          <p:nvSpPr>
+            <p:cNvPr id="26" name="TextBox 25"/>
+            <p:cNvSpPr txBox="1"/>
+            <p:nvPr/>
+          </p:nvSpPr>
+          <p:spPr>
+            <a:xfrm>
+              <a:off x="7745612" y="6238373"/>
+              <a:ext cx="495022" cy="369332"/>
+            </a:xfrm>
+            <a:prstGeom prst="rect">
+              <a:avLst/>
+            </a:prstGeom>
+            <a:noFill/>
+          </p:spPr>
+          <p:txBody>
+            <a:bodyPr wrap="square" rtlCol="0">
+              <a:spAutoFit/>
+            </a:bodyPr>
+            <a:lstStyle/>
+            <a:p>
+              <a:r>
+                <a:rPr lang="en-US" dirty="0" err="1"/>
+                <a:t>y</a:t>
+              </a:r>
+              <a:r>
+                <a:rPr lang="en-US" baseline="-25000" dirty="0" err="1"/>
+                <a:t>t</a:t>
+              </a:r>
+              <a:r>
+                <a:rPr lang="en-US" baseline="-25000" dirty="0"/>
+                <a:t>-p</a:t>
+              </a:r>
+              <a:endParaRPr lang="ru-RU" baseline="-25000" dirty="0"/>
+            </a:p>
+          </p:txBody>
+        </p:sp>
+        <p:sp>
+          <p:nvSpPr>
+            <p:cNvPr id="27" name="TextBox 26"/>
+            <p:cNvSpPr txBox="1"/>
+            <p:nvPr/>
+          </p:nvSpPr>
+          <p:spPr>
+            <a:xfrm>
+              <a:off x="10862540" y="6220547"/>
+              <a:ext cx="498406" cy="369332"/>
+            </a:xfrm>
+            <a:prstGeom prst="rect">
+              <a:avLst/>
+            </a:prstGeom>
+            <a:noFill/>
+          </p:spPr>
+          <p:txBody>
+            <a:bodyPr wrap="none" rtlCol="0">
+              <a:spAutoFit/>
+            </a:bodyPr>
+            <a:lstStyle/>
+            <a:p>
+              <a:r>
+                <a:rPr lang="en-US" dirty="0" err="1"/>
+                <a:t>y</a:t>
+              </a:r>
+              <a:r>
+                <a:rPr lang="en-US" baseline="-25000" dirty="0" err="1"/>
+                <a:t>t+h</a:t>
+              </a:r>
+              <a:endParaRPr lang="ru-RU" baseline="-25000" dirty="0"/>
+            </a:p>
+          </p:txBody>
+        </p:sp>
+        <p:sp>
+          <p:nvSpPr>
+            <p:cNvPr id="28" name="TextBox 27"/>
+            <p:cNvSpPr txBox="1"/>
+            <p:nvPr/>
+          </p:nvSpPr>
+          <p:spPr>
+            <a:xfrm>
+              <a:off x="8632478" y="5687378"/>
+              <a:ext cx="2457468" cy="646331"/>
+            </a:xfrm>
+            <a:prstGeom prst="rect">
+              <a:avLst/>
+            </a:prstGeom>
+            <a:noFill/>
+          </p:spPr>
+          <p:txBody>
+            <a:bodyPr wrap="square" rtlCol="0">
+              <a:spAutoFit/>
+            </a:bodyPr>
+            <a:lstStyle/>
+            <a:p>
+              <a:pPr algn="r"/>
+              <a:r>
+                <a:rPr lang="ru-RU" dirty="0"/>
+                <a:t>Горизонт прогнозирования</a:t>
+              </a:r>
+            </a:p>
+          </p:txBody>
+        </p:sp>
+        <p:cxnSp>
+          <p:nvCxnSpPr>
+            <p:cNvPr id="29" name="Прямая со стрелкой 28"/>
+            <p:cNvCxnSpPr>
+              <a:endCxn id="28" idx="3"/>
+            </p:cNvCxnSpPr>
+            <p:nvPr/>
+          </p:nvCxnSpPr>
+          <p:spPr>
+            <a:xfrm>
+              <a:off x="8670926" y="5999163"/>
+              <a:ext cx="2419020" cy="11381"/>
+            </a:xfrm>
+            <a:prstGeom prst="straightConnector1">
+              <a:avLst/>
+            </a:prstGeom>
+            <a:ln>
+              <a:headEnd type="triangle" w="med" len="med"/>
+              <a:tailEnd type="triangle" w="med" len="med"/>
+            </a:ln>
+          </p:spPr>
+          <p:style>
+            <a:lnRef idx="1">
+              <a:schemeClr val="accent1"/>
+            </a:lnRef>
+            <a:fillRef idx="0">
+              <a:schemeClr val="accent1"/>
+            </a:fillRef>
+            <a:effectRef idx="0">
+              <a:schemeClr val="accent1"/>
+            </a:effectRef>
+            <a:fontRef idx="minor">
+              <a:schemeClr val="tx1"/>
+            </a:fontRef>
+          </p:style>
+        </p:cxnSp>
+        <p:cxnSp>
+          <p:nvCxnSpPr>
+            <p:cNvPr id="31" name="Прямая соединительная линия 30"/>
+            <p:cNvCxnSpPr/>
+            <p:nvPr/>
+          </p:nvCxnSpPr>
+          <p:spPr>
+            <a:xfrm>
+              <a:off x="11089946" y="5092079"/>
+              <a:ext cx="0" cy="1152696"/>
+            </a:xfrm>
+            <a:prstGeom prst="line">
+              <a:avLst/>
+            </a:prstGeom>
+          </p:spPr>
+          <p:style>
+            <a:lnRef idx="1">
+              <a:schemeClr val="accent1"/>
+            </a:lnRef>
+            <a:fillRef idx="0">
+              <a:schemeClr val="accent1"/>
+            </a:fillRef>
+            <a:effectRef idx="0">
+              <a:schemeClr val="accent1"/>
+            </a:effectRef>
+            <a:fontRef idx="minor">
+              <a:schemeClr val="tx1"/>
+            </a:fontRef>
+          </p:style>
+        </p:cxnSp>
+        <p:cxnSp>
+          <p:nvCxnSpPr>
+            <p:cNvPr id="40" name="Прямая соединительная линия 39"/>
+            <p:cNvCxnSpPr/>
+            <p:nvPr/>
+          </p:nvCxnSpPr>
+          <p:spPr>
+            <a:xfrm>
+              <a:off x="7764409" y="5143567"/>
+              <a:ext cx="0" cy="1110669"/>
+            </a:xfrm>
+            <a:prstGeom prst="line">
+              <a:avLst/>
+            </a:prstGeom>
+          </p:spPr>
+          <p:style>
+            <a:lnRef idx="1">
+              <a:schemeClr val="accent1"/>
+            </a:lnRef>
+            <a:fillRef idx="0">
+              <a:schemeClr val="accent1"/>
+            </a:fillRef>
+            <a:effectRef idx="0">
+              <a:schemeClr val="accent1"/>
+            </a:effectRef>
+            <a:fontRef idx="minor">
+              <a:schemeClr val="tx1"/>
+            </a:fontRef>
+          </p:style>
+        </p:cxnSp>
+        <p:sp>
+          <p:nvSpPr>
+            <p:cNvPr id="49" name="TextBox 48"/>
+            <p:cNvSpPr txBox="1"/>
+            <p:nvPr/>
+          </p:nvSpPr>
+          <p:spPr>
+            <a:xfrm>
+              <a:off x="7594656" y="4798615"/>
+              <a:ext cx="782798" cy="360431"/>
+            </a:xfrm>
+            <a:prstGeom prst="rect">
+              <a:avLst/>
+            </a:prstGeom>
+            <a:noFill/>
+          </p:spPr>
+          <p:txBody>
+            <a:bodyPr wrap="square" rtlCol="0">
+              <a:spAutoFit/>
+            </a:bodyPr>
+            <a:lstStyle/>
+            <a:p>
+              <a:r>
+                <a:rPr lang="ru-RU" dirty="0"/>
+                <a:t>Шаг ВР</a:t>
+              </a:r>
+              <a:endParaRPr lang="ru-RU" baseline="-25000" dirty="0"/>
+            </a:p>
+          </p:txBody>
+        </p:sp>
+      </p:grpSp>
+      <mc:AlternateContent xmlns:mc="http://schemas.openxmlformats.org/markup-compatibility/2006" xmlns:a14="http://schemas.microsoft.com/office/drawing/2010/main">
+        <mc:Choice Requires="a14">
+          <p:sp>
+            <p:nvSpPr>
+              <p:cNvPr id="25" name="Прямоугольник 24"/>
+              <p:cNvSpPr/>
+              <p:nvPr/>
+            </p:nvSpPr>
+            <p:spPr>
+              <a:xfrm>
+                <a:off x="285149" y="964689"/>
+                <a:ext cx="11497875" cy="2329036"/>
+              </a:xfrm>
+              <a:prstGeom prst="rect">
+                <a:avLst/>
+              </a:prstGeom>
+            </p:spPr>
+            <p:txBody>
+              <a:bodyPr wrap="square">
+                <a:spAutoFit/>
+              </a:bodyPr>
+              <a:lstStyle/>
+              <a:p>
+                <a:pPr marL="285750" indent="-285750">
+                  <a:spcBef>
+                    <a:spcPts val="600"/>
+                  </a:spcBef>
+                  <a:buFont typeface="Arial" panose="020B0604020202020204" pitchFamily="34" charset="0"/>
+                  <a:buChar char="•"/>
+                </a:pPr>
+                <a:r>
+                  <a:rPr lang="ru-RU" sz="2000" dirty="0"/>
+                  <a:t>Значение в момент времени </a:t>
+                </a:r>
+                <a14:m>
+                  <m:oMath xmlns:m="http://schemas.openxmlformats.org/officeDocument/2006/math">
+                    <m:r>
+                      <a:rPr lang="ru-RU" sz="2000" b="1" i="1" dirty="0">
+                        <a:latin typeface="Cambria Math" panose="02040503050406030204" pitchFamily="18" charset="0"/>
+                      </a:rPr>
+                      <m:t>𝒕</m:t>
+                    </m:r>
+                  </m:oMath>
+                </a14:m>
+                <a:r>
+                  <a:rPr lang="ru-RU" sz="2000" dirty="0"/>
+                  <a:t> — это </a:t>
+                </a:r>
+                <a14:m>
+                  <m:oMath xmlns:m="http://schemas.openxmlformats.org/officeDocument/2006/math">
+                    <m:r>
+                      <a:rPr lang="ru-RU" sz="2000" b="1" i="1" dirty="0">
+                        <a:latin typeface="Cambria Math" panose="02040503050406030204" pitchFamily="18" charset="0"/>
+                      </a:rPr>
+                      <m:t>𝒚</m:t>
+                    </m:r>
+                    <m:r>
+                      <a:rPr lang="ru-RU" sz="2000" b="1" i="1" baseline="-25000" dirty="0" err="1">
+                        <a:latin typeface="Cambria Math" panose="02040503050406030204" pitchFamily="18" charset="0"/>
+                      </a:rPr>
+                      <m:t>𝒕</m:t>
+                    </m:r>
+                  </m:oMath>
+                </a14:m>
+                <a:r>
+                  <a:rPr lang="ru-RU" sz="2000" dirty="0"/>
+                  <a:t>. </a:t>
+                </a:r>
+              </a:p>
+              <a:p>
+                <a:pPr marL="285750" indent="-285750">
+                  <a:spcBef>
+                    <a:spcPts val="600"/>
+                  </a:spcBef>
+                  <a:buFont typeface="Arial" panose="020B0604020202020204" pitchFamily="34" charset="0"/>
+                  <a:buChar char="•"/>
+                </a:pPr>
+                <a:r>
+                  <a:rPr lang="ru-RU" sz="2000" dirty="0"/>
+                  <a:t>Прошлое — обозначается как </a:t>
+                </a:r>
+                <a14:m>
+                  <m:oMath xmlns:m="http://schemas.openxmlformats.org/officeDocument/2006/math">
+                    <m:r>
+                      <a:rPr lang="ru-RU" sz="2000" b="1" i="1" dirty="0">
+                        <a:latin typeface="Cambria Math" panose="02040503050406030204" pitchFamily="18" charset="0"/>
+                      </a:rPr>
+                      <m:t>𝒕</m:t>
+                    </m:r>
+                    <m:r>
+                      <a:rPr lang="ru-RU" sz="2000" b="1" i="1" dirty="0">
+                        <a:latin typeface="Cambria Math" panose="02040503050406030204" pitchFamily="18" charset="0"/>
+                      </a:rPr>
+                      <m:t>−</m:t>
+                    </m:r>
+                    <m:r>
+                      <a:rPr lang="ru-RU" sz="2000" b="1" i="1" dirty="0">
+                        <a:latin typeface="Cambria Math" panose="02040503050406030204" pitchFamily="18" charset="0"/>
+                      </a:rPr>
+                      <m:t>𝟏</m:t>
+                    </m:r>
+                    <m:r>
+                      <a:rPr lang="ru-RU" sz="2000" b="1" i="1" dirty="0">
+                        <a:latin typeface="Cambria Math" panose="02040503050406030204" pitchFamily="18" charset="0"/>
+                      </a:rPr>
+                      <m:t>, </m:t>
+                    </m:r>
+                    <m:r>
+                      <a:rPr lang="ru-RU" sz="2000" b="1" i="1" dirty="0">
+                        <a:latin typeface="Cambria Math" panose="02040503050406030204" pitchFamily="18" charset="0"/>
+                      </a:rPr>
+                      <m:t>𝒕</m:t>
+                    </m:r>
+                    <m:r>
+                      <a:rPr lang="ru-RU" sz="2000" b="1" i="1" dirty="0">
+                        <a:latin typeface="Cambria Math" panose="02040503050406030204" pitchFamily="18" charset="0"/>
+                      </a:rPr>
+                      <m:t>−</m:t>
+                    </m:r>
+                    <m:r>
+                      <a:rPr lang="ru-RU" sz="2000" b="1" i="1" dirty="0">
+                        <a:latin typeface="Cambria Math" panose="02040503050406030204" pitchFamily="18" charset="0"/>
+                      </a:rPr>
+                      <m:t>𝟐</m:t>
+                    </m:r>
+                    <m:r>
+                      <a:rPr lang="ru-RU" sz="2000" b="1" i="1" dirty="0">
+                        <a:latin typeface="Cambria Math" panose="02040503050406030204" pitchFamily="18" charset="0"/>
+                      </a:rPr>
+                      <m:t>, … </m:t>
+                    </m:r>
+                  </m:oMath>
+                </a14:m>
+                <a:r>
+                  <a:rPr lang="ru-RU" sz="2000" dirty="0"/>
+                  <a:t>напр. температура вчера — </a:t>
+                </a:r>
+                <a14:m>
+                  <m:oMath xmlns:m="http://schemas.openxmlformats.org/officeDocument/2006/math">
+                    <m:r>
+                      <a:rPr lang="ru-RU" sz="2000" i="1" dirty="0">
+                        <a:latin typeface="Cambria Math" panose="02040503050406030204" pitchFamily="18" charset="0"/>
+                      </a:rPr>
+                      <m:t>𝑦</m:t>
+                    </m:r>
+                  </m:oMath>
+                </a14:m>
+                <a:r>
+                  <a:rPr lang="ru-RU" sz="2000" baseline="-25000" dirty="0"/>
+                  <a:t>t−1</a:t>
+                </a:r>
+                <a:r>
+                  <a:rPr lang="ru-RU" sz="2000" dirty="0"/>
+                  <a:t>.</a:t>
+                </a:r>
+              </a:p>
+              <a:p>
+                <a:pPr marL="285750" indent="-285750">
+                  <a:spcBef>
+                    <a:spcPts val="600"/>
+                  </a:spcBef>
+                  <a:buFont typeface="Arial" panose="020B0604020202020204" pitchFamily="34" charset="0"/>
+                  <a:buChar char="•"/>
+                </a:pPr>
+                <a:r>
+                  <a:rPr lang="ru-RU" sz="2000" dirty="0"/>
+                  <a:t>Будущее — обозначается как </a:t>
+                </a:r>
+                <a14:m>
+                  <m:oMath xmlns:m="http://schemas.openxmlformats.org/officeDocument/2006/math">
+                    <m:r>
+                      <a:rPr lang="ru-RU" sz="2000" b="1" i="1" dirty="0">
+                        <a:latin typeface="Cambria Math" panose="02040503050406030204" pitchFamily="18" charset="0"/>
+                      </a:rPr>
+                      <m:t>𝒕</m:t>
+                    </m:r>
+                    <m:r>
+                      <a:rPr lang="ru-RU" sz="2000" b="1" i="1" dirty="0">
+                        <a:latin typeface="Cambria Math" panose="02040503050406030204" pitchFamily="18" charset="0"/>
+                      </a:rPr>
+                      <m:t>+</m:t>
+                    </m:r>
+                    <m:r>
+                      <a:rPr lang="ru-RU" sz="2000" b="1" i="1" dirty="0">
+                        <a:latin typeface="Cambria Math" panose="02040503050406030204" pitchFamily="18" charset="0"/>
+                      </a:rPr>
+                      <m:t>𝟏</m:t>
+                    </m:r>
+                    <m:r>
+                      <a:rPr lang="ru-RU" sz="2000" b="1" i="1" dirty="0">
+                        <a:latin typeface="Cambria Math" panose="02040503050406030204" pitchFamily="18" charset="0"/>
+                      </a:rPr>
+                      <m:t>, </m:t>
+                    </m:r>
+                    <m:r>
+                      <a:rPr lang="ru-RU" sz="2000" b="1" i="1" dirty="0">
+                        <a:latin typeface="Cambria Math" panose="02040503050406030204" pitchFamily="18" charset="0"/>
+                      </a:rPr>
+                      <m:t>𝒕</m:t>
+                    </m:r>
+                    <m:r>
+                      <a:rPr lang="ru-RU" sz="2000" b="1" i="1" dirty="0">
+                        <a:latin typeface="Cambria Math" panose="02040503050406030204" pitchFamily="18" charset="0"/>
+                      </a:rPr>
+                      <m:t>+</m:t>
+                    </m:r>
+                    <m:r>
+                      <a:rPr lang="ru-RU" sz="2000" b="1" i="1" dirty="0">
+                        <a:latin typeface="Cambria Math" panose="02040503050406030204" pitchFamily="18" charset="0"/>
+                      </a:rPr>
+                      <m:t>𝟐</m:t>
+                    </m:r>
+                    <m:r>
+                      <a:rPr lang="ru-RU" sz="2000" b="1" i="1" dirty="0">
+                        <a:latin typeface="Cambria Math" panose="02040503050406030204" pitchFamily="18" charset="0"/>
+                      </a:rPr>
+                      <m:t>, … </m:t>
+                    </m:r>
+                  </m:oMath>
+                </a14:m>
+                <a:r>
+                  <a:rPr lang="ru-RU" sz="2000" dirty="0"/>
+                  <a:t>напр. прогноз температуры на завтра — </a:t>
+                </a:r>
+                <a14:m>
+                  <m:oMath xmlns:m="http://schemas.openxmlformats.org/officeDocument/2006/math">
+                    <m:r>
+                      <a:rPr lang="ru-RU" sz="2000" i="1" dirty="0">
+                        <a:latin typeface="Cambria Math" panose="02040503050406030204" pitchFamily="18" charset="0"/>
+                      </a:rPr>
+                      <m:t>𝑦</m:t>
+                    </m:r>
+                  </m:oMath>
+                </a14:m>
+                <a:r>
+                  <a:rPr lang="ru-RU" sz="2000" baseline="-25000" dirty="0"/>
+                  <a:t>t+1</a:t>
+                </a:r>
+                <a:r>
+                  <a:rPr lang="ru-RU" sz="2000" dirty="0"/>
+                  <a:t>.</a:t>
+                </a:r>
+              </a:p>
+              <a:p>
+                <a:pPr marL="285750" indent="-285750">
+                  <a:spcBef>
+                    <a:spcPts val="600"/>
+                  </a:spcBef>
+                  <a:buFont typeface="Arial" panose="020B0604020202020204" pitchFamily="34" charset="0"/>
+                  <a:buChar char="•"/>
+                </a:pPr>
+                <a:r>
+                  <a:rPr lang="ru-RU" sz="2000" dirty="0"/>
+                  <a:t>Прогнозы на </a:t>
+                </a:r>
+                <a14:m>
+                  <m:oMath xmlns:m="http://schemas.openxmlformats.org/officeDocument/2006/math">
+                    <m:r>
+                      <a:rPr lang="en-US" sz="2000" b="1" i="1" dirty="0">
+                        <a:latin typeface="Cambria Math" panose="02040503050406030204" pitchFamily="18" charset="0"/>
+                      </a:rPr>
+                      <m:t>𝒉</m:t>
+                    </m:r>
+                  </m:oMath>
+                </a14:m>
+                <a:r>
+                  <a:rPr lang="en-US" sz="2000" dirty="0"/>
+                  <a:t> </a:t>
+                </a:r>
+                <a:r>
+                  <a:rPr lang="ru-RU" sz="2000" dirty="0"/>
+                  <a:t>шагов вперед – </a:t>
+                </a:r>
+                <a:r>
+                  <a:rPr lang="ru-RU" sz="2000" b="1" dirty="0"/>
+                  <a:t>горизонт прогнозирования </a:t>
+                </a:r>
+                <a:endParaRPr lang="en-US" sz="2000" b="1" dirty="0"/>
+              </a:p>
+              <a:p>
+                <a:pPr marL="285750" indent="-285750">
+                  <a:spcBef>
+                    <a:spcPts val="600"/>
+                  </a:spcBef>
+                  <a:buFont typeface="Arial" panose="020B0604020202020204" pitchFamily="34" charset="0"/>
+                  <a:buChar char="•"/>
+                </a:pPr>
+                <a:r>
+                  <a:rPr lang="ru-RU" sz="2000" dirty="0"/>
+                  <a:t>Предсказанное значение на шаге </a:t>
+                </a:r>
+                <a14:m>
+                  <m:oMath xmlns:m="http://schemas.openxmlformats.org/officeDocument/2006/math">
+                    <m:r>
+                      <a:rPr lang="en-US" sz="2000" b="1" i="1" dirty="0">
+                        <a:latin typeface="Cambria Math" panose="02040503050406030204" pitchFamily="18" charset="0"/>
+                      </a:rPr>
+                      <m:t>𝒉</m:t>
+                    </m:r>
+                  </m:oMath>
+                </a14:m>
+                <a:r>
+                  <a:rPr lang="en-US" sz="2000" dirty="0"/>
+                  <a:t> </a:t>
+                </a:r>
+                <a:r>
+                  <a:rPr lang="ru-RU" sz="2000" dirty="0"/>
+                  <a:t>обозначим как </a:t>
+                </a:r>
+                <a14:m>
+                  <m:oMath xmlns:m="http://schemas.openxmlformats.org/officeDocument/2006/math">
+                    <m:acc>
+                      <m:accPr>
+                        <m:chr m:val="̂"/>
+                        <m:ctrlPr>
+                          <a:rPr lang="en-US" sz="2000" b="1" i="1" dirty="0">
+                            <a:latin typeface="Cambria Math" panose="02040503050406030204" pitchFamily="18" charset="0"/>
+                          </a:rPr>
+                        </m:ctrlPr>
+                      </m:accPr>
+                      <m:e>
+                        <m:r>
+                          <a:rPr lang="en-US" sz="2000" b="1" i="1" dirty="0">
+                            <a:latin typeface="Cambria Math" panose="02040503050406030204" pitchFamily="18" charset="0"/>
+                          </a:rPr>
+                          <m:t>𝒚</m:t>
+                        </m:r>
+                      </m:e>
+                    </m:acc>
+                    <m:r>
+                      <m:rPr>
+                        <m:nor/>
+                      </m:rPr>
+                      <a:rPr lang="ru-RU" sz="2000" b="1" baseline="-25000" dirty="0"/>
+                      <m:t>t</m:t>
+                    </m:r>
+                    <m:r>
+                      <m:rPr>
+                        <m:nor/>
+                      </m:rPr>
+                      <a:rPr lang="ru-RU" sz="2000" b="1" baseline="-25000" dirty="0"/>
+                      <m:t>+</m:t>
+                    </m:r>
+                    <m:r>
+                      <m:rPr>
+                        <m:nor/>
+                      </m:rPr>
+                      <a:rPr lang="en-US" sz="2000" b="1" baseline="-25000" dirty="0"/>
+                      <m:t>h</m:t>
+                    </m:r>
+                  </m:oMath>
+                </a14:m>
+                <a:endParaRPr lang="ru-RU" sz="2000" b="1" dirty="0"/>
+              </a:p>
+              <a:p>
+                <a:pPr marL="285750" indent="-285750">
+                  <a:spcBef>
+                    <a:spcPts val="600"/>
+                  </a:spcBef>
+                  <a:buFont typeface="Arial" panose="020B0604020202020204" pitchFamily="34" charset="0"/>
+                  <a:buChar char="•"/>
+                </a:pPr>
+                <a:r>
+                  <a:rPr lang="ru-RU" sz="2000" b="1" dirty="0"/>
+                  <a:t>Задача прогнозирования</a:t>
+                </a:r>
+                <a14:m>
+                  <m:oMath xmlns:m="http://schemas.openxmlformats.org/officeDocument/2006/math">
+                    <m:r>
+                      <a:rPr lang="en-US" sz="2000" b="1" i="0" dirty="0" smtClean="0">
+                        <a:latin typeface="Cambria Math" panose="02040503050406030204" pitchFamily="18" charset="0"/>
+                      </a:rPr>
+                      <m:t> </m:t>
+                    </m:r>
+                    <m:r>
+                      <a:rPr lang="fr-FR" sz="2000" i="1" dirty="0">
+                        <a:latin typeface="Cambria Math" panose="02040503050406030204" pitchFamily="18" charset="0"/>
+                      </a:rPr>
+                      <m:t>𝐸</m:t>
+                    </m:r>
+                    <m:d>
+                      <m:dPr>
+                        <m:ctrlPr>
+                          <a:rPr lang="fr-FR" sz="2000" i="1" dirty="0">
+                            <a:latin typeface="Cambria Math" panose="02040503050406030204" pitchFamily="18" charset="0"/>
+                          </a:rPr>
+                        </m:ctrlPr>
+                      </m:dPr>
+                      <m:e>
+                        <m:sSub>
+                          <m:sSubPr>
+                            <m:ctrlPr>
+                              <a:rPr lang="fr-FR" sz="2000" i="1" dirty="0">
+                                <a:latin typeface="Cambria Math" panose="02040503050406030204" pitchFamily="18" charset="0"/>
+                              </a:rPr>
+                            </m:ctrlPr>
+                          </m:sSubPr>
+                          <m:e>
+                            <m:acc>
+                              <m:accPr>
+                                <m:chr m:val="̂"/>
+                                <m:ctrlPr>
+                                  <a:rPr lang="en-US" sz="2000" i="1" dirty="0">
+                                    <a:latin typeface="Cambria Math" panose="02040503050406030204" pitchFamily="18" charset="0"/>
+                                  </a:rPr>
+                                </m:ctrlPr>
+                              </m:accPr>
+                              <m:e>
+                                <m:r>
+                                  <a:rPr lang="en-US" sz="2000" i="1" dirty="0">
+                                    <a:latin typeface="Cambria Math" panose="02040503050406030204" pitchFamily="18" charset="0"/>
+                                  </a:rPr>
+                                  <m:t>𝑦</m:t>
+                                </m:r>
+                              </m:e>
+                            </m:acc>
+                          </m:e>
+                          <m:sub>
+                            <m:r>
+                              <a:rPr lang="fr-FR" sz="2000" i="1" dirty="0">
+                                <a:latin typeface="Cambria Math" panose="02040503050406030204" pitchFamily="18" charset="0"/>
+                              </a:rPr>
+                              <m:t>𝑇</m:t>
+                            </m:r>
+                          </m:sub>
+                        </m:sSub>
+                        <m:r>
+                          <a:rPr lang="fr-FR" sz="2000" i="1" dirty="0">
+                            <a:latin typeface="Cambria Math" panose="02040503050406030204" pitchFamily="18" charset="0"/>
+                          </a:rPr>
+                          <m:t>+</m:t>
+                        </m:r>
+                        <m:r>
+                          <a:rPr lang="fr-FR" sz="2000" i="1" dirty="0">
+                            <a:latin typeface="Cambria Math" panose="02040503050406030204" pitchFamily="18" charset="0"/>
+                          </a:rPr>
+                          <m:t>h</m:t>
+                        </m:r>
+                        <m:r>
+                          <a:rPr lang="fr-FR" sz="2000" i="1" dirty="0">
+                            <a:latin typeface="Cambria Math" panose="02040503050406030204" pitchFamily="18" charset="0"/>
+                          </a:rPr>
+                          <m:t>∣</m:t>
+                        </m:r>
+                        <m:sSubSup>
+                          <m:sSubSupPr>
+                            <m:ctrlPr>
+                              <a:rPr lang="fr-FR" sz="2000" i="1" dirty="0">
+                                <a:latin typeface="Cambria Math" panose="02040503050406030204" pitchFamily="18" charset="0"/>
+                              </a:rPr>
+                            </m:ctrlPr>
+                          </m:sSubSupPr>
+                          <m:e>
+                            <m:d>
+                              <m:dPr>
+                                <m:ctrlPr>
+                                  <a:rPr lang="fr-FR" sz="2000" i="1" dirty="0">
+                                    <a:latin typeface="Cambria Math" panose="02040503050406030204" pitchFamily="18" charset="0"/>
+                                  </a:rPr>
+                                </m:ctrlPr>
+                              </m:dPr>
+                              <m:e>
+                                <m:sSub>
+                                  <m:sSubPr>
+                                    <m:ctrlPr>
+                                      <a:rPr lang="fr-FR" sz="2000" i="1" dirty="0">
+                                        <a:latin typeface="Cambria Math" panose="02040503050406030204" pitchFamily="18" charset="0"/>
+                                      </a:rPr>
+                                    </m:ctrlPr>
+                                  </m:sSubPr>
+                                  <m:e>
+                                    <m:r>
+                                      <a:rPr lang="fr-FR" sz="2000" i="1" dirty="0">
+                                        <a:latin typeface="Cambria Math" panose="02040503050406030204" pitchFamily="18" charset="0"/>
+                                      </a:rPr>
+                                      <m:t>𝑦</m:t>
+                                    </m:r>
+                                  </m:e>
+                                  <m:sub>
+                                    <m:r>
+                                      <a:rPr lang="fr-FR" sz="2000" i="1" dirty="0">
+                                        <a:latin typeface="Cambria Math" panose="02040503050406030204" pitchFamily="18" charset="0"/>
+                                      </a:rPr>
+                                      <m:t>𝑡</m:t>
+                                    </m:r>
+                                  </m:sub>
+                                </m:sSub>
+                              </m:e>
+                            </m:d>
+                          </m:e>
+                          <m:sub>
+                            <m:r>
+                              <a:rPr lang="fr-FR" sz="2000" i="1" dirty="0">
+                                <a:latin typeface="Cambria Math" panose="02040503050406030204" pitchFamily="18" charset="0"/>
+                              </a:rPr>
+                              <m:t>𝑡</m:t>
+                            </m:r>
+                            <m:r>
+                              <a:rPr lang="fr-FR" sz="2000" i="1" dirty="0">
+                                <a:latin typeface="Cambria Math" panose="02040503050406030204" pitchFamily="18" charset="0"/>
+                              </a:rPr>
+                              <m:t>=1</m:t>
+                            </m:r>
+                          </m:sub>
+                          <m:sup>
+                            <m:r>
+                              <a:rPr lang="fr-FR" sz="2000" i="1" dirty="0">
+                                <a:latin typeface="Cambria Math" panose="02040503050406030204" pitchFamily="18" charset="0"/>
+                              </a:rPr>
+                              <m:t>𝑇</m:t>
+                            </m:r>
+                          </m:sup>
+                        </m:sSubSup>
+                      </m:e>
+                    </m:d>
+                    <m:r>
+                      <a:rPr lang="en-US" sz="2000" b="0" i="1" dirty="0" smtClean="0">
+                        <a:latin typeface="Cambria Math" panose="02040503050406030204" pitchFamily="18" charset="0"/>
+                      </a:rPr>
+                      <m:t>→</m:t>
+                    </m:r>
+                    <m:sSub>
+                      <m:sSubPr>
+                        <m:ctrlPr>
+                          <a:rPr lang="fr-FR" sz="2000" i="1" dirty="0">
+                            <a:latin typeface="Cambria Math" panose="02040503050406030204" pitchFamily="18" charset="0"/>
+                          </a:rPr>
+                        </m:ctrlPr>
+                      </m:sSubPr>
+                      <m:e>
+                        <m:r>
+                          <a:rPr lang="en-US" sz="2000" i="1" dirty="0">
+                            <a:latin typeface="Cambria Math" panose="02040503050406030204" pitchFamily="18" charset="0"/>
+                          </a:rPr>
+                          <m:t>𝑦</m:t>
+                        </m:r>
+                      </m:e>
+                      <m:sub>
+                        <m:r>
+                          <a:rPr lang="fr-FR" sz="2000" i="1" dirty="0">
+                            <a:latin typeface="Cambria Math" panose="02040503050406030204" pitchFamily="18" charset="0"/>
+                          </a:rPr>
+                          <m:t>𝑇</m:t>
+                        </m:r>
+                      </m:sub>
+                    </m:sSub>
+                    <m:r>
+                      <a:rPr lang="fr-FR" sz="2000" i="1" dirty="0">
+                        <a:latin typeface="Cambria Math" panose="02040503050406030204" pitchFamily="18" charset="0"/>
+                      </a:rPr>
+                      <m:t>+</m:t>
+                    </m:r>
+                    <m:r>
+                      <a:rPr lang="fr-FR" sz="2000" i="1" dirty="0">
+                        <a:latin typeface="Cambria Math" panose="02040503050406030204" pitchFamily="18" charset="0"/>
+                      </a:rPr>
+                      <m:t>h</m:t>
+                    </m:r>
+                  </m:oMath>
+                </a14:m>
+                <a:endParaRPr lang="en-US" sz="2000" dirty="0"/>
+              </a:p>
+            </p:txBody>
+          </p:sp>
+        </mc:Choice>
+        <mc:Fallback xmlns="">
+          <p:sp>
+            <p:nvSpPr>
+              <p:cNvPr id="25" name="Прямоугольник 24"/>
+              <p:cNvSpPr>
+                <a:spLocks noRot="1" noChangeAspect="1" noMove="1" noResize="1" noEditPoints="1" noAdjustHandles="1" noChangeArrowheads="1" noChangeShapeType="1" noTextEdit="1"/>
+              </p:cNvSpPr>
+              <p:nvPr/>
+            </p:nvSpPr>
+            <p:spPr>
+              <a:xfrm>
+                <a:off x="285149" y="964689"/>
+                <a:ext cx="11497875" cy="2329036"/>
+              </a:xfrm>
+              <a:prstGeom prst="rect">
+                <a:avLst/>
+              </a:prstGeom>
+              <a:blipFill>
+                <a:blip r:embed="rId5"/>
+                <a:stretch>
+                  <a:fillRect l="-477" t="-1309" b="-3927"/>
+                </a:stretch>
+              </a:blipFill>
+            </p:spPr>
+            <p:txBody>
+              <a:bodyPr/>
+              <a:lstStyle/>
+              <a:p>
+                <a:r>
+                  <a:rPr lang="ru-RU">
+                    <a:noFill/>
+                  </a:rPr>
+                  <a:t> </a:t>
+                </a:r>
+              </a:p>
+            </p:txBody>
+          </p:sp>
+        </mc:Fallback>
+      </mc:AlternateContent>
+      <p:sp>
+        <p:nvSpPr>
+          <p:cNvPr id="37" name="TextBox 36">
             <a:extLst>
               <a:ext uri="{FF2B5EF4-FFF2-40B4-BE49-F238E27FC236}">
-                <a16:creationId xmlns:a16="http://schemas.microsoft.com/office/drawing/2014/main" id="{9DD180F2-529F-8133-D6ED-F9CAB89D8902}"/>
+                <a16:creationId xmlns:a16="http://schemas.microsoft.com/office/drawing/2014/main" id="{E58F1B07-EE24-C7CD-1951-723D0C1BF829}"/>
               </a:ext>
             </a:extLst>
           </p:cNvPr>
@@ -5926,8 +7146,8 @@
         </p:nvSpPr>
         <p:spPr>
           <a:xfrm>
-            <a:off x="7314092" y="632673"/>
-            <a:ext cx="3558346" cy="584775"/>
+            <a:off x="4795818" y="6478728"/>
+            <a:ext cx="6746913" cy="276999"/>
           </a:xfrm>
           <a:prstGeom prst="rect">
             <a:avLst/>
@@ -5935,137 +7155,143 @@
           <a:noFill/>
         </p:spPr>
         <p:txBody>
-          <a:bodyPr wrap="none" rtlCol="0">
+          <a:bodyPr wrap="square">
             <a:spAutoFit/>
           </a:bodyPr>
           <a:lstStyle/>
           <a:p>
             <a:r>
-              <a:rPr lang="ru-RU" sz="3200" dirty="0" err="1"/>
-              <a:t>Многопеременные</a:t>
-            </a:r>
-            <a:endParaRPr lang="ru-RU" sz="3200" dirty="0"/>
-          </a:p>
-        </p:txBody>
-      </p:sp>
-      <p:pic>
-        <p:nvPicPr>
-          <p:cNvPr id="17" name="Picture 2">
-            <a:extLst>
-              <a:ext uri="{FF2B5EF4-FFF2-40B4-BE49-F238E27FC236}">
-                <a16:creationId xmlns:a16="http://schemas.microsoft.com/office/drawing/2014/main" id="{F0FE80FE-BB9D-9DC1-C5CA-E7B33EE048D6}"/>
-              </a:ext>
-            </a:extLst>
-          </p:cNvPr>
-          <p:cNvPicPr>
-            <a:picLocks noChangeAspect="1" noChangeArrowheads="1"/>
-          </p:cNvPicPr>
+              <a:rPr lang="ru-RU" sz="1200" dirty="0" err="1"/>
+              <a:t>https</a:t>
+            </a:r>
+            <a:r>
+              <a:rPr lang="ru-RU" sz="1200" dirty="0"/>
+              <a:t>://</a:t>
+            </a:r>
+            <a:r>
+              <a:rPr lang="ru-RU" sz="1200" dirty="0" err="1"/>
+              <a:t>colab.research.google.com</a:t>
+            </a:r>
+            <a:r>
+              <a:rPr lang="ru-RU" sz="1200" dirty="0"/>
+              <a:t>/</a:t>
+            </a:r>
+            <a:r>
+              <a:rPr lang="ru-RU" sz="1200" dirty="0" err="1"/>
+              <a:t>drive</a:t>
+            </a:r>
+            <a:r>
+              <a:rPr lang="ru-RU" sz="1200" dirty="0"/>
+              <a:t>/1EnMNj9cTV1JhMQBvx2VvXaahxBPoCDML?usp=</a:t>
+            </a:r>
+            <a:r>
+              <a:rPr lang="ru-RU" sz="1200" dirty="0" err="1"/>
+              <a:t>sharing</a:t>
+            </a:r>
+            <a:endParaRPr lang="ru-RU" sz="1200" dirty="0"/>
+          </a:p>
+        </p:txBody>
+      </p:sp>
+      <p:cxnSp>
+        <p:nvCxnSpPr>
+          <p:cNvPr id="39" name="Прямая со стрелкой 38"/>
+          <p:cNvCxnSpPr/>
           <p:nvPr/>
-        </p:nvPicPr>
-        <p:blipFill>
-          <a:blip r:embed="rId4">
-            <a:extLst>
-              <a:ext uri="{28A0092B-C50C-407E-A947-70E740481C1C}">
-                <a14:useLocalDpi xmlns:a14="http://schemas.microsoft.com/office/drawing/2010/main" val="0"/>
-              </a:ext>
-            </a:extLst>
-          </a:blip>
-          <a:srcRect/>
-          <a:stretch>
-            <a:fillRect/>
-          </a:stretch>
-        </p:blipFill>
-        <p:spPr bwMode="auto">
-          <a:xfrm>
-            <a:off x="838200" y="1217448"/>
-            <a:ext cx="3194531" cy="3108892"/>
-          </a:xfrm>
-          <a:prstGeom prst="rect">
+        </p:nvCxnSpPr>
+        <p:spPr>
+          <a:xfrm flipH="1">
+            <a:off x="7557700" y="5007216"/>
+            <a:ext cx="286138" cy="0"/>
+          </a:xfrm>
+          <a:prstGeom prst="straightConnector1">
             <a:avLst/>
           </a:prstGeom>
-          <a:noFill/>
-          <a:extLst>
-            <a:ext uri="{909E8E84-426E-40DD-AFC4-6F175D3DCCD1}">
-              <a14:hiddenFill xmlns:a14="http://schemas.microsoft.com/office/drawing/2010/main">
-                <a:solidFill>
-                  <a:srgbClr val="FFFFFF"/>
-                </a:solidFill>
-              </a14:hiddenFill>
-            </a:ext>
-          </a:extLst>
-        </p:spPr>
-      </p:pic>
-      <p:sp>
-        <p:nvSpPr>
-          <p:cNvPr id="18" name="TextBox 17">
-            <a:extLst>
-              <a:ext uri="{FF2B5EF4-FFF2-40B4-BE49-F238E27FC236}">
-                <a16:creationId xmlns:a16="http://schemas.microsoft.com/office/drawing/2014/main" id="{9DD180F2-529F-8133-D6ED-F9CAB89D8902}"/>
-              </a:ext>
-            </a:extLst>
-          </p:cNvPr>
-          <p:cNvSpPr txBox="1"/>
+          <a:ln>
+            <a:tailEnd type="triangle"/>
+          </a:ln>
+        </p:spPr>
+        <p:style>
+          <a:lnRef idx="1">
+            <a:schemeClr val="accent1"/>
+          </a:lnRef>
+          <a:fillRef idx="0">
+            <a:schemeClr val="accent1"/>
+          </a:fillRef>
+          <a:effectRef idx="0">
+            <a:schemeClr val="accent1"/>
+          </a:effectRef>
+          <a:fontRef idx="minor">
+            <a:schemeClr val="tx1"/>
+          </a:fontRef>
+        </p:style>
+      </p:cxnSp>
+      <p:cxnSp>
+        <p:nvCxnSpPr>
+          <p:cNvPr id="42" name="Прямая соединительная линия 41"/>
+          <p:cNvCxnSpPr/>
           <p:nvPr/>
-        </p:nvSpPr>
+        </p:nvCxnSpPr>
         <p:spPr>
-          <a:xfrm>
-            <a:off x="344748" y="595148"/>
-            <a:ext cx="3345147" cy="584775"/>
-          </a:xfrm>
-          <a:prstGeom prst="rect">
+          <a:xfrm flipH="1">
+            <a:off x="7405300" y="5003006"/>
+            <a:ext cx="152400" cy="0"/>
+          </a:xfrm>
+          <a:prstGeom prst="line">
             <a:avLst/>
           </a:prstGeom>
-          <a:noFill/>
-        </p:spPr>
-        <p:txBody>
-          <a:bodyPr wrap="none" rtlCol="0">
-            <a:spAutoFit/>
-          </a:bodyPr>
-          <a:lstStyle/>
-          <a:p>
-            <a:r>
-              <a:rPr lang="ru-RU" sz="3200" dirty="0" err="1"/>
-              <a:t>Однопеременные</a:t>
-            </a:r>
-            <a:endParaRPr lang="ru-RU" sz="3200" dirty="0"/>
-          </a:p>
-        </p:txBody>
-      </p:sp>
-      <p:pic>
-        <p:nvPicPr>
-          <p:cNvPr id="3" name="Рисунок 2">
-            <a:extLst>
-              <a:ext uri="{FF2B5EF4-FFF2-40B4-BE49-F238E27FC236}">
-                <a16:creationId xmlns:a16="http://schemas.microsoft.com/office/drawing/2014/main" id="{5168CFFE-8428-D4A6-71E0-8396480A6443}"/>
-              </a:ext>
-            </a:extLst>
-          </p:cNvPr>
-          <p:cNvPicPr>
-            <a:picLocks noChangeAspect="1"/>
-          </p:cNvPicPr>
+        </p:spPr>
+        <p:style>
+          <a:lnRef idx="1">
+            <a:schemeClr val="accent1"/>
+          </a:lnRef>
+          <a:fillRef idx="0">
+            <a:schemeClr val="accent1"/>
+          </a:fillRef>
+          <a:effectRef idx="0">
+            <a:schemeClr val="accent1"/>
+          </a:effectRef>
+          <a:fontRef idx="minor">
+            <a:schemeClr val="tx1"/>
+          </a:fontRef>
+        </p:style>
+      </p:cxnSp>
+      <p:cxnSp>
+        <p:nvCxnSpPr>
+          <p:cNvPr id="44" name="Прямая со стрелкой 43"/>
+          <p:cNvCxnSpPr/>
           <p:nvPr/>
-        </p:nvPicPr>
-        <p:blipFill>
-          <a:blip r:embed="rId5"/>
-          <a:srcRect b="56643"/>
-          <a:stretch>
-            <a:fillRect/>
-          </a:stretch>
-        </p:blipFill>
+        </p:nvCxnSpPr>
         <p:spPr>
           <a:xfrm>
-            <a:off x="1630247" y="4711699"/>
-            <a:ext cx="7741822" cy="1857706"/>
-          </a:xfrm>
-          <a:prstGeom prst="rect">
+            <a:off x="7193756" y="5003006"/>
+            <a:ext cx="211544" cy="0"/>
+          </a:xfrm>
+          <a:prstGeom prst="straightConnector1">
             <a:avLst/>
           </a:prstGeom>
-        </p:spPr>
-      </p:pic>
+          <a:ln>
+            <a:tailEnd type="triangle"/>
+          </a:ln>
+        </p:spPr>
+        <p:style>
+          <a:lnRef idx="1">
+            <a:schemeClr val="accent1"/>
+          </a:lnRef>
+          <a:fillRef idx="0">
+            <a:schemeClr val="accent1"/>
+          </a:fillRef>
+          <a:effectRef idx="0">
+            <a:schemeClr val="accent1"/>
+          </a:effectRef>
+          <a:fontRef idx="minor">
+            <a:schemeClr val="tx1"/>
+          </a:fontRef>
+        </p:style>
+      </p:cxnSp>
     </p:spTree>
     <p:extLst>
       <p:ext uri="{BB962C8B-B14F-4D97-AF65-F5344CB8AC3E}">
-        <p14:creationId xmlns:p14="http://schemas.microsoft.com/office/powerpoint/2010/main" val="249945931"/>
+        <p14:creationId xmlns:p14="http://schemas.microsoft.com/office/powerpoint/2010/main" val="2514311435"/>
       </p:ext>
     </p:extLst>
   </p:cSld>
@@ -6087,13 +7313,7 @@
   <p:cSld>
     <p:spTree>
       <p:nvGrpSpPr>
-        <p:cNvPr id="1" name="">
-          <a:extLst>
-            <a:ext uri="{FF2B5EF4-FFF2-40B4-BE49-F238E27FC236}">
-              <a16:creationId xmlns:a16="http://schemas.microsoft.com/office/drawing/2014/main" id="{0A98BEFC-227C-F3A5-6BF7-0EDC5199E149}"/>
-            </a:ext>
-          </a:extLst>
-        </p:cNvPr>
+        <p:cNvPr id="1" name=""/>
         <p:cNvGrpSpPr/>
         <p:nvPr/>
       </p:nvGrpSpPr>
@@ -6107,13 +7327,7 @@
       </p:grpSpPr>
       <p:sp>
         <p:nvSpPr>
-          <p:cNvPr id="2" name="Заголовок 1">
-            <a:extLst>
-              <a:ext uri="{FF2B5EF4-FFF2-40B4-BE49-F238E27FC236}">
-                <a16:creationId xmlns:a16="http://schemas.microsoft.com/office/drawing/2014/main" id="{7E73508C-9B06-9D83-FA2F-0D3110DF0AFA}"/>
-              </a:ext>
-            </a:extLst>
-          </p:cNvPr>
+          <p:cNvPr id="2" name="Заголовок 1"/>
           <p:cNvSpPr>
             <a:spLocks noGrp="1"/>
           </p:cNvSpPr>
@@ -6123,38 +7337,30 @@
         </p:nvSpPr>
         <p:spPr>
           <a:xfrm>
-            <a:off x="285750" y="365125"/>
-            <a:ext cx="11068050" cy="864631"/>
-          </a:xfrm>
-        </p:spPr>
-        <p:txBody>
-          <a:bodyPr/>
-          <a:lstStyle/>
-          <a:p>
-            <a:r>
-              <a:rPr lang="ru-RU" dirty="0"/>
-              <a:t>Экзогенные и </a:t>
-            </a:r>
-            <a:r>
-              <a:rPr lang="ru-RU" dirty="0" err="1"/>
-              <a:t>многопеременные</a:t>
-            </a:r>
-            <a:r>
-              <a:rPr lang="ru-RU" dirty="0"/>
-              <a:t> ВР</a:t>
-            </a:r>
-          </a:p>
-        </p:txBody>
-      </p:sp>
-      <p:sp>
-        <p:nvSpPr>
-          <p:cNvPr id="3" name="Объект 2">
-            <a:extLst>
-              <a:ext uri="{FF2B5EF4-FFF2-40B4-BE49-F238E27FC236}">
-                <a16:creationId xmlns:a16="http://schemas.microsoft.com/office/drawing/2014/main" id="{D7CEC062-D60A-AFC8-0F6D-C2BF7E437867}"/>
-              </a:ext>
-            </a:extLst>
-          </p:cNvPr>
+            <a:off x="572877" y="365126"/>
+            <a:ext cx="10780923" cy="637410"/>
+          </a:xfrm>
+        </p:spPr>
+        <p:txBody>
+          <a:bodyPr>
+            <a:normAutofit fontScale="90000"/>
+          </a:bodyPr>
+          <a:lstStyle/>
+          <a:p>
+            <a:r>
+              <a:rPr lang="ru-RU" b="1" dirty="0">
+                <a:ea typeface="Calibri" panose="020F0502020204030204" pitchFamily="34" charset="0"/>
+                <a:cs typeface="Times New Roman" panose="02020603050405020304" pitchFamily="18" charset="0"/>
+              </a:rPr>
+              <a:t>Анализ временных рядов</a:t>
+            </a:r>
+            <a:endParaRPr lang="ru-RU" dirty="0"/>
+          </a:p>
+        </p:txBody>
+      </p:sp>
+      <p:sp>
+        <p:nvSpPr>
+          <p:cNvPr id="3" name="Объект 2"/>
           <p:cNvSpPr>
             <a:spLocks noGrp="1"/>
           </p:cNvSpPr>
@@ -6164,8 +7370,8 @@
         </p:nvSpPr>
         <p:spPr>
           <a:xfrm>
-            <a:off x="285749" y="1277897"/>
-            <a:ext cx="11634501" cy="4351338"/>
+            <a:off x="309389" y="1528170"/>
+            <a:ext cx="3028721" cy="4351338"/>
           </a:xfrm>
         </p:spPr>
         <p:txBody>
@@ -6174,40 +7380,34 @@
           </a:bodyPr>
           <a:lstStyle/>
           <a:p>
-            <a:r>
-              <a:rPr lang="ru-RU" sz="2200" b="1" dirty="0"/>
-              <a:t>Экзогенные факторы </a:t>
-            </a:r>
-            <a:r>
-              <a:rPr lang="ru-RU" sz="2200" dirty="0"/>
-              <a:t>— это переменные, которые влияют на исследуемый ВР , но не зависят от него. Эти факторы могут быть использованы для объяснения изменений в зависимой переменной. Напр. Влияние природных катастроф на прогноз урожайности зерна</a:t>
-            </a:r>
-          </a:p>
-          <a:p>
-            <a:r>
-              <a:rPr lang="ru-RU" sz="2200" b="1" dirty="0" err="1"/>
-              <a:t>Многопеременные</a:t>
-            </a:r>
-            <a:r>
-              <a:rPr lang="ru-RU" sz="2200" b="1" dirty="0"/>
-              <a:t> временные ряды </a:t>
-            </a:r>
-            <a:r>
-              <a:rPr lang="ru-RU" sz="2200" dirty="0"/>
-              <a:t>представляют собой набор ВР, собранных в течение времени, где несколько переменных наблюдаются одновременно и все важны. ВР могут быть как эндогенными (зависимыми), так и экзогенными!</a:t>
-            </a:r>
-          </a:p>
-        </p:txBody>
-      </p:sp>
-      <p:sp>
-        <p:nvSpPr>
-          <p:cNvPr id="4" name="Номер слайда 3">
-            <a:extLst>
-              <a:ext uri="{FF2B5EF4-FFF2-40B4-BE49-F238E27FC236}">
-                <a16:creationId xmlns:a16="http://schemas.microsoft.com/office/drawing/2014/main" id="{13EE6F89-EBA7-EB60-3D8B-BA18FD66840D}"/>
-              </a:ext>
-            </a:extLst>
-          </p:cNvPr>
+            <a:pPr marL="0" indent="0">
+              <a:buNone/>
+            </a:pPr>
+            <a:r>
+              <a:rPr lang="ru-RU" sz="2400" dirty="0"/>
+              <a:t>Строгая последовательность данных – это всегда дополнительная информация и часто важная!</a:t>
+            </a:r>
+          </a:p>
+          <a:p>
+            <a:pPr marL="0" indent="0">
+              <a:buNone/>
+            </a:pPr>
+            <a:endParaRPr lang="ru-RU" sz="2400" dirty="0"/>
+          </a:p>
+          <a:p>
+            <a:pPr marL="0" indent="0">
+              <a:buNone/>
+            </a:pPr>
+            <a:r>
+              <a:rPr lang="ru-RU" sz="2400" dirty="0"/>
+              <a:t>Последовательность данных нарушать нельзя!</a:t>
+            </a:r>
+          </a:p>
+        </p:txBody>
+      </p:sp>
+      <p:sp>
+        <p:nvSpPr>
+          <p:cNvPr id="4" name="Номер слайда 3"/>
           <p:cNvSpPr>
             <a:spLocks noGrp="1"/>
           </p:cNvSpPr>
@@ -6228,12 +7428,59 @@
           </a:p>
         </p:txBody>
       </p:sp>
-      <p:sp>
-        <p:nvSpPr>
-          <p:cNvPr id="7" name="TextBox 6">
+      <p:pic>
+        <p:nvPicPr>
+          <p:cNvPr id="1026" name="Picture 2" descr="Evaluation of statistical and machine learning models for time series  prediction: Identifying the state-of-the-art and the best conditions for  the use of each model - ScienceDirect">
             <a:extLst>
               <a:ext uri="{FF2B5EF4-FFF2-40B4-BE49-F238E27FC236}">
-                <a16:creationId xmlns:a16="http://schemas.microsoft.com/office/drawing/2014/main" id="{F675B6E4-D643-B929-7BB1-F8890A822031}"/>
+                <a16:creationId xmlns:a16="http://schemas.microsoft.com/office/drawing/2014/main" id="{CF0134DE-2972-2DC6-F324-4B473D1A8F13}"/>
+              </a:ext>
+            </a:extLst>
+          </p:cNvPr>
+          <p:cNvPicPr>
+            <a:picLocks noChangeAspect="1" noChangeArrowheads="1"/>
+          </p:cNvPicPr>
+          <p:nvPr/>
+        </p:nvPicPr>
+        <p:blipFill>
+          <a:blip r:embed="rId2">
+            <a:extLst>
+              <a:ext uri="{28A0092B-C50C-407E-A947-70E740481C1C}">
+                <a14:useLocalDpi xmlns:a14="http://schemas.microsoft.com/office/drawing/2010/main" val="0"/>
+              </a:ext>
+            </a:extLst>
+          </a:blip>
+          <a:srcRect/>
+          <a:stretch>
+            <a:fillRect/>
+          </a:stretch>
+        </p:blipFill>
+        <p:spPr bwMode="auto">
+          <a:xfrm>
+            <a:off x="3496020" y="1460179"/>
+            <a:ext cx="8386590" cy="4559432"/>
+          </a:xfrm>
+          <a:prstGeom prst="rect">
+            <a:avLst/>
+          </a:prstGeom>
+          <a:noFill/>
+          <a:extLst>
+            <a:ext uri="{909E8E84-426E-40DD-AFC4-6F175D3DCCD1}">
+              <a14:hiddenFill xmlns:a14="http://schemas.microsoft.com/office/drawing/2010/main">
+                <a:solidFill>
+                  <a:srgbClr val="FFFFFF"/>
+                </a:solidFill>
+              </a14:hiddenFill>
+            </a:ext>
+          </a:extLst>
+        </p:spPr>
+      </p:pic>
+      <p:sp>
+        <p:nvSpPr>
+          <p:cNvPr id="8" name="TextBox 7">
+            <a:extLst>
+              <a:ext uri="{FF2B5EF4-FFF2-40B4-BE49-F238E27FC236}">
+                <a16:creationId xmlns:a16="http://schemas.microsoft.com/office/drawing/2014/main" id="{26B87D2F-F4DD-DA49-1AAC-60C600287B1E}"/>
               </a:ext>
             </a:extLst>
           </p:cNvPr>
@@ -6242,8 +7489,8 @@
         </p:nvSpPr>
         <p:spPr>
           <a:xfrm>
-            <a:off x="6096000" y="6377467"/>
-            <a:ext cx="6096000" cy="369332"/>
+            <a:off x="4527933" y="6270587"/>
+            <a:ext cx="8386590" cy="369332"/>
           </a:xfrm>
           <a:prstGeom prst="rect">
             <a:avLst/>
@@ -6266,7 +7513,7 @@
             </a:r>
             <a:r>
               <a:rPr lang="ru-RU" dirty="0" err="1"/>
-              <a:t>goldinlocks.github.io</a:t>
+              <a:t>www.sciencedirect.com</a:t>
             </a:r>
             <a:r>
               <a:rPr lang="ru-RU" dirty="0"/>
@@ -6274,152 +7521,43 @@
             </a:r>
             <a:r>
               <a:rPr lang="ru-RU" dirty="0" err="1"/>
-              <a:t>Multivariate-time-series-models</a:t>
+              <a:t>science</a:t>
             </a:r>
             <a:r>
               <a:rPr lang="ru-RU" dirty="0"/>
               <a:t>/</a:t>
             </a:r>
-          </a:p>
-        </p:txBody>
-      </p:sp>
-      <p:sp>
-        <p:nvSpPr>
-          <p:cNvPr id="6" name="TextBox 5">
-            <a:extLst>
-              <a:ext uri="{FF2B5EF4-FFF2-40B4-BE49-F238E27FC236}">
-                <a16:creationId xmlns:a16="http://schemas.microsoft.com/office/drawing/2014/main" id="{7FF5DD3F-6A24-7192-B5D7-62856EC6C547}"/>
-              </a:ext>
-            </a:extLst>
-          </p:cNvPr>
-          <p:cNvSpPr txBox="1"/>
-          <p:nvPr/>
-        </p:nvSpPr>
-        <p:spPr>
-          <a:xfrm>
-            <a:off x="285749" y="3303885"/>
-            <a:ext cx="11118773" cy="923330"/>
-          </a:xfrm>
-          <a:prstGeom prst="rect">
-            <a:avLst/>
-          </a:prstGeom>
-          <a:noFill/>
-        </p:spPr>
-        <p:txBody>
-          <a:bodyPr wrap="square">
-            <a:spAutoFit/>
-          </a:bodyPr>
-          <a:lstStyle/>
-          <a:p>
-            <a:pPr algn="l" fontAlgn="base">
-              <a:buFont typeface="Arial" panose="020B0604020202020204" pitchFamily="34" charset="0"/>
-              <a:buChar char="•"/>
-            </a:pPr>
-            <a:r>
-              <a:rPr lang="ru-RU" b="0" i="0" u="none" strike="noStrike" dirty="0">
-                <a:solidFill>
-                  <a:srgbClr val="222222"/>
-                </a:solidFill>
-                <a:effectLst/>
-                <a:latin typeface="var(--sds-font-family-01)"/>
-              </a:rPr>
-              <a:t>Экзогенные факторы используются для объяснения изменений в зависимой переменной.</a:t>
-            </a:r>
-          </a:p>
-          <a:p>
-            <a:pPr algn="l" fontAlgn="base">
-              <a:buFont typeface="Arial" panose="020B0604020202020204" pitchFamily="34" charset="0"/>
-              <a:buChar char="•"/>
-            </a:pPr>
-            <a:r>
-              <a:rPr lang="ru-RU" b="0" i="0" u="none" strike="noStrike" dirty="0" err="1">
-                <a:solidFill>
-                  <a:srgbClr val="222222"/>
-                </a:solidFill>
-                <a:effectLst/>
-                <a:latin typeface="var(--sds-font-family-01)"/>
-              </a:rPr>
-              <a:t>Многопеременные</a:t>
-            </a:r>
-            <a:r>
-              <a:rPr lang="ru-RU" b="0" i="0" u="none" strike="noStrike" dirty="0">
-                <a:solidFill>
-                  <a:srgbClr val="222222"/>
-                </a:solidFill>
-                <a:effectLst/>
-                <a:latin typeface="var(--sds-font-family-01)"/>
-              </a:rPr>
-              <a:t> временные ряды используются для анализа взаимосвязей между несколькими переменными во времени.</a:t>
-            </a:r>
-          </a:p>
-        </p:txBody>
-      </p:sp>
-      <p:pic>
-        <p:nvPicPr>
-          <p:cNvPr id="5" name="Рисунок 4">
-            <a:extLst>
-              <a:ext uri="{FF2B5EF4-FFF2-40B4-BE49-F238E27FC236}">
-                <a16:creationId xmlns:a16="http://schemas.microsoft.com/office/drawing/2014/main" id="{D93BA4B2-C05F-1DD9-686F-3807EB25E42F}"/>
-              </a:ext>
-            </a:extLst>
-          </p:cNvPr>
-          <p:cNvPicPr>
-            <a:picLocks noChangeAspect="1"/>
-          </p:cNvPicPr>
-          <p:nvPr/>
-        </p:nvPicPr>
-        <p:blipFill>
-          <a:blip r:embed="rId2"/>
-          <a:srcRect r="57807" b="56643"/>
-          <a:stretch>
-            <a:fillRect/>
-          </a:stretch>
-        </p:blipFill>
-        <p:spPr>
-          <a:xfrm>
-            <a:off x="776656" y="4227215"/>
-            <a:ext cx="4481144" cy="2548496"/>
-          </a:xfrm>
-          <a:prstGeom prst="rect">
-            <a:avLst/>
-          </a:prstGeom>
-        </p:spPr>
-      </p:pic>
-      <p:pic>
-        <p:nvPicPr>
-          <p:cNvPr id="8" name="Рисунок 7">
-            <a:extLst>
-              <a:ext uri="{FF2B5EF4-FFF2-40B4-BE49-F238E27FC236}">
-                <a16:creationId xmlns:a16="http://schemas.microsoft.com/office/drawing/2014/main" id="{13BCEB44-5DE6-9EEE-6D21-7B224F0F9F63}"/>
-              </a:ext>
-            </a:extLst>
-          </p:cNvPr>
-          <p:cNvPicPr>
-            <a:picLocks noChangeAspect="1"/>
-          </p:cNvPicPr>
-          <p:nvPr/>
-        </p:nvPicPr>
-        <p:blipFill>
-          <a:blip r:embed="rId2"/>
-          <a:srcRect l="40745" b="56643"/>
-          <a:stretch>
-            <a:fillRect/>
-          </a:stretch>
-        </p:blipFill>
-        <p:spPr>
-          <a:xfrm>
-            <a:off x="6731914" y="3953357"/>
-            <a:ext cx="5679243" cy="2299846"/>
-          </a:xfrm>
-          <a:prstGeom prst="rect">
-            <a:avLst/>
-          </a:prstGeom>
-        </p:spPr>
-      </p:pic>
+            <a:r>
+              <a:rPr lang="ru-RU" dirty="0" err="1"/>
+              <a:t>article</a:t>
+            </a:r>
+            <a:r>
+              <a:rPr lang="ru-RU" dirty="0"/>
+              <a:t>/</a:t>
+            </a:r>
+            <a:r>
+              <a:rPr lang="ru-RU" dirty="0" err="1"/>
+              <a:t>abs</a:t>
+            </a:r>
+            <a:r>
+              <a:rPr lang="ru-RU" dirty="0"/>
+              <a:t>/</a:t>
+            </a:r>
+            <a:r>
+              <a:rPr lang="ru-RU" dirty="0" err="1"/>
+              <a:t>pii</a:t>
+            </a:r>
+            <a:r>
+              <a:rPr lang="ru-RU" dirty="0"/>
+              <a:t>/S0020025519300945</a:t>
+            </a:r>
+          </a:p>
+        </p:txBody>
+      </p:sp>
     </p:spTree>
     <p:extLst>
       <p:ext uri="{BB962C8B-B14F-4D97-AF65-F5344CB8AC3E}">
-        <p14:creationId xmlns:p14="http://schemas.microsoft.com/office/powerpoint/2010/main" val="2083683755"/>
+        <p14:creationId xmlns:p14="http://schemas.microsoft.com/office/powerpoint/2010/main" val="2930335002"/>
       </p:ext>
     </p:extLst>
   </p:cSld>
@@ -6453,12 +7591,42 @@
           <a:chExt cx="0" cy="0"/>
         </a:xfrm>
       </p:grpSpPr>
+      <p:pic>
+        <p:nvPicPr>
+          <p:cNvPr id="9" name="Рисунок 8">
+            <a:extLst>
+              <a:ext uri="{FF2B5EF4-FFF2-40B4-BE49-F238E27FC236}">
+                <a16:creationId xmlns:a16="http://schemas.microsoft.com/office/drawing/2014/main" id="{7C0DF5D5-7D67-E283-56B4-5F90AB037BF6}"/>
+              </a:ext>
+            </a:extLst>
+          </p:cNvPr>
+          <p:cNvPicPr>
+            <a:picLocks noChangeAspect="1"/>
+          </p:cNvPicPr>
+          <p:nvPr/>
+        </p:nvPicPr>
+        <p:blipFill>
+          <a:blip r:embed="rId2"/>
+          <a:stretch>
+            <a:fillRect/>
+          </a:stretch>
+        </p:blipFill>
+        <p:spPr>
+          <a:xfrm>
+            <a:off x="6855788" y="1036503"/>
+            <a:ext cx="5002837" cy="4793379"/>
+          </a:xfrm>
+          <a:prstGeom prst="rect">
+            <a:avLst/>
+          </a:prstGeom>
+        </p:spPr>
+      </p:pic>
       <p:sp>
         <p:nvSpPr>
           <p:cNvPr id="2" name="Заголовок 1">
             <a:extLst>
               <a:ext uri="{FF2B5EF4-FFF2-40B4-BE49-F238E27FC236}">
-                <a16:creationId xmlns:a16="http://schemas.microsoft.com/office/drawing/2014/main" id="{61CE5FD9-3051-629C-2F97-C85F3C7261F0}"/>
+                <a16:creationId xmlns:a16="http://schemas.microsoft.com/office/drawing/2014/main" id="{902D1D9A-7D65-F70A-BCFB-4AAC3B1AC39B}"/>
               </a:ext>
             </a:extLst>
           </p:cNvPr>
@@ -6471,28 +7639,273 @@
         </p:nvSpPr>
         <p:spPr>
           <a:xfrm>
-            <a:off x="838200" y="365125"/>
-            <a:ext cx="10515600" cy="635985"/>
+            <a:off x="363557" y="365125"/>
+            <a:ext cx="10990243" cy="747579"/>
+          </a:xfrm>
+        </p:spPr>
+        <p:txBody>
+          <a:bodyPr/>
+          <a:lstStyle/>
+          <a:p>
+            <a:r>
+              <a:rPr lang="en-US" dirty="0" err="1"/>
+              <a:t>Пост</a:t>
+            </a:r>
+            <a:r>
+              <a:rPr lang="ru-RU" dirty="0" err="1"/>
+              <a:t>ановка</a:t>
+            </a:r>
+            <a:r>
+              <a:rPr lang="ru-RU" dirty="0"/>
+              <a:t> задачи анализа ВР</a:t>
+            </a:r>
+          </a:p>
+        </p:txBody>
+      </p:sp>
+      <p:sp>
+        <p:nvSpPr>
+          <p:cNvPr id="3" name="Объект 2">
+            <a:extLst>
+              <a:ext uri="{FF2B5EF4-FFF2-40B4-BE49-F238E27FC236}">
+                <a16:creationId xmlns:a16="http://schemas.microsoft.com/office/drawing/2014/main" id="{075001AD-C988-EFE6-BAB1-1D06788E8D18}"/>
+              </a:ext>
+            </a:extLst>
+          </p:cNvPr>
+          <p:cNvSpPr>
+            <a:spLocks noGrp="1"/>
+          </p:cNvSpPr>
+          <p:nvPr>
+            <p:ph idx="1"/>
+          </p:nvPr>
+        </p:nvSpPr>
+        <p:spPr>
+          <a:xfrm>
+            <a:off x="102790" y="937510"/>
+            <a:ext cx="7312789" cy="5783965"/>
           </a:xfrm>
         </p:spPr>
         <p:txBody>
           <a:bodyPr>
-            <a:normAutofit fontScale="90000"/>
+            <a:normAutofit fontScale="77500" lnSpcReduction="20000"/>
           </a:bodyPr>
           <a:lstStyle/>
           <a:p>
             <a:r>
+              <a:rPr lang="ru-RU" sz="2400" b="1" dirty="0"/>
+              <a:t>Как устроен ВР </a:t>
+            </a:r>
+          </a:p>
+          <a:p>
+            <a:pPr lvl="1"/>
+            <a:r>
+              <a:rPr lang="ru-RU" sz="2000" b="1" dirty="0"/>
+              <a:t>От куда берутся значения ВР</a:t>
+            </a:r>
+            <a:r>
+              <a:rPr lang="ru-RU" sz="2000" dirty="0"/>
+              <a:t>, типы данных и однотипность, количество</a:t>
+            </a:r>
+          </a:p>
+          <a:p>
+            <a:pPr lvl="1"/>
+            <a:r>
+              <a:rPr lang="ru-RU" b="1" dirty="0"/>
+              <a:t>структура</a:t>
+            </a:r>
+            <a:r>
+              <a:rPr lang="en-US" b="1" dirty="0"/>
+              <a:t> </a:t>
+            </a:r>
+            <a:r>
+              <a:rPr lang="ru-RU" b="1" dirty="0"/>
+              <a:t>ВР </a:t>
+            </a:r>
+            <a:r>
               <a:rPr lang="ru-RU" dirty="0"/>
-              <a:t>Т</a:t>
+              <a:t>(переменные, экзогенные факторы, регулярность паттернов, стат. характеристики)</a:t>
+            </a:r>
+          </a:p>
+          <a:p>
+            <a:pPr lvl="1"/>
+            <a:r>
+              <a:rPr lang="ru-RU" dirty="0"/>
+              <a:t>шаг, равномерность, пропуск и </a:t>
+            </a:r>
+            <a:r>
+              <a:rPr lang="ru-RU" dirty="0" err="1"/>
+              <a:t>тд</a:t>
+            </a:r>
+            <a:r>
+              <a:rPr lang="ru-RU" dirty="0"/>
+              <a:t> , как заполнять?</a:t>
+            </a:r>
+          </a:p>
+          <a:p>
+            <a:r>
+              <a:rPr lang="ru-RU" sz="2400" b="1" dirty="0"/>
+              <a:t>Преобразование данных </a:t>
+            </a:r>
+          </a:p>
+          <a:p>
+            <a:pPr lvl="1"/>
+            <a:r>
+              <a:rPr lang="ru-RU" dirty="0"/>
+              <a:t>численные данные? </a:t>
+            </a:r>
+          </a:p>
+          <a:p>
+            <a:pPr lvl="1"/>
+            <a:r>
+              <a:rPr lang="ru-RU" dirty="0"/>
+              <a:t>Экзогенные факторы? </a:t>
+            </a:r>
+          </a:p>
+          <a:p>
+            <a:pPr lvl="1"/>
+            <a:r>
+              <a:rPr lang="ru-RU" dirty="0"/>
+              <a:t>Разложение?</a:t>
+            </a:r>
+            <a:r>
+              <a:rPr lang="en-US" dirty="0"/>
+              <a:t> </a:t>
+            </a:r>
+            <a:endParaRPr lang="ru-RU" dirty="0"/>
+          </a:p>
+          <a:p>
+            <a:r>
+              <a:rPr lang="ru-RU" sz="2400" b="1" dirty="0" smtClean="0"/>
+              <a:t>Переменная </a:t>
+            </a:r>
+            <a:r>
+              <a:rPr lang="ru-RU" sz="2400" b="1" dirty="0"/>
+              <a:t>для предсказания  (Диагностика </a:t>
+            </a:r>
+            <a:r>
+              <a:rPr lang="ru-RU" sz="2400" b="1" dirty="0" smtClean="0"/>
+              <a:t>ВР</a:t>
+            </a:r>
+            <a:r>
+              <a:rPr lang="ru-RU" sz="2400" b="1" dirty="0"/>
+              <a:t>)</a:t>
+            </a:r>
+          </a:p>
+          <a:p>
+            <a:pPr lvl="1"/>
+            <a:r>
+              <a:rPr lang="ru-RU" dirty="0"/>
+              <a:t>горизонт, регулярность, </a:t>
+            </a:r>
+          </a:p>
+          <a:p>
+            <a:pPr lvl="1"/>
+            <a:r>
+              <a:rPr lang="ru-RU" dirty="0"/>
+              <a:t>Время предсказания, </a:t>
+            </a:r>
+          </a:p>
+          <a:p>
+            <a:pPr lvl="1"/>
+            <a:r>
+              <a:rPr lang="ru-RU" dirty="0"/>
+              <a:t>М</a:t>
             </a:r>
             <a:r>
               <a:rPr lang="en-US" dirty="0" err="1"/>
-              <a:t>ип</a:t>
+              <a:t>етр</a:t>
+            </a:r>
+            <a:r>
+              <a:rPr lang="ru-RU" dirty="0" err="1"/>
+              <a:t>ики</a:t>
             </a:r>
             <a:r>
               <a:rPr lang="ru-RU" dirty="0"/>
-              <a:t>ы ВР</a:t>
-            </a:r>
+              <a:t> и их значение и разброс, </a:t>
+            </a:r>
+            <a:r>
+              <a:rPr lang="ru-RU" dirty="0" err="1"/>
+              <a:t>bas</a:t>
+            </a:r>
+            <a:r>
+              <a:rPr lang="en-US" dirty="0" err="1"/>
+              <a:t>eline</a:t>
+            </a:r>
+            <a:r>
+              <a:rPr lang="ru-RU" dirty="0"/>
+              <a:t> </a:t>
+            </a:r>
+            <a:endParaRPr lang="en-US" dirty="0"/>
+          </a:p>
+          <a:p>
+            <a:pPr lvl="1"/>
+            <a:r>
+              <a:rPr lang="ru-RU" dirty="0"/>
+              <a:t>Чувствительность к выбросам и пропускам</a:t>
+            </a:r>
+          </a:p>
+          <a:p>
+            <a:pPr lvl="1"/>
+            <a:r>
+              <a:rPr lang="ru-RU" dirty="0"/>
+              <a:t>Интерпретация или модель данных</a:t>
+            </a:r>
+          </a:p>
+          <a:p>
+            <a:r>
+              <a:rPr lang="ru-RU" sz="2400" b="1" dirty="0"/>
+              <a:t>Мониторинг</a:t>
+            </a:r>
+          </a:p>
+          <a:p>
+            <a:pPr lvl="1"/>
+            <a:r>
+              <a:rPr lang="ru-RU" dirty="0"/>
+              <a:t>Контроль дрейфа и новизны</a:t>
+            </a:r>
+          </a:p>
+          <a:p>
+            <a:pPr lvl="1"/>
+            <a:r>
+              <a:rPr lang="ru-RU" dirty="0"/>
+              <a:t>Критерии дообучения</a:t>
+            </a:r>
+          </a:p>
+          <a:p>
+            <a:pPr lvl="1"/>
+            <a:r>
+              <a:rPr lang="ru-RU" dirty="0"/>
+              <a:t>Критерии </a:t>
+            </a:r>
+            <a:r>
+              <a:rPr lang="ru-RU" dirty="0" err="1"/>
+              <a:t>досбора</a:t>
+            </a:r>
+            <a:r>
+              <a:rPr lang="ru-RU" dirty="0"/>
+              <a:t> данных</a:t>
+            </a:r>
+          </a:p>
+          <a:p>
+            <a:pPr lvl="1"/>
+            <a:r>
+              <a:rPr lang="ru-RU" dirty="0"/>
+              <a:t>Время </a:t>
+            </a:r>
+            <a:r>
+              <a:rPr lang="ru-RU" dirty="0" err="1"/>
+              <a:t>дообучение</a:t>
+            </a:r>
+            <a:r>
+              <a:rPr lang="ru-RU" dirty="0"/>
+              <a:t> на новых данных</a:t>
+            </a:r>
+            <a:endParaRPr lang="en-US" dirty="0"/>
+          </a:p>
+          <a:p>
+            <a:endParaRPr lang="ru-RU" sz="2400" dirty="0"/>
+          </a:p>
+          <a:p>
+            <a:endParaRPr lang="ru-RU" dirty="0"/>
           </a:p>
         </p:txBody>
       </p:sp>
@@ -6501,7 +7914,7 @@
           <p:cNvPr id="4" name="Номер слайда 3">
             <a:extLst>
               <a:ext uri="{FF2B5EF4-FFF2-40B4-BE49-F238E27FC236}">
-                <a16:creationId xmlns:a16="http://schemas.microsoft.com/office/drawing/2014/main" id="{A897C984-0204-5E9E-457A-DB6BF60E8DBB}"/>
+                <a16:creationId xmlns:a16="http://schemas.microsoft.com/office/drawing/2014/main" id="{A23ABF32-A19D-3F0F-1034-BFC9C1750C3A}"/>
               </a:ext>
             </a:extLst>
           </p:cNvPr>
@@ -6525,151 +7938,12 @@
           </a:p>
         </p:txBody>
       </p:sp>
-      <p:pic>
-        <p:nvPicPr>
-          <p:cNvPr id="10242" name="Picture 2" descr="Total Australian quarterly adult prison population, disaggregated by state, by legal status, and by gender.">
+      <p:sp>
+        <p:nvSpPr>
+          <p:cNvPr id="6" name="TextBox 5">
             <a:extLst>
               <a:ext uri="{FF2B5EF4-FFF2-40B4-BE49-F238E27FC236}">
-                <a16:creationId xmlns:a16="http://schemas.microsoft.com/office/drawing/2014/main" id="{45E23826-E9BC-3ACE-5161-1DD78936D56A}"/>
-              </a:ext>
-            </a:extLst>
-          </p:cNvPr>
-          <p:cNvPicPr>
-            <a:picLocks noChangeAspect="1" noChangeArrowheads="1"/>
-          </p:cNvPicPr>
-          <p:nvPr/>
-        </p:nvPicPr>
-        <p:blipFill rotWithShape="1">
-          <a:blip r:embed="rId3">
-            <a:extLst>
-              <a:ext uri="{28A0092B-C50C-407E-A947-70E740481C1C}">
-                <a14:useLocalDpi xmlns:a14="http://schemas.microsoft.com/office/drawing/2010/main" val="0"/>
-              </a:ext>
-            </a:extLst>
-          </a:blip>
-          <a:srcRect b="52438"/>
-          <a:stretch/>
-        </p:blipFill>
-        <p:spPr bwMode="auto">
-          <a:xfrm>
-            <a:off x="220957" y="4225111"/>
-            <a:ext cx="5723919" cy="1904864"/>
-          </a:xfrm>
-          <a:prstGeom prst="rect">
-            <a:avLst/>
-          </a:prstGeom>
-          <a:noFill/>
-          <a:extLst>
-            <a:ext uri="{909E8E84-426E-40DD-AFC4-6F175D3DCCD1}">
-              <a14:hiddenFill xmlns:a14="http://schemas.microsoft.com/office/drawing/2010/main">
-                <a:solidFill>
-                  <a:srgbClr val="FFFFFF"/>
-                </a:solidFill>
-              </a14:hiddenFill>
-            </a:ext>
-          </a:extLst>
-        </p:spPr>
-      </p:pic>
-      <p:pic>
-        <p:nvPicPr>
-          <p:cNvPr id="10244" name="Picture 4" descr="Domestic overnight trips from 1998 Q1 to 2017 Q4 aggregated by state.">
-            <a:extLst>
-              <a:ext uri="{FF2B5EF4-FFF2-40B4-BE49-F238E27FC236}">
-                <a16:creationId xmlns:a16="http://schemas.microsoft.com/office/drawing/2014/main" id="{8752192F-3E0C-4DA2-D03D-FBEC53D83EFC}"/>
-              </a:ext>
-            </a:extLst>
-          </p:cNvPr>
-          <p:cNvPicPr>
-            <a:picLocks noChangeAspect="1" noChangeArrowheads="1"/>
-          </p:cNvPicPr>
-          <p:nvPr/>
-        </p:nvPicPr>
-        <p:blipFill>
-          <a:blip r:embed="rId4" cstate="hqprint">
-            <a:extLst>
-              <a:ext uri="{28A0092B-C50C-407E-A947-70E740481C1C}">
-                <a14:useLocalDpi xmlns:a14="http://schemas.microsoft.com/office/drawing/2010/main" val="0"/>
-              </a:ext>
-            </a:extLst>
-          </a:blip>
-          <a:srcRect/>
-          <a:stretch>
-            <a:fillRect/>
-          </a:stretch>
-        </p:blipFill>
-        <p:spPr bwMode="auto">
-          <a:xfrm>
-            <a:off x="7407104" y="733478"/>
-            <a:ext cx="4543425" cy="3179073"/>
-          </a:xfrm>
-          <a:prstGeom prst="rect">
-            <a:avLst/>
-          </a:prstGeom>
-          <a:noFill/>
-          <a:extLst>
-            <a:ext uri="{909E8E84-426E-40DD-AFC4-6F175D3DCCD1}">
-              <a14:hiddenFill xmlns:a14="http://schemas.microsoft.com/office/drawing/2010/main">
-                <a:solidFill>
-                  <a:srgbClr val="FFFFFF"/>
-                </a:solidFill>
-              </a14:hiddenFill>
-            </a:ext>
-          </a:extLst>
-        </p:spPr>
-      </p:pic>
-      <p:pic>
-        <p:nvPicPr>
-          <p:cNvPr id="10248" name="Picture 8">
-            <a:extLst>
-              <a:ext uri="{FF2B5EF4-FFF2-40B4-BE49-F238E27FC236}">
-                <a16:creationId xmlns:a16="http://schemas.microsoft.com/office/drawing/2014/main" id="{10511C68-A550-B13E-2B5E-F7BFF8761998}"/>
-              </a:ext>
-            </a:extLst>
-          </p:cNvPr>
-          <p:cNvPicPr>
-            <a:picLocks noChangeAspect="1" noChangeArrowheads="1"/>
-          </p:cNvPicPr>
-          <p:nvPr/>
-        </p:nvPicPr>
-        <p:blipFill>
-          <a:blip r:embed="rId5">
-            <a:extLst>
-              <a:ext uri="{28A0092B-C50C-407E-A947-70E740481C1C}">
-                <a14:useLocalDpi xmlns:a14="http://schemas.microsoft.com/office/drawing/2010/main" val="0"/>
-              </a:ext>
-            </a:extLst>
-          </a:blip>
-          <a:srcRect/>
-          <a:stretch>
-            <a:fillRect/>
-          </a:stretch>
-        </p:blipFill>
-        <p:spPr bwMode="auto">
-          <a:xfrm>
-            <a:off x="414287" y="1196087"/>
-            <a:ext cx="5337258" cy="2424238"/>
-          </a:xfrm>
-          <a:prstGeom prst="rect">
-            <a:avLst/>
-          </a:prstGeom>
-          <a:noFill/>
-          <a:extLst>
-            <a:ext uri="{909E8E84-426E-40DD-AFC4-6F175D3DCCD1}">
-              <a14:hiddenFill xmlns:a14="http://schemas.microsoft.com/office/drawing/2010/main">
-                <a:solidFill>
-                  <a:srgbClr val="FFFFFF"/>
-                </a:solidFill>
-              </a14:hiddenFill>
-            </a:ext>
-          </a:extLst>
-        </p:spPr>
-      </p:pic>
-      <p:sp>
-        <p:nvSpPr>
-          <p:cNvPr id="7" name="TextBox 6">
-            <a:extLst>
-              <a:ext uri="{FF2B5EF4-FFF2-40B4-BE49-F238E27FC236}">
-                <a16:creationId xmlns:a16="http://schemas.microsoft.com/office/drawing/2014/main" id="{1E9B5CB3-C5D8-FC49-493B-E9A614063352}"/>
+                <a16:creationId xmlns:a16="http://schemas.microsoft.com/office/drawing/2014/main" id="{ACC32247-5361-DC33-A872-0AB9D0D7E697}"/>
               </a:ext>
             </a:extLst>
           </p:cNvPr>
@@ -6678,8 +7952,8 @@
         </p:nvSpPr>
         <p:spPr>
           <a:xfrm>
-            <a:off x="314395" y="6416642"/>
-            <a:ext cx="6096000" cy="369332"/>
+            <a:off x="5536436" y="6512691"/>
+            <a:ext cx="4998214" cy="307777"/>
           </a:xfrm>
           <a:prstGeom prst="rect">
             <a:avLst/>
@@ -6693,43 +7967,38 @@
           <a:lstStyle/>
           <a:p>
             <a:r>
-              <a:rPr lang="ru-RU" dirty="0" err="1"/>
+              <a:rPr lang="ru-RU" sz="1400" dirty="0" err="1"/>
               <a:t>https</a:t>
             </a:r>
             <a:r>
-              <a:rPr lang="ru-RU" dirty="0"/>
+              <a:rPr lang="ru-RU" sz="1400" dirty="0"/>
               <a:t>://</a:t>
             </a:r>
             <a:r>
-              <a:rPr lang="ru-RU" dirty="0" err="1"/>
-              <a:t>skforecast.org</a:t>
-            </a:r>
-            <a:r>
-              <a:rPr lang="ru-RU" dirty="0"/>
-              <a:t>/0.9.1/</a:t>
-            </a:r>
-            <a:r>
-              <a:rPr lang="ru-RU" dirty="0" err="1"/>
-              <a:t>user_guides</a:t>
-            </a:r>
-            <a:r>
-              <a:rPr lang="ru-RU" dirty="0"/>
+              <a:rPr lang="ru-RU" sz="1400" dirty="0" err="1"/>
+              <a:t>rutube.ru</a:t>
+            </a:r>
+            <a:r>
+              <a:rPr lang="ru-RU" sz="1400" dirty="0"/>
               <a:t>/</a:t>
             </a:r>
             <a:r>
-              <a:rPr lang="ru-RU" dirty="0" err="1"/>
-              <a:t>exogenous-variables</a:t>
-            </a:r>
-            <a:endParaRPr lang="ru-RU" dirty="0"/>
-          </a:p>
-        </p:txBody>
-      </p:sp>
-      <p:sp>
-        <p:nvSpPr>
-          <p:cNvPr id="9" name="TextBox 8">
+              <a:rPr lang="ru-RU" sz="1400" dirty="0" err="1"/>
+              <a:t>video</a:t>
+            </a:r>
+            <a:r>
+              <a:rPr lang="ru-RU" sz="1400" dirty="0"/>
+              <a:t>/c4116f5e24238a778e458a56a16015f3/</a:t>
+            </a:r>
+          </a:p>
+        </p:txBody>
+      </p:sp>
+      <p:sp>
+        <p:nvSpPr>
+          <p:cNvPr id="11" name="TextBox 10">
             <a:extLst>
               <a:ext uri="{FF2B5EF4-FFF2-40B4-BE49-F238E27FC236}">
-                <a16:creationId xmlns:a16="http://schemas.microsoft.com/office/drawing/2014/main" id="{9DB15D93-B070-B175-224E-D9C630C8F652}"/>
+                <a16:creationId xmlns:a16="http://schemas.microsoft.com/office/drawing/2014/main" id="{F1FEAAF5-6255-E2ED-6CC9-BD7DA86F4315}"/>
               </a:ext>
             </a:extLst>
           </p:cNvPr>
@@ -6738,8 +8007,8 @@
         </p:nvSpPr>
         <p:spPr>
           <a:xfrm>
-            <a:off x="360278" y="3552040"/>
-            <a:ext cx="4361957" cy="461665"/>
+            <a:off x="5655441" y="6048703"/>
+            <a:ext cx="4170750" cy="523220"/>
           </a:xfrm>
           <a:prstGeom prst="rect">
             <a:avLst/>
@@ -6753,300 +8022,52 @@
           <a:lstStyle/>
           <a:p>
             <a:r>
-              <a:rPr lang="ru-RU" sz="1200" dirty="0" err="1"/>
+              <a:rPr lang="ru-RU" sz="1400" dirty="0" err="1"/>
               <a:t>https</a:t>
             </a:r>
             <a:r>
-              <a:rPr lang="ru-RU" sz="1200" dirty="0"/>
+              <a:rPr lang="ru-RU" sz="1400" dirty="0"/>
               <a:t>://</a:t>
             </a:r>
             <a:r>
-              <a:rPr lang="ru-RU" sz="1200" dirty="0" err="1"/>
-              <a:t>nixtlaverse.nixtla.io</a:t>
-            </a:r>
-            <a:r>
-              <a:rPr lang="ru-RU" sz="1200" dirty="0"/>
+              <a:rPr lang="ru-RU" sz="1400" dirty="0" err="1"/>
+              <a:t>www.springboard.com</a:t>
+            </a:r>
+            <a:r>
+              <a:rPr lang="ru-RU" sz="1400" dirty="0"/>
               <a:t>/</a:t>
             </a:r>
             <a:r>
-              <a:rPr lang="ru-RU" sz="1200" dirty="0" err="1"/>
-              <a:t>statsforecast</a:t>
-            </a:r>
-            <a:r>
-              <a:rPr lang="ru-RU" sz="1200" dirty="0"/>
+              <a:rPr lang="ru-RU" sz="1400" dirty="0" err="1"/>
+              <a:t>blog</a:t>
+            </a:r>
+            <a:r>
+              <a:rPr lang="ru-RU" sz="1400" dirty="0"/>
               <a:t>/</a:t>
             </a:r>
             <a:r>
-              <a:rPr lang="ru-RU" sz="1200" dirty="0" err="1"/>
-              <a:t>docs</a:t>
-            </a:r>
-            <a:r>
-              <a:rPr lang="ru-RU" sz="1200" dirty="0"/>
+              <a:rPr lang="ru-RU" sz="1400" dirty="0" err="1"/>
+              <a:t>data-science</a:t>
+            </a:r>
+            <a:r>
+              <a:rPr lang="ru-RU" sz="1400" dirty="0"/>
               <a:t>/</a:t>
             </a:r>
             <a:r>
-              <a:rPr lang="ru-RU" sz="1200" dirty="0" err="1"/>
-              <a:t>getting-started</a:t>
-            </a:r>
-            <a:r>
-              <a:rPr lang="ru-RU" sz="1200" dirty="0"/>
+              <a:rPr lang="ru-RU" sz="1400" dirty="0" err="1"/>
+              <a:t>time-series-forecasting</a:t>
+            </a:r>
+            <a:r>
+              <a:rPr lang="ru-RU" sz="1400" dirty="0"/>
               <a:t>/</a:t>
             </a:r>
-            <a:r>
-              <a:rPr lang="ru-RU" sz="1200" dirty="0" err="1"/>
-              <a:t>getting_started_complete.html</a:t>
-            </a:r>
-            <a:endParaRPr lang="ru-RU" sz="1200" dirty="0"/>
-          </a:p>
-        </p:txBody>
-      </p:sp>
-      <p:sp>
-        <p:nvSpPr>
-          <p:cNvPr id="11" name="TextBox 10">
-            <a:extLst>
-              <a:ext uri="{FF2B5EF4-FFF2-40B4-BE49-F238E27FC236}">
-                <a16:creationId xmlns:a16="http://schemas.microsoft.com/office/drawing/2014/main" id="{F47B8200-609C-D942-9532-F2B9131EA38B}"/>
-              </a:ext>
-            </a:extLst>
-          </p:cNvPr>
-          <p:cNvSpPr txBox="1"/>
-          <p:nvPr/>
-        </p:nvSpPr>
-        <p:spPr>
-          <a:xfrm>
-            <a:off x="7729983" y="6471885"/>
-            <a:ext cx="4504434" cy="369332"/>
-          </a:xfrm>
-          <a:prstGeom prst="rect">
-            <a:avLst/>
-          </a:prstGeom>
-          <a:noFill/>
-        </p:spPr>
-        <p:txBody>
-          <a:bodyPr wrap="square">
-            <a:spAutoFit/>
-          </a:bodyPr>
-          <a:lstStyle/>
-          <a:p>
-            <a:r>
-              <a:rPr lang="ru-RU" dirty="0" err="1"/>
-              <a:t>https</a:t>
-            </a:r>
-            <a:r>
-              <a:rPr lang="ru-RU" dirty="0"/>
-              <a:t>://</a:t>
-            </a:r>
-            <a:r>
-              <a:rPr lang="ru-RU" dirty="0" err="1"/>
-              <a:t>otexts.com</a:t>
-            </a:r>
-            <a:r>
-              <a:rPr lang="ru-RU" dirty="0"/>
-              <a:t>/fpp3/</a:t>
-            </a:r>
-            <a:r>
-              <a:rPr lang="ru-RU" dirty="0" err="1"/>
-              <a:t>hierarchical.html</a:t>
-            </a:r>
-            <a:endParaRPr lang="ru-RU" dirty="0"/>
-          </a:p>
-        </p:txBody>
-      </p:sp>
-      <p:sp>
-        <p:nvSpPr>
-          <p:cNvPr id="15" name="TextBox 14">
-            <a:extLst>
-              <a:ext uri="{FF2B5EF4-FFF2-40B4-BE49-F238E27FC236}">
-                <a16:creationId xmlns:a16="http://schemas.microsoft.com/office/drawing/2014/main" id="{E2C46EB7-BE7A-D002-B7F0-4807AD04A4E7}"/>
-              </a:ext>
-            </a:extLst>
-          </p:cNvPr>
-          <p:cNvSpPr txBox="1"/>
-          <p:nvPr/>
-        </p:nvSpPr>
-        <p:spPr>
-          <a:xfrm>
-            <a:off x="1067674" y="939054"/>
-            <a:ext cx="2802242" cy="369332"/>
-          </a:xfrm>
-          <a:prstGeom prst="rect">
-            <a:avLst/>
-          </a:prstGeom>
-          <a:noFill/>
-        </p:spPr>
-        <p:txBody>
-          <a:bodyPr wrap="none" rtlCol="0">
-            <a:spAutoFit/>
-          </a:bodyPr>
-          <a:lstStyle/>
-          <a:p>
-            <a:r>
-              <a:rPr lang="ru-RU" dirty="0"/>
-              <a:t>С экзогенными факторами</a:t>
-            </a:r>
-          </a:p>
-        </p:txBody>
-      </p:sp>
-      <p:sp>
-        <p:nvSpPr>
-          <p:cNvPr id="16" name="TextBox 15">
-            <a:extLst>
-              <a:ext uri="{FF2B5EF4-FFF2-40B4-BE49-F238E27FC236}">
-                <a16:creationId xmlns:a16="http://schemas.microsoft.com/office/drawing/2014/main" id="{A5A3A064-722F-1173-7178-CC7ABCFEE11E}"/>
-              </a:ext>
-            </a:extLst>
-          </p:cNvPr>
-          <p:cNvSpPr txBox="1"/>
-          <p:nvPr/>
-        </p:nvSpPr>
-        <p:spPr>
-          <a:xfrm>
-            <a:off x="8680581" y="401771"/>
-            <a:ext cx="1694053" cy="369332"/>
-          </a:xfrm>
-          <a:prstGeom prst="rect">
-            <a:avLst/>
-          </a:prstGeom>
-          <a:noFill/>
-        </p:spPr>
-        <p:txBody>
-          <a:bodyPr wrap="none" rtlCol="0">
-            <a:spAutoFit/>
-          </a:bodyPr>
-          <a:lstStyle/>
-          <a:p>
-            <a:r>
-              <a:rPr lang="ru-RU" dirty="0"/>
-              <a:t>Иерархические</a:t>
-            </a:r>
-          </a:p>
-        </p:txBody>
-      </p:sp>
-      <p:pic>
-        <p:nvPicPr>
-          <p:cNvPr id="17" name="Picture 2" descr="Total Australian quarterly adult prison population, disaggregated by state, by legal status, and by gender.">
-            <a:extLst>
-              <a:ext uri="{FF2B5EF4-FFF2-40B4-BE49-F238E27FC236}">
-                <a16:creationId xmlns:a16="http://schemas.microsoft.com/office/drawing/2014/main" id="{45E23826-E9BC-3ACE-5161-1DD78936D56A}"/>
-              </a:ext>
-            </a:extLst>
-          </p:cNvPr>
-          <p:cNvPicPr>
-            <a:picLocks noChangeAspect="1" noChangeArrowheads="1"/>
-          </p:cNvPicPr>
-          <p:nvPr/>
-        </p:nvPicPr>
-        <p:blipFill rotWithShape="1">
-          <a:blip r:embed="rId3">
-            <a:extLst>
-              <a:ext uri="{28A0092B-C50C-407E-A947-70E740481C1C}">
-                <a14:useLocalDpi xmlns:a14="http://schemas.microsoft.com/office/drawing/2010/main" val="0"/>
-              </a:ext>
-            </a:extLst>
-          </a:blip>
-          <a:srcRect l="317" t="47981" r="-317" b="373"/>
-          <a:stretch/>
-        </p:blipFill>
-        <p:spPr bwMode="auto">
-          <a:xfrm>
-            <a:off x="6132889" y="4171031"/>
-            <a:ext cx="5817640" cy="2102278"/>
-          </a:xfrm>
-          <a:prstGeom prst="rect">
-            <a:avLst/>
-          </a:prstGeom>
-          <a:noFill/>
-          <a:extLst>
-            <a:ext uri="{909E8E84-426E-40DD-AFC4-6F175D3DCCD1}">
-              <a14:hiddenFill xmlns:a14="http://schemas.microsoft.com/office/drawing/2010/main">
-                <a:solidFill>
-                  <a:srgbClr val="FFFFFF"/>
-                </a:solidFill>
-              </a14:hiddenFill>
-            </a:ext>
-          </a:extLst>
-        </p:spPr>
-      </p:pic>
-      <p:sp>
-        <p:nvSpPr>
-          <p:cNvPr id="18" name="TextBox 17">
-            <a:extLst>
-              <a:ext uri="{FF2B5EF4-FFF2-40B4-BE49-F238E27FC236}">
-                <a16:creationId xmlns:a16="http://schemas.microsoft.com/office/drawing/2014/main" id="{A5A3A064-722F-1173-7178-CC7ABCFEE11E}"/>
-              </a:ext>
-            </a:extLst>
-          </p:cNvPr>
-          <p:cNvSpPr txBox="1"/>
-          <p:nvPr/>
-        </p:nvSpPr>
-        <p:spPr>
-          <a:xfrm>
-            <a:off x="3827655" y="3815303"/>
-            <a:ext cx="1234505" cy="369332"/>
-          </a:xfrm>
-          <a:prstGeom prst="rect">
-            <a:avLst/>
-          </a:prstGeom>
-          <a:noFill/>
-        </p:spPr>
-        <p:txBody>
-          <a:bodyPr wrap="none" rtlCol="0">
-            <a:spAutoFit/>
-          </a:bodyPr>
-          <a:lstStyle/>
-          <a:p>
-            <a:r>
-              <a:rPr lang="ru-RU" dirty="0"/>
-              <a:t>Групповые</a:t>
-            </a:r>
-          </a:p>
-        </p:txBody>
-      </p:sp>
-      <p:cxnSp>
-        <p:nvCxnSpPr>
-          <p:cNvPr id="5" name="Прямая со стрелкой 4">
-            <a:extLst>
-              <a:ext uri="{FF2B5EF4-FFF2-40B4-BE49-F238E27FC236}">
-                <a16:creationId xmlns:a16="http://schemas.microsoft.com/office/drawing/2014/main" id="{5B24DFDA-344A-4643-1C06-E6CA58470153}"/>
-              </a:ext>
-            </a:extLst>
-          </p:cNvPr>
-          <p:cNvCxnSpPr>
-            <a:endCxn id="10242" idx="3"/>
-          </p:cNvCxnSpPr>
-          <p:nvPr/>
-        </p:nvCxnSpPr>
-        <p:spPr>
-          <a:xfrm>
-            <a:off x="5062160" y="5177543"/>
-            <a:ext cx="882716" cy="0"/>
-          </a:xfrm>
-          <a:prstGeom prst="straightConnector1">
-            <a:avLst/>
-          </a:prstGeom>
-          <a:ln>
-            <a:tailEnd type="triangle"/>
-          </a:ln>
-        </p:spPr>
-        <p:style>
-          <a:lnRef idx="1">
-            <a:schemeClr val="accent1"/>
-          </a:lnRef>
-          <a:fillRef idx="0">
-            <a:schemeClr val="accent1"/>
-          </a:fillRef>
-          <a:effectRef idx="0">
-            <a:schemeClr val="accent1"/>
-          </a:effectRef>
-          <a:fontRef idx="minor">
-            <a:schemeClr val="tx1"/>
-          </a:fontRef>
-        </p:style>
-      </p:cxnSp>
+          </a:p>
+        </p:txBody>
+      </p:sp>
     </p:spTree>
     <p:extLst>
       <p:ext uri="{BB962C8B-B14F-4D97-AF65-F5344CB8AC3E}">
-        <p14:creationId xmlns:p14="http://schemas.microsoft.com/office/powerpoint/2010/main" val="376028106"/>
+        <p14:creationId xmlns:p14="http://schemas.microsoft.com/office/powerpoint/2010/main" val="2543695133"/>
       </p:ext>
     </p:extLst>
   </p:cSld>
@@ -7085,7 +8106,7 @@
           <p:cNvPr id="2" name="Заголовок 1">
             <a:extLst>
               <a:ext uri="{FF2B5EF4-FFF2-40B4-BE49-F238E27FC236}">
-                <a16:creationId xmlns:a16="http://schemas.microsoft.com/office/drawing/2014/main" id="{80863240-7081-E76A-ACCD-B5BA5DC066E0}"/>
+                <a16:creationId xmlns:a16="http://schemas.microsoft.com/office/drawing/2014/main" id="{6315E440-596D-530D-55C2-E81E915DDDB4}"/>
               </a:ext>
             </a:extLst>
           </p:cNvPr>
@@ -7098,30 +8119,55 @@
         </p:nvSpPr>
         <p:spPr>
           <a:xfrm>
-            <a:off x="580031" y="30521"/>
-            <a:ext cx="11068050" cy="864631"/>
+            <a:off x="797070" y="469109"/>
+            <a:ext cx="10968210" cy="637410"/>
+          </a:xfrm>
+        </p:spPr>
+        <p:txBody>
+          <a:bodyPr>
+            <a:normAutofit fontScale="90000"/>
+          </a:bodyPr>
+          <a:lstStyle/>
+          <a:p>
+            <a:r>
+              <a:rPr lang="ru-RU" dirty="0"/>
+              <a:t>Пример TS</a:t>
+            </a:r>
+            <a:r>
+              <a:rPr lang="en-US" dirty="0"/>
+              <a:t>F System Design</a:t>
+            </a:r>
+            <a:endParaRPr lang="ru-RU" dirty="0"/>
+          </a:p>
+        </p:txBody>
+      </p:sp>
+      <p:sp>
+        <p:nvSpPr>
+          <p:cNvPr id="3" name="Объект 2">
+            <a:extLst>
+              <a:ext uri="{FF2B5EF4-FFF2-40B4-BE49-F238E27FC236}">
+                <a16:creationId xmlns:a16="http://schemas.microsoft.com/office/drawing/2014/main" id="{461BD177-89A3-8B6F-DC87-8D67F7A128B7}"/>
+              </a:ext>
+            </a:extLst>
+          </p:cNvPr>
+          <p:cNvSpPr>
+            <a:spLocks noGrp="1"/>
+          </p:cNvSpPr>
+          <p:nvPr>
+            <p:ph idx="1"/>
+          </p:nvPr>
+        </p:nvSpPr>
+        <p:spPr>
+          <a:xfrm>
+            <a:off x="253388" y="1366595"/>
+            <a:ext cx="4362679" cy="4715396"/>
           </a:xfrm>
         </p:spPr>
         <p:txBody>
           <a:bodyPr/>
           <a:lstStyle/>
           <a:p>
-            <a:r>
-              <a:rPr lang="ru-RU" dirty="0" err="1" smtClean="0"/>
-              <a:t>Многопеременные</a:t>
-            </a:r>
-            <a:r>
-              <a:rPr lang="en-US" dirty="0" smtClean="0"/>
-              <a:t> </a:t>
-            </a:r>
-            <a:r>
-              <a:rPr lang="ru-RU" dirty="0" smtClean="0"/>
-              <a:t>и другие </a:t>
-            </a:r>
-            <a:r>
-              <a:rPr lang="ru-RU" dirty="0"/>
-              <a:t>ВР</a:t>
-            </a:r>
+            <a:endParaRPr lang="ru-RU" dirty="0"/>
           </a:p>
         </p:txBody>
       </p:sp>
@@ -7130,7 +8176,7 @@
           <p:cNvPr id="4" name="Номер слайда 3">
             <a:extLst>
               <a:ext uri="{FF2B5EF4-FFF2-40B4-BE49-F238E27FC236}">
-                <a16:creationId xmlns:a16="http://schemas.microsoft.com/office/drawing/2014/main" id="{6601DB23-2F3F-9FA2-A9CF-B17E2699F010}"/>
+                <a16:creationId xmlns:a16="http://schemas.microsoft.com/office/drawing/2014/main" id="{6453CD57-6E37-BACE-D458-4149304B4BCD}"/>
               </a:ext>
             </a:extLst>
           </p:cNvPr>
@@ -7154,165 +8200,35 @@
           </a:p>
         </p:txBody>
       </p:sp>
-      <p:sp>
-        <p:nvSpPr>
-          <p:cNvPr id="7" name="TextBox 6">
+      <p:pic>
+        <p:nvPicPr>
+          <p:cNvPr id="5122" name="Picture 2">
             <a:extLst>
               <a:ext uri="{FF2B5EF4-FFF2-40B4-BE49-F238E27FC236}">
-                <a16:creationId xmlns:a16="http://schemas.microsoft.com/office/drawing/2014/main" id="{B4C891B2-62E7-871D-CF4F-05D6CA6E0463}"/>
+                <a16:creationId xmlns:a16="http://schemas.microsoft.com/office/drawing/2014/main" id="{F40F0D74-1E7D-8A20-9B0A-70E358FC3D7E}"/>
               </a:ext>
             </a:extLst>
           </p:cNvPr>
-          <p:cNvSpPr txBox="1"/>
-          <p:nvPr/>
-        </p:nvSpPr>
-        <p:spPr>
-          <a:xfrm>
-            <a:off x="3420534" y="6502723"/>
-            <a:ext cx="6096000" cy="276999"/>
-          </a:xfrm>
-          <a:prstGeom prst="rect">
-            <a:avLst/>
-          </a:prstGeom>
-          <a:noFill/>
-        </p:spPr>
-        <p:txBody>
-          <a:bodyPr wrap="square">
-            <a:spAutoFit/>
-          </a:bodyPr>
-          <a:lstStyle/>
-          <a:p>
-            <a:r>
-              <a:rPr lang="ru-RU" sz="1200" dirty="0" err="1"/>
-              <a:t>https</a:t>
-            </a:r>
-            <a:r>
-              <a:rPr lang="ru-RU" sz="1200" dirty="0"/>
-              <a:t>://</a:t>
-            </a:r>
-            <a:r>
-              <a:rPr lang="ru-RU" sz="1200" dirty="0" err="1"/>
-              <a:t>goldinlocks.github.io</a:t>
-            </a:r>
-            <a:r>
-              <a:rPr lang="ru-RU" sz="1200" dirty="0"/>
-              <a:t>/</a:t>
-            </a:r>
-            <a:r>
-              <a:rPr lang="ru-RU" sz="1200" dirty="0" err="1"/>
-              <a:t>Multivariate-time-series-models</a:t>
-            </a:r>
-            <a:r>
-              <a:rPr lang="ru-RU" sz="1200" dirty="0"/>
-              <a:t>/</a:t>
-            </a:r>
-          </a:p>
-        </p:txBody>
-      </p:sp>
-      <p:pic>
-        <p:nvPicPr>
-          <p:cNvPr id="3" name="Рисунок 2"/>
-          <p:cNvPicPr>
-            <a:picLocks noChangeAspect="1"/>
-          </p:cNvPicPr>
-          <p:nvPr/>
-        </p:nvPicPr>
-        <p:blipFill rotWithShape="1">
-          <a:blip r:embed="rId2"/>
-          <a:srcRect t="-203" b="-1"/>
-          <a:stretch/>
-        </p:blipFill>
-        <p:spPr>
-          <a:xfrm>
-            <a:off x="300631" y="1124162"/>
-            <a:ext cx="3991111" cy="2628217"/>
-          </a:xfrm>
-          <a:prstGeom prst="rect">
-            <a:avLst/>
-          </a:prstGeom>
-        </p:spPr>
-      </p:pic>
-      <p:sp>
-        <p:nvSpPr>
-          <p:cNvPr id="8" name="TextBox 7"/>
-          <p:cNvSpPr txBox="1"/>
-          <p:nvPr/>
-        </p:nvSpPr>
-        <p:spPr>
-          <a:xfrm>
-            <a:off x="3420534" y="778821"/>
-            <a:ext cx="4825167" cy="461665"/>
-          </a:xfrm>
-          <a:prstGeom prst="rect">
-            <a:avLst/>
-          </a:prstGeom>
-          <a:noFill/>
-        </p:spPr>
-        <p:txBody>
-          <a:bodyPr wrap="none" rtlCol="0">
-            <a:spAutoFit/>
-          </a:bodyPr>
-          <a:lstStyle/>
-          <a:p>
-            <a:r>
-              <a:rPr lang="ru-RU" sz="2400" dirty="0" smtClean="0"/>
-              <a:t>Пространственно-временные ряды</a:t>
-            </a:r>
-            <a:endParaRPr lang="ru-RU" sz="2400" dirty="0"/>
-          </a:p>
-        </p:txBody>
-      </p:sp>
-      <p:sp>
-        <p:nvSpPr>
-          <p:cNvPr id="9" name="Прямоугольник 8"/>
-          <p:cNvSpPr/>
-          <p:nvPr/>
-        </p:nvSpPr>
-        <p:spPr>
-          <a:xfrm>
-            <a:off x="78858" y="6485756"/>
-            <a:ext cx="3038652" cy="276999"/>
-          </a:xfrm>
-          <a:prstGeom prst="rect">
-            <a:avLst/>
-          </a:prstGeom>
-        </p:spPr>
-        <p:txBody>
-          <a:bodyPr wrap="none">
-            <a:spAutoFit/>
-          </a:bodyPr>
-          <a:lstStyle/>
-          <a:p>
-            <a:r>
-              <a:rPr lang="ru-RU" sz="1200" dirty="0"/>
-              <a:t>https://ltb.itc.utwente.nl/491/concept/79777</a:t>
-            </a:r>
-          </a:p>
-        </p:txBody>
-      </p:sp>
-      <p:pic>
-        <p:nvPicPr>
-          <p:cNvPr id="1026" name="Picture 2" descr="Applsci 15 01241 g001"/>
           <p:cNvPicPr>
             <a:picLocks noChangeAspect="1" noChangeArrowheads="1"/>
           </p:cNvPicPr>
           <p:nvPr/>
         </p:nvPicPr>
         <p:blipFill rotWithShape="1">
-          <a:blip r:embed="rId3" cstate="hqprint">
+          <a:blip r:embed="rId2">
             <a:extLst>
               <a:ext uri="{28A0092B-C50C-407E-A947-70E740481C1C}">
                 <a14:useLocalDpi xmlns:a14="http://schemas.microsoft.com/office/drawing/2010/main" val="0"/>
               </a:ext>
             </a:extLst>
           </a:blip>
-          <a:srcRect t="38963" b="7627"/>
+          <a:srcRect t="8514" r="6732" b="9928"/>
           <a:stretch/>
         </p:blipFill>
         <p:spPr bwMode="auto">
           <a:xfrm>
-            <a:off x="6468534" y="4186332"/>
-            <a:ext cx="5296013" cy="1978246"/>
+            <a:off x="0" y="1135765"/>
+            <a:ext cx="9677400" cy="5103876"/>
           </a:xfrm>
           <a:prstGeom prst="rect">
             <a:avLst/>
@@ -7331,14 +8247,20 @@
       </p:pic>
       <p:sp>
         <p:nvSpPr>
-          <p:cNvPr id="11" name="TextBox 10"/>
+          <p:cNvPr id="6" name="TextBox 5">
+            <a:extLst>
+              <a:ext uri="{FF2B5EF4-FFF2-40B4-BE49-F238E27FC236}">
+                <a16:creationId xmlns:a16="http://schemas.microsoft.com/office/drawing/2014/main" id="{1C45FE49-3FA2-09A2-CA28-89E49D313113}"/>
+              </a:ext>
+            </a:extLst>
+          </p:cNvPr>
           <p:cNvSpPr txBox="1"/>
           <p:nvPr/>
         </p:nvSpPr>
         <p:spPr>
           <a:xfrm>
-            <a:off x="3778673" y="3633633"/>
-            <a:ext cx="3052182" cy="461665"/>
+            <a:off x="1567149" y="6111237"/>
+            <a:ext cx="6097836" cy="369332"/>
           </a:xfrm>
           <a:prstGeom prst="rect">
             <a:avLst/>
@@ -7346,133 +8268,42 @@
           <a:noFill/>
         </p:spPr>
         <p:txBody>
-          <a:bodyPr wrap="none" rtlCol="0">
+          <a:bodyPr wrap="square">
             <a:spAutoFit/>
           </a:bodyPr>
           <a:lstStyle/>
           <a:p>
             <a:r>
-              <a:rPr lang="ru-RU" sz="2400" dirty="0" err="1" smtClean="0"/>
-              <a:t>Мультимодальные</a:t>
-            </a:r>
-            <a:r>
-              <a:rPr lang="ru-RU" sz="2400" dirty="0" smtClean="0"/>
-              <a:t> ВР</a:t>
-            </a:r>
-            <a:endParaRPr lang="ru-RU" sz="2400" dirty="0"/>
-          </a:p>
-        </p:txBody>
-      </p:sp>
-      <p:pic>
-        <p:nvPicPr>
-          <p:cNvPr id="10" name="Рисунок 9"/>
-          <p:cNvPicPr>
-            <a:picLocks noChangeAspect="1"/>
-          </p:cNvPicPr>
-          <p:nvPr/>
-        </p:nvPicPr>
-        <p:blipFill>
-          <a:blip r:embed="rId4"/>
-          <a:stretch>
-            <a:fillRect/>
-          </a:stretch>
-        </p:blipFill>
-        <p:spPr>
-          <a:xfrm>
-            <a:off x="104324" y="4329141"/>
-            <a:ext cx="6026372" cy="1689064"/>
-          </a:xfrm>
-          <a:prstGeom prst="rect">
-            <a:avLst/>
-          </a:prstGeom>
-        </p:spPr>
-      </p:pic>
-      <p:pic>
-        <p:nvPicPr>
-          <p:cNvPr id="2050" name="Picture 2" descr="Integrated Spatio-Temporal Graph Neural Network for Traffic Forecasting"/>
-          <p:cNvPicPr>
-            <a:picLocks noChangeAspect="1" noChangeArrowheads="1"/>
-          </p:cNvPicPr>
-          <p:nvPr/>
-        </p:nvPicPr>
-        <p:blipFill>
-          <a:blip r:embed="rId5" cstate="hqprint">
-            <a:extLst>
-              <a:ext uri="{28A0092B-C50C-407E-A947-70E740481C1C}">
-                <a14:useLocalDpi xmlns:a14="http://schemas.microsoft.com/office/drawing/2010/main" val="0"/>
-              </a:ext>
-            </a:extLst>
-          </a:blip>
-          <a:srcRect/>
-          <a:stretch>
-            <a:fillRect/>
-          </a:stretch>
-        </p:blipFill>
-        <p:spPr bwMode="auto">
-          <a:xfrm>
-            <a:off x="8738303" y="778821"/>
-            <a:ext cx="3453697" cy="2471180"/>
-          </a:xfrm>
-          <a:prstGeom prst="rect">
-            <a:avLst/>
-          </a:prstGeom>
-          <a:noFill/>
-          <a:extLst>
-            <a:ext uri="{909E8E84-426E-40DD-AFC4-6F175D3DCCD1}">
-              <a14:hiddenFill xmlns:a14="http://schemas.microsoft.com/office/drawing/2010/main">
-                <a:solidFill>
-                  <a:srgbClr val="FFFFFF"/>
-                </a:solidFill>
-              </a14:hiddenFill>
-            </a:ext>
-          </a:extLst>
-        </p:spPr>
-      </p:pic>
-      <p:pic>
-        <p:nvPicPr>
-          <p:cNvPr id="1028" name="Picture 4" descr="Spatial-temporal graph neural network for traffic forecasting: An overview  and open research issues | Applied Intelligence"/>
-          <p:cNvPicPr>
-            <a:picLocks noChangeAspect="1" noChangeArrowheads="1"/>
-          </p:cNvPicPr>
-          <p:nvPr/>
-        </p:nvPicPr>
-        <p:blipFill>
-          <a:blip r:embed="rId6">
-            <a:extLst>
-              <a:ext uri="{28A0092B-C50C-407E-A947-70E740481C1C}">
-                <a14:useLocalDpi xmlns:a14="http://schemas.microsoft.com/office/drawing/2010/main" val="0"/>
-              </a:ext>
-            </a:extLst>
-          </a:blip>
-          <a:srcRect/>
-          <a:stretch>
-            <a:fillRect/>
-          </a:stretch>
-        </p:blipFill>
-        <p:spPr bwMode="auto">
-          <a:xfrm>
-            <a:off x="4406042" y="1399107"/>
-            <a:ext cx="4641071" cy="2189039"/>
-          </a:xfrm>
-          <a:prstGeom prst="rect">
-            <a:avLst/>
-          </a:prstGeom>
-          <a:noFill/>
-          <a:extLst>
-            <a:ext uri="{909E8E84-426E-40DD-AFC4-6F175D3DCCD1}">
-              <a14:hiddenFill xmlns:a14="http://schemas.microsoft.com/office/drawing/2010/main">
-                <a:solidFill>
-                  <a:srgbClr val="FFFFFF"/>
-                </a:solidFill>
-              </a14:hiddenFill>
-            </a:ext>
-          </a:extLst>
-        </p:spPr>
-      </p:pic>
+              <a:rPr lang="ru-RU" dirty="0" err="1"/>
+              <a:t>https</a:t>
+            </a:r>
+            <a:r>
+              <a:rPr lang="ru-RU" dirty="0"/>
+              <a:t>://</a:t>
+            </a:r>
+            <a:r>
+              <a:rPr lang="ru-RU" dirty="0" err="1"/>
+              <a:t>www.ijcai.org</a:t>
+            </a:r>
+            <a:r>
+              <a:rPr lang="ru-RU" dirty="0"/>
+              <a:t>/</a:t>
+            </a:r>
+            <a:r>
+              <a:rPr lang="ru-RU" dirty="0" err="1"/>
+              <a:t>proceedings</a:t>
+            </a:r>
+            <a:r>
+              <a:rPr lang="ru-RU" dirty="0"/>
+              <a:t>/2019/441</a:t>
+            </a:r>
+          </a:p>
+        </p:txBody>
+      </p:sp>
     </p:spTree>
     <p:extLst>
       <p:ext uri="{BB962C8B-B14F-4D97-AF65-F5344CB8AC3E}">
-        <p14:creationId xmlns:p14="http://schemas.microsoft.com/office/powerpoint/2010/main" val="576615970"/>
+        <p14:creationId xmlns:p14="http://schemas.microsoft.com/office/powerpoint/2010/main" val="622826776"/>
       </p:ext>
     </p:extLst>
   </p:cSld>
@@ -7494,13 +8325,7 @@
   <p:cSld>
     <p:spTree>
       <p:nvGrpSpPr>
-        <p:cNvPr id="1" name="">
-          <a:extLst>
-            <a:ext uri="{FF2B5EF4-FFF2-40B4-BE49-F238E27FC236}">
-              <a16:creationId xmlns:a16="http://schemas.microsoft.com/office/drawing/2014/main" id="{9ECBAF81-22EA-22EF-A294-14B499CC3F0A}"/>
-            </a:ext>
-          </a:extLst>
-        </p:cNvPr>
+        <p:cNvPr id="1" name=""/>
         <p:cNvGrpSpPr/>
         <p:nvPr/>
       </p:nvGrpSpPr>
@@ -7514,13 +8339,7 @@
       </p:grpSpPr>
       <p:sp>
         <p:nvSpPr>
-          <p:cNvPr id="2" name="Заголовок 1">
-            <a:extLst>
-              <a:ext uri="{FF2B5EF4-FFF2-40B4-BE49-F238E27FC236}">
-                <a16:creationId xmlns:a16="http://schemas.microsoft.com/office/drawing/2014/main" id="{01B5D777-43A0-916E-A65E-D500F8D94404}"/>
-              </a:ext>
-            </a:extLst>
-          </p:cNvPr>
+          <p:cNvPr id="2" name="Заголовок 1"/>
           <p:cNvSpPr>
             <a:spLocks noGrp="1"/>
           </p:cNvSpPr>
@@ -7530,8 +8349,8 @@
         </p:nvSpPr>
         <p:spPr>
           <a:xfrm>
-            <a:off x="285750" y="181911"/>
-            <a:ext cx="11068050" cy="864631"/>
+            <a:off x="331470" y="365125"/>
+            <a:ext cx="11022330" cy="743585"/>
           </a:xfrm>
         </p:spPr>
         <p:txBody>
@@ -7539,21 +8358,16 @@
           <a:lstStyle/>
           <a:p>
             <a:r>
-              <a:rPr lang="ru-RU" dirty="0"/>
-              <a:t>Некоторые типы ВР</a:t>
-            </a:r>
-          </a:p>
-        </p:txBody>
-      </p:sp>
-      <p:sp>
-        <p:nvSpPr>
-          <p:cNvPr id="3" name="Объект 2">
-            <a:extLst>
-              <a:ext uri="{FF2B5EF4-FFF2-40B4-BE49-F238E27FC236}">
-                <a16:creationId xmlns:a16="http://schemas.microsoft.com/office/drawing/2014/main" id="{1E05B2E4-704A-4B04-3172-D5182EE9D708}"/>
-              </a:ext>
-            </a:extLst>
-          </p:cNvPr>
+              <a:rPr lang="ru-RU" dirty="0" smtClean="0"/>
+              <a:t>Вопросы для самоконтроля</a:t>
+            </a:r>
+            <a:endParaRPr lang="ru-RU" dirty="0"/>
+          </a:p>
+        </p:txBody>
+      </p:sp>
+      <p:sp>
+        <p:nvSpPr>
+          <p:cNvPr id="3" name="Объект 2"/>
           <p:cNvSpPr>
             <a:spLocks noGrp="1"/>
           </p:cNvSpPr>
@@ -7563,153 +8377,90 @@
         </p:nvSpPr>
         <p:spPr>
           <a:xfrm>
-            <a:off x="271749" y="870271"/>
-            <a:ext cx="11634501" cy="5507195"/>
+            <a:off x="331470" y="1211580"/>
+            <a:ext cx="11022330" cy="4965383"/>
           </a:xfrm>
         </p:spPr>
         <p:txBody>
           <a:bodyPr>
-            <a:noAutofit/>
+            <a:normAutofit/>
           </a:bodyPr>
           <a:lstStyle/>
           <a:p>
             <a:r>
-              <a:rPr lang="ru-RU" sz="2200" b="1" dirty="0" err="1"/>
-              <a:t>Однопеременные</a:t>
-            </a:r>
-            <a:r>
-              <a:rPr lang="ru-RU" sz="2200" b="1" dirty="0"/>
-              <a:t> временные ряды (ВР) </a:t>
-            </a:r>
-            <a:r>
-              <a:rPr lang="ru-RU" sz="2200" dirty="0"/>
-              <a:t>— это последовательности значений одной переменной, зафиксированных в различные моменты времени. </a:t>
-            </a:r>
-            <a:r>
-              <a:rPr lang="ru-RU" sz="2200" b="1" dirty="0"/>
-              <a:t>Цель</a:t>
-            </a:r>
-            <a:r>
-              <a:rPr lang="ru-RU" sz="2200" dirty="0"/>
-              <a:t>, напр. Предсказать </a:t>
-            </a:r>
-            <a:r>
-              <a:rPr lang="ru-RU" sz="2200" dirty="0" err="1"/>
-              <a:t>следущее</a:t>
-            </a:r>
-            <a:r>
-              <a:rPr lang="ru-RU" sz="2200" dirty="0"/>
-              <a:t> значение </a:t>
-            </a:r>
-            <a:r>
-              <a:rPr lang="ru-RU" sz="2200" dirty="0" smtClean="0"/>
-              <a:t>переменной</a:t>
-            </a:r>
-            <a:endParaRPr lang="en-US" sz="2200" dirty="0" smtClean="0"/>
-          </a:p>
-          <a:p>
-            <a:pPr lvl="1"/>
-            <a:r>
-              <a:rPr lang="ru-RU" sz="1800" b="1" dirty="0" smtClean="0"/>
-              <a:t>ВР могут быть дискретными и </a:t>
-            </a:r>
-            <a:r>
-              <a:rPr lang="ru-RU" sz="1800" b="1" dirty="0" err="1" smtClean="0"/>
-              <a:t>неприрывными</a:t>
-            </a:r>
-            <a:r>
-              <a:rPr lang="ru-RU" sz="1800" b="1" dirty="0" smtClean="0"/>
+              <a:rPr lang="ru-RU" sz="2400" b="1" dirty="0"/>
+              <a:t>Назовите основные особенности задач анализа временных рядов</a:t>
+            </a:r>
+            <a:r>
+              <a:rPr lang="ru-RU" sz="2400" dirty="0"/>
+              <a:t>, приведите примеры задач и переменных для анализа. Обоснуйте требования к результатам анализа в приведенных примерах</a:t>
+            </a:r>
+            <a:r>
+              <a:rPr lang="ru-RU" sz="2400" dirty="0" smtClean="0"/>
               <a:t>.</a:t>
             </a:r>
-            <a:endParaRPr lang="ru-RU" sz="1800" b="1" dirty="0"/>
-          </a:p>
-          <a:p>
-            <a:r>
-              <a:rPr lang="ru-RU" sz="2200" b="1" dirty="0"/>
-              <a:t>Экзогенные факторы </a:t>
-            </a:r>
-            <a:r>
-              <a:rPr lang="ru-RU" sz="2200" dirty="0"/>
-              <a:t>— это внешние переменные, влияющие на исследуемый ВР, но не зависящие от него. </a:t>
-            </a:r>
-            <a:r>
-              <a:rPr lang="ru-RU" sz="2200" b="1" dirty="0"/>
-              <a:t>Цель -</a:t>
-            </a:r>
-            <a:r>
-              <a:rPr lang="ru-RU" sz="2200" dirty="0"/>
-              <a:t> объяснение изменений в зависимой переменной (доп. внешняя информация).</a:t>
-            </a:r>
-          </a:p>
-          <a:p>
-            <a:r>
-              <a:rPr lang="ru-RU" sz="2200" b="1" dirty="0" err="1"/>
-              <a:t>Многопеременные</a:t>
-            </a:r>
-            <a:r>
-              <a:rPr lang="ru-RU" sz="2200" b="1" dirty="0"/>
-              <a:t> временные ряды </a:t>
-            </a:r>
-            <a:r>
-              <a:rPr lang="ru-RU" sz="2200" dirty="0"/>
-              <a:t>- совокупность нескольких переменных, наблюдаемых одновременно во времени. В их состав могут входить как эндогенные (зависимые), так и экзогенные (независимые) переменные. </a:t>
-            </a:r>
-            <a:r>
-              <a:rPr lang="ru-RU" sz="2200" b="1" dirty="0"/>
-              <a:t>Цель</a:t>
-            </a:r>
-            <a:r>
-              <a:rPr lang="ru-RU" sz="2200" dirty="0"/>
-              <a:t> – учет взаимного влияния ВР при анализе.</a:t>
-            </a:r>
-          </a:p>
-          <a:p>
-            <a:r>
-              <a:rPr lang="ru-RU" sz="2200" b="1" dirty="0"/>
-              <a:t>Иерархические временные ряды </a:t>
-            </a:r>
-            <a:r>
-              <a:rPr lang="ru-RU" sz="2200" dirty="0"/>
-              <a:t>— это структуры данных, в которых временные ряды организованы по уровням агрегации (например, по регионам, странам, континентам). Анализ может проводиться как на уровне отдельных элементов, так и на уровне всей иерархии. </a:t>
-            </a:r>
-            <a:r>
-              <a:rPr lang="ru-RU" sz="2200" b="1" dirty="0"/>
-              <a:t>Цель –</a:t>
-            </a:r>
-            <a:r>
-              <a:rPr lang="ru-RU" sz="2200" dirty="0"/>
-              <a:t> анализ на разных уровнях агрегации</a:t>
-            </a:r>
-          </a:p>
-          <a:p>
-            <a:r>
-              <a:rPr lang="ru-RU" sz="2200" b="1" dirty="0"/>
-              <a:t>Групповые временные ряды </a:t>
-            </a:r>
-            <a:r>
-              <a:rPr lang="ru-RU" sz="2200" dirty="0"/>
-              <a:t>— это наборы временных рядов, объединённых по определённому критерию (например, продажи товаров в одной категории), без строго иерархической зависимости. </a:t>
-            </a:r>
-            <a:r>
-              <a:rPr lang="ru-RU" sz="2200" b="1" dirty="0"/>
-              <a:t>Цель - </a:t>
-            </a:r>
-            <a:r>
-              <a:rPr lang="ru-RU" sz="2200" dirty="0"/>
-              <a:t>анализа общих тенденций в группе.</a:t>
-            </a:r>
-          </a:p>
-        </p:txBody>
-      </p:sp>
-      <p:sp>
-        <p:nvSpPr>
-          <p:cNvPr id="4" name="Номер слайда 3">
-            <a:extLst>
-              <a:ext uri="{FF2B5EF4-FFF2-40B4-BE49-F238E27FC236}">
-                <a16:creationId xmlns:a16="http://schemas.microsoft.com/office/drawing/2014/main" id="{52356ACC-386C-A7B5-DEC6-CF80F2F623FC}"/>
-              </a:ext>
-            </a:extLst>
-          </p:cNvPr>
+          </a:p>
+          <a:p>
+            <a:r>
+              <a:rPr lang="ru-RU" sz="2400" dirty="0" smtClean="0"/>
+              <a:t>Подумайте и объясните особенности задач предсказания ВР, регрессии ВР и классификации ВР. В чем их отличия? Приведите примеры задач на каждый из этих типов для </a:t>
+            </a:r>
+            <a:r>
+              <a:rPr lang="ru-RU" sz="2400" dirty="0" err="1" smtClean="0"/>
+              <a:t>однопеременных</a:t>
+            </a:r>
+            <a:r>
+              <a:rPr lang="ru-RU" sz="2400" dirty="0" smtClean="0"/>
+              <a:t> и </a:t>
+            </a:r>
+            <a:r>
+              <a:rPr lang="ru-RU" sz="2400" dirty="0" err="1" smtClean="0"/>
+              <a:t>многопеременных</a:t>
+            </a:r>
+            <a:r>
+              <a:rPr lang="ru-RU" sz="2400" dirty="0" smtClean="0"/>
+              <a:t> ВР</a:t>
+            </a:r>
+            <a:r>
+              <a:rPr lang="ru-RU" sz="2400" dirty="0" smtClean="0"/>
+              <a:t>.</a:t>
+            </a:r>
+          </a:p>
+          <a:p>
+            <a:r>
+              <a:rPr lang="ru-RU" sz="2400" dirty="0" smtClean="0"/>
+              <a:t>Проведите работу по постановке </a:t>
+            </a:r>
+            <a:r>
+              <a:rPr lang="ru-RU" sz="2400" smtClean="0"/>
+              <a:t>задачи анализа ВР.</a:t>
+            </a:r>
+            <a:endParaRPr lang="ru-RU" sz="2400" dirty="0" smtClean="0"/>
+          </a:p>
+          <a:p>
+            <a:r>
+              <a:rPr lang="ru-RU" sz="2400" dirty="0" smtClean="0"/>
+              <a:t>Объясните в каких задачах нужны и в каких не нужно использовать методы анализа ВР. Чем задачи с использованием анализа ВР отличаются от задач для табличных данных, текстовых задач или задач обработки изображений.</a:t>
+            </a:r>
+            <a:endParaRPr lang="ru-RU" sz="2400" dirty="0" smtClean="0"/>
+          </a:p>
+          <a:p>
+            <a:endParaRPr lang="ru-RU" sz="2400" dirty="0"/>
+          </a:p>
+          <a:p>
+            <a:endParaRPr lang="ru-RU" sz="2400" dirty="0" smtClean="0"/>
+          </a:p>
+          <a:p>
+            <a:endParaRPr lang="ru-RU" sz="2400" dirty="0" smtClean="0"/>
+          </a:p>
+          <a:p>
+            <a:endParaRPr lang="ru-RU" sz="2400" dirty="0"/>
+          </a:p>
+        </p:txBody>
+      </p:sp>
+      <p:sp>
+        <p:nvSpPr>
+          <p:cNvPr id="4" name="Номер слайда 3"/>
           <p:cNvSpPr>
             <a:spLocks noGrp="1"/>
           </p:cNvSpPr>
@@ -7730,65 +8481,10 @@
           </a:p>
         </p:txBody>
       </p:sp>
-      <p:sp>
-        <p:nvSpPr>
-          <p:cNvPr id="7" name="TextBox 6">
-            <a:extLst>
-              <a:ext uri="{FF2B5EF4-FFF2-40B4-BE49-F238E27FC236}">
-                <a16:creationId xmlns:a16="http://schemas.microsoft.com/office/drawing/2014/main" id="{2AAC224D-2950-867C-AE6C-3A69408E1DF7}"/>
-              </a:ext>
-            </a:extLst>
-          </p:cNvPr>
-          <p:cNvSpPr txBox="1"/>
-          <p:nvPr/>
-        </p:nvSpPr>
-        <p:spPr>
-          <a:xfrm>
-            <a:off x="6096000" y="6377467"/>
-            <a:ext cx="6096000" cy="369332"/>
-          </a:xfrm>
-          <a:prstGeom prst="rect">
-            <a:avLst/>
-          </a:prstGeom>
-          <a:noFill/>
-        </p:spPr>
-        <p:txBody>
-          <a:bodyPr wrap="square">
-            <a:spAutoFit/>
-          </a:bodyPr>
-          <a:lstStyle/>
-          <a:p>
-            <a:r>
-              <a:rPr lang="ru-RU" dirty="0" err="1"/>
-              <a:t>https</a:t>
-            </a:r>
-            <a:r>
-              <a:rPr lang="ru-RU" dirty="0"/>
-              <a:t>://</a:t>
-            </a:r>
-            <a:r>
-              <a:rPr lang="ru-RU" dirty="0" err="1"/>
-              <a:t>goldinlocks.github.io</a:t>
-            </a:r>
-            <a:r>
-              <a:rPr lang="ru-RU" dirty="0"/>
-              <a:t>/</a:t>
-            </a:r>
-            <a:r>
-              <a:rPr lang="ru-RU" dirty="0" err="1"/>
-              <a:t>Multivariate-time-series-models</a:t>
-            </a:r>
-            <a:r>
-              <a:rPr lang="ru-RU" dirty="0"/>
-              <a:t>/</a:t>
-            </a:r>
-          </a:p>
-        </p:txBody>
-      </p:sp>
     </p:spTree>
     <p:extLst>
       <p:ext uri="{BB962C8B-B14F-4D97-AF65-F5344CB8AC3E}">
-        <p14:creationId xmlns:p14="http://schemas.microsoft.com/office/powerpoint/2010/main" val="473861099"/>
+        <p14:creationId xmlns:p14="http://schemas.microsoft.com/office/powerpoint/2010/main" val="418545075"/>
       </p:ext>
     </p:extLst>
   </p:cSld>
@@ -8815,225 +9511,6 @@
       <p:transition spd="slow"/>
     </mc:Fallback>
   </mc:AlternateContent>
-  <p:timing>
-    <p:tnLst>
-      <p:par>
-        <p:cTn id="1" dur="indefinite" restart="never" nodeType="tmRoot"/>
-      </p:par>
-    </p:tnLst>
-  </p:timing>
-</p:sld>
-</file>
-
-<file path=ppt/slides/slide21.xml><?xml version="1.0" encoding="utf-8"?>
-<p:sld xmlns:a="http://schemas.openxmlformats.org/drawingml/2006/main" xmlns:r="http://schemas.openxmlformats.org/officeDocument/2006/relationships" xmlns:p="http://schemas.openxmlformats.org/presentationml/2006/main">
-  <p:cSld>
-    <p:spTree>
-      <p:nvGrpSpPr>
-        <p:cNvPr id="1" name=""/>
-        <p:cNvGrpSpPr/>
-        <p:nvPr/>
-      </p:nvGrpSpPr>
-      <p:grpSpPr>
-        <a:xfrm>
-          <a:off x="0" y="0"/>
-          <a:ext cx="0" cy="0"/>
-          <a:chOff x="0" y="0"/>
-          <a:chExt cx="0" cy="0"/>
-        </a:xfrm>
-      </p:grpSpPr>
-      <p:sp>
-        <p:nvSpPr>
-          <p:cNvPr id="2" name="Заголовок 1"/>
-          <p:cNvSpPr>
-            <a:spLocks noGrp="1"/>
-          </p:cNvSpPr>
-          <p:nvPr>
-            <p:ph type="title"/>
-          </p:nvPr>
-        </p:nvSpPr>
-        <p:spPr>
-          <a:xfrm>
-            <a:off x="331470" y="365125"/>
-            <a:ext cx="11022330" cy="743585"/>
-          </a:xfrm>
-        </p:spPr>
-        <p:txBody>
-          <a:bodyPr/>
-          <a:lstStyle/>
-          <a:p>
-            <a:r>
-              <a:rPr lang="ru-RU" dirty="0" smtClean="0"/>
-              <a:t>Вопросы для самоконтроля</a:t>
-            </a:r>
-            <a:endParaRPr lang="ru-RU" dirty="0"/>
-          </a:p>
-        </p:txBody>
-      </p:sp>
-      <p:sp>
-        <p:nvSpPr>
-          <p:cNvPr id="3" name="Объект 2"/>
-          <p:cNvSpPr>
-            <a:spLocks noGrp="1"/>
-          </p:cNvSpPr>
-          <p:nvPr>
-            <p:ph idx="1"/>
-          </p:nvPr>
-        </p:nvSpPr>
-        <p:spPr>
-          <a:xfrm>
-            <a:off x="331470" y="1211580"/>
-            <a:ext cx="11022330" cy="4965383"/>
-          </a:xfrm>
-        </p:spPr>
-        <p:txBody>
-          <a:bodyPr>
-            <a:normAutofit/>
-          </a:bodyPr>
-          <a:lstStyle/>
-          <a:p>
-            <a:r>
-              <a:rPr lang="ru-RU" sz="2400" dirty="0"/>
-              <a:t>Назовите основные особенности задач анализа временных рядов, приведите примеры задач и переменных для анализа. Обоснуйте требования к результатам анализа в приведенных примерах</a:t>
-            </a:r>
-            <a:r>
-              <a:rPr lang="ru-RU" sz="2400" dirty="0" smtClean="0"/>
-              <a:t>.</a:t>
-            </a:r>
-          </a:p>
-          <a:p>
-            <a:r>
-              <a:rPr lang="ru-RU" sz="2400" dirty="0" smtClean="0"/>
-              <a:t>Подумайте и объясните особенности задач предсказания ВР, регрессии ВР и классификации ВР. В чем их отличия? Приведите примеры задач на каждый из этих типов для </a:t>
-            </a:r>
-            <a:r>
-              <a:rPr lang="ru-RU" sz="2400" dirty="0" err="1" smtClean="0"/>
-              <a:t>однопеременных</a:t>
-            </a:r>
-            <a:r>
-              <a:rPr lang="ru-RU" sz="2400" dirty="0" smtClean="0"/>
-              <a:t> и </a:t>
-            </a:r>
-            <a:r>
-              <a:rPr lang="ru-RU" sz="2400" dirty="0" err="1" smtClean="0"/>
-              <a:t>многопеременных</a:t>
-            </a:r>
-            <a:r>
-              <a:rPr lang="ru-RU" sz="2400" dirty="0" smtClean="0"/>
-              <a:t> ВР.</a:t>
-            </a:r>
-          </a:p>
-          <a:p>
-            <a:r>
-              <a:rPr lang="ru-RU" sz="2400" dirty="0" smtClean="0"/>
-              <a:t>Приведите примеры использования </a:t>
-            </a:r>
-            <a:r>
-              <a:rPr lang="ru-RU" sz="2400" b="1" dirty="0" smtClean="0"/>
-              <a:t>иерархических, групповых ВР</a:t>
-            </a:r>
-            <a:r>
-              <a:rPr lang="ru-RU" sz="2400" dirty="0" smtClean="0"/>
-              <a:t>. В чем их отличие от </a:t>
-            </a:r>
-            <a:r>
-              <a:rPr lang="ru-RU" sz="2400" dirty="0" err="1" smtClean="0"/>
-              <a:t>многопеременных</a:t>
-            </a:r>
-            <a:r>
-              <a:rPr lang="ru-RU" sz="2400" dirty="0" smtClean="0"/>
-              <a:t> ВР. В каких случаях можно заменить такие походы на анализ набора отдельных </a:t>
-            </a:r>
-            <a:r>
-              <a:rPr lang="ru-RU" sz="2400" dirty="0" err="1" smtClean="0"/>
-              <a:t>однопеременных</a:t>
-            </a:r>
-            <a:r>
-              <a:rPr lang="ru-RU" sz="2400" dirty="0" smtClean="0"/>
-              <a:t> ВР.</a:t>
-            </a:r>
-          </a:p>
-          <a:p>
-            <a:r>
-              <a:rPr lang="ru-RU" sz="2400" dirty="0"/>
-              <a:t>Приведите примеры использования </a:t>
-            </a:r>
-            <a:r>
-              <a:rPr lang="ru-RU" sz="2400" b="1" dirty="0" smtClean="0"/>
-              <a:t>пространственных ВР</a:t>
-            </a:r>
-            <a:r>
-              <a:rPr lang="ru-RU" sz="2400" dirty="0"/>
-              <a:t>. В чем их отличие от </a:t>
-            </a:r>
-            <a:r>
-              <a:rPr lang="ru-RU" sz="2400" dirty="0" err="1"/>
-              <a:t>многопеременных</a:t>
-            </a:r>
-            <a:r>
-              <a:rPr lang="ru-RU" sz="2400" dirty="0"/>
-              <a:t> ВР. </a:t>
-            </a:r>
-            <a:r>
-              <a:rPr lang="ru-RU" sz="2400" dirty="0" smtClean="0"/>
-              <a:t>В каких случаях можно заменить такие походы на анализ набора отдельных </a:t>
-            </a:r>
-            <a:r>
-              <a:rPr lang="ru-RU" sz="2400" dirty="0" err="1" smtClean="0"/>
-              <a:t>однопеременных</a:t>
-            </a:r>
-            <a:r>
-              <a:rPr lang="ru-RU" sz="2400" dirty="0" smtClean="0"/>
-              <a:t> ВР.</a:t>
-            </a:r>
-          </a:p>
-          <a:p>
-            <a:endParaRPr lang="ru-RU" sz="2400" dirty="0"/>
-          </a:p>
-          <a:p>
-            <a:endParaRPr lang="ru-RU" sz="2400" dirty="0" smtClean="0"/>
-          </a:p>
-          <a:p>
-            <a:endParaRPr lang="ru-RU" sz="2400" dirty="0" smtClean="0"/>
-          </a:p>
-          <a:p>
-            <a:endParaRPr lang="ru-RU" sz="2400" dirty="0"/>
-          </a:p>
-        </p:txBody>
-      </p:sp>
-      <p:sp>
-        <p:nvSpPr>
-          <p:cNvPr id="4" name="Номер слайда 3"/>
-          <p:cNvSpPr>
-            <a:spLocks noGrp="1"/>
-          </p:cNvSpPr>
-          <p:nvPr>
-            <p:ph type="sldNum" sz="quarter" idx="12"/>
-          </p:nvPr>
-        </p:nvSpPr>
-        <p:spPr/>
-        <p:txBody>
-          <a:bodyPr/>
-          <a:lstStyle/>
-          <a:p>
-            <a:fld id="{45C3B737-A709-4ABC-AFE0-A6B067850C48}" type="slidenum">
-              <a:rPr lang="en-US" smtClean="0"/>
-              <a:t>21</a:t>
-            </a:fld>
-            <a:endParaRPr lang="en-US"/>
-          </a:p>
-        </p:txBody>
-      </p:sp>
-    </p:spTree>
-    <p:extLst>
-      <p:ext uri="{BB962C8B-B14F-4D97-AF65-F5344CB8AC3E}">
-        <p14:creationId xmlns:p14="http://schemas.microsoft.com/office/powerpoint/2010/main" val="418545075"/>
-      </p:ext>
-    </p:extLst>
-  </p:cSld>
-  <p:clrMapOvr>
-    <a:masterClrMapping/>
-  </p:clrMapOvr>
   <p:timing>
     <p:tnLst>
       <p:par>

--- a/Last/LEC/01-1_Intro.pptx
+++ b/Last/LEC/01-1_Intro.pptx
@@ -216,7 +216,7 @@
           <a:p>
             <a:fld id="{CDA96C9A-3213-B245-BC64-7E419D14BD9D}" type="datetimeFigureOut">
               <a:rPr lang="ru-RU" smtClean="0"/>
-              <a:t>04.05.2026</a:t>
+              <a:t>19.05.2026</a:t>
             </a:fld>
             <a:endParaRPr lang="ru-RU"/>
           </a:p>
@@ -1123,7 +1123,7 @@
           <a:p>
             <a:fld id="{BEE214BE-636D-8A45-BCA6-8B7ED77AA124}" type="datetime1">
               <a:rPr lang="ru-RU" smtClean="0"/>
-              <a:t>04.05.2026</a:t>
+              <a:t>19.05.2026</a:t>
             </a:fld>
             <a:endParaRPr lang="en-US"/>
           </a:p>
@@ -1293,7 +1293,7 @@
           <a:p>
             <a:fld id="{5855274A-4ED4-0146-A3E9-88EF200B5196}" type="datetime1">
               <a:rPr lang="ru-RU" smtClean="0"/>
-              <a:t>04.05.2026</a:t>
+              <a:t>19.05.2026</a:t>
             </a:fld>
             <a:endParaRPr lang="en-US"/>
           </a:p>
@@ -1473,7 +1473,7 @@
           <a:p>
             <a:fld id="{8A78DFF1-9FDC-144B-973E-B4B4609709DF}" type="datetime1">
               <a:rPr lang="ru-RU" smtClean="0"/>
-              <a:t>04.05.2026</a:t>
+              <a:t>19.05.2026</a:t>
             </a:fld>
             <a:endParaRPr lang="en-US"/>
           </a:p>
@@ -1643,7 +1643,7 @@
           <a:p>
             <a:fld id="{8233A339-F8AE-5C45-BEAE-07EF9DC78B60}" type="datetime1">
               <a:rPr lang="ru-RU" smtClean="0"/>
-              <a:t>04.05.2026</a:t>
+              <a:t>19.05.2026</a:t>
             </a:fld>
             <a:endParaRPr lang="en-US"/>
           </a:p>
@@ -1889,7 +1889,7 @@
           <a:p>
             <a:fld id="{7586FDE4-97E0-CE4A-988C-F30B221290A7}" type="datetime1">
               <a:rPr lang="ru-RU" smtClean="0"/>
-              <a:t>04.05.2026</a:t>
+              <a:t>19.05.2026</a:t>
             </a:fld>
             <a:endParaRPr lang="en-US"/>
           </a:p>
@@ -2121,7 +2121,7 @@
           <a:p>
             <a:fld id="{C36ECE8B-8DEC-154E-9F03-047C8DDA20DC}" type="datetime1">
               <a:rPr lang="ru-RU" smtClean="0"/>
-              <a:t>04.05.2026</a:t>
+              <a:t>19.05.2026</a:t>
             </a:fld>
             <a:endParaRPr lang="en-US"/>
           </a:p>
@@ -2488,7 +2488,7 @@
           <a:p>
             <a:fld id="{440816D5-BDB8-B34B-8ACA-ECBDD12E7321}" type="datetime1">
               <a:rPr lang="ru-RU" smtClean="0"/>
-              <a:t>04.05.2026</a:t>
+              <a:t>19.05.2026</a:t>
             </a:fld>
             <a:endParaRPr lang="en-US"/>
           </a:p>
@@ -2606,7 +2606,7 @@
           <a:p>
             <a:fld id="{8A8C589A-5627-764C-AF96-C1E2F9A00A4D}" type="datetime1">
               <a:rPr lang="ru-RU" smtClean="0"/>
-              <a:t>04.05.2026</a:t>
+              <a:t>19.05.2026</a:t>
             </a:fld>
             <a:endParaRPr lang="en-US"/>
           </a:p>
@@ -2701,7 +2701,7 @@
           <a:p>
             <a:fld id="{603EE0D0-1696-6D4F-B917-4AFB24A74E8B}" type="datetime1">
               <a:rPr lang="ru-RU" smtClean="0"/>
-              <a:t>04.05.2026</a:t>
+              <a:t>19.05.2026</a:t>
             </a:fld>
             <a:endParaRPr lang="en-US"/>
           </a:p>
@@ -2978,7 +2978,7 @@
           <a:p>
             <a:fld id="{13C8A91E-B09B-2240-9AA3-B1D4BCC6296E}" type="datetime1">
               <a:rPr lang="ru-RU" smtClean="0"/>
-              <a:t>04.05.2026</a:t>
+              <a:t>19.05.2026</a:t>
             </a:fld>
             <a:endParaRPr lang="en-US"/>
           </a:p>
@@ -3235,7 +3235,7 @@
           <a:p>
             <a:fld id="{3BE9760E-DA8D-6747-B31E-62858C8727B8}" type="datetime1">
               <a:rPr lang="ru-RU" smtClean="0"/>
-              <a:t>04.05.2026</a:t>
+              <a:t>19.05.2026</a:t>
             </a:fld>
             <a:endParaRPr lang="en-US"/>
           </a:p>
@@ -3448,7 +3448,7 @@
           <a:p>
             <a:fld id="{D31305DF-F750-CC43-967D-51A20925EE94}" type="datetime1">
               <a:rPr lang="ru-RU" smtClean="0"/>
-              <a:t>04.05.2026</a:t>
+              <a:t>19.05.2026</a:t>
             </a:fld>
             <a:endParaRPr lang="en-US"/>
           </a:p>
@@ -8419,11 +8419,7 @@
             </a:r>
             <a:r>
               <a:rPr lang="ru-RU" sz="2400" dirty="0" smtClean="0"/>
-              <a:t> ВР</a:t>
-            </a:r>
-            <a:r>
-              <a:rPr lang="ru-RU" sz="2400" dirty="0" smtClean="0"/>
-              <a:t>.</a:t>
+              <a:t> ВР.</a:t>
             </a:r>
           </a:p>
           <a:p>
@@ -8442,7 +8438,6 @@
               <a:rPr lang="ru-RU" sz="2400" dirty="0" smtClean="0"/>
               <a:t>Объясните в каких задачах нужны и в каких не нужно использовать методы анализа ВР. Чем задачи с использованием анализа ВР отличаются от задач для табличных данных, текстовых задач или задач обработки изображений.</a:t>
             </a:r>
-            <a:endParaRPr lang="ru-RU" sz="2400" dirty="0" smtClean="0"/>
           </a:p>
           <a:p>
             <a:endParaRPr lang="ru-RU" sz="2400" dirty="0"/>
@@ -8866,7 +8861,7 @@
         </p:blipFill>
         <p:spPr bwMode="auto">
           <a:xfrm>
-            <a:off x="7971692" y="3780052"/>
+            <a:off x="7937825" y="3780052"/>
             <a:ext cx="4117992" cy="2941423"/>
           </a:xfrm>
           <a:prstGeom prst="rect">
@@ -10968,7 +10963,7 @@
         </p:blipFill>
         <p:spPr>
           <a:xfrm>
-            <a:off x="392544" y="3977868"/>
+            <a:off x="459476" y="3977868"/>
             <a:ext cx="5021722" cy="2514432"/>
           </a:xfrm>
           <a:prstGeom prst="rect">
